--- a/guides-pptx/spryker-academy-fundamental.pptx
+++ b/guides-pptx/spryker-academy-fundamental.pptx
@@ -9414,7 +9414,7 @@
               </a:defRPr>
             </a:pPr>
             <a:r>
-              <a:t>Open src/SprykerAcademy/Yves/ContactRequestPage/ContactRequestPageFactory.php . Complete getContactRequestClient() by returning the provided dependency using ContactRequestPageDependencyProvider::CLIENT_HELLOWORLD .</a:t>
+              <a:t>Open src/SprykerAcademy/Yves/ContactRequestPage/ContactRequestPageFactory.php . Complete getContactRequestClient() by returning the provided dependency using ContactRequestPageDependencyProvider::CLIENT_CONTACT_REQUEST .</a:t>
             </a:r>
           </a:p>
         </p:txBody>

--- a/guides-pptx/spryker-academy-fundamental.pptx
+++ b/guides-pptx/spryker-academy-fundamental.pptx
@@ -4330,7 +4330,7 @@
               </a:defRPr>
             </a:pPr>
             <a:r>
-              <a:t>Open src/SprykerAcademy/Shared/ContactRequest/Transfer/contact_request.transfer.xml and add a DTO named ContactRequestResponse with: - Property message of type Message - Property isSuccessful of type bool</a:t>
+              <a:t>Open src/SprykerAcademy/Shared/ContactRequest/Transfer/contact_request.transfer.xml and add a DTO named ContactRequestResponse with: - Property contactRequest of type ContactRequest - Property isSuccessful of type bool</a:t>
             </a:r>
           </a:p>
           <a:p>
@@ -5253,7 +5253,7 @@
               </a:defRPr>
             </a:pPr>
             <a:r>
-              <a:t>The controller passes message (a ContactRequestTransfer ) to the template. Access object properties with dot notation: objectName.objectProperty .</a:t>
+              <a:t>The controller passes contactRequest (a ContactRequestTransfer ) to the template. Access object properties with dot notation: objectName.objectProperty .</a:t>
             </a:r>
           </a:p>
         </p:txBody>
@@ -5402,7 +5402,7 @@
               </a:defRPr>
             </a:pPr>
             <a:r>
-              <a:t>Open src/SprykerAcademy/Zed/ContactRequest/Presentation/Index/add.twig . Replace the placeholder 'show-message-name-here' with the actual message value using dot notation ( message.message ).</a:t>
+              <a:t>Open src/SprykerAcademy/Zed/ContactRequest/Presentation/Index/add.twig . Replace the placeholder 'show-contact-request-message-here' with the message of the contact request using dot notation ( contactRequest.message ).</a:t>
             </a:r>
           </a:p>
           <a:p>
@@ -7240,7 +7240,7 @@
               </a:defRPr>
             </a:pPr>
             <a:r>
-              <a:t>Part 2 of 2 - This guide focuses on showing the message in Yves.</a:t>
+              <a:t>Part 2 of 2 - This guide focuses on showing the contact request in Yves.</a:t>
             </a:r>
           </a:p>
         </p:txBody>
@@ -8809,7 +8809,7 @@
               </a:defRPr>
             </a:pPr>
             <a:r>
-              <a:t>Open src/SprykerAcademy/Client/ContactRequest/ContactRequestClient.php . Complete findContactRequest() by using the factory to create a ContactRequestStub and return the found message.</a:t>
+              <a:t>Open src/SprykerAcademy/Client/ContactRequest/ContactRequestClient.php . Complete findContactRequest() by using the factory to create a ContactRequestStub and return the found contact request.</a:t>
             </a:r>
           </a:p>
           <a:p>
@@ -9588,7 +9588,7 @@
               </a:defRPr>
             </a:pPr>
             <a:r>
-              <a:t>The template is already provided at src/SprykerAcademy/Yves/ContactRequestPage/Theme/default/views/contact-request/get.twig and expects a variable named message .</a:t>
+              <a:t>The template is already provided at src/SprykerAcademy/Yves/ContactRequestPage/Theme/default/views/contact-request/get.twig and expects a variable named contactRequest .</a:t>
             </a:r>
           </a:p>
           <a:p>
@@ -9618,7 +9618,7 @@
               </a:defRPr>
             </a:pPr>
             <a:r>
-              <a:t>Open src/SprykerAcademy/Yves/ContactRequestPage/Controller/IndexController.php . Complete getAction() : 1. Instantiate a ContactRequestCriteriaTransfer and set the message ID from the route parameter 2. Use getFactory() to access the ContactRequestClient 3. Find a message by the criteria and assign the result to $contactRequestResponseTransfer</a:t>
+              <a:t>Open src/SprykerAcademy/Yves/ContactRequestPage/Controller/IndexController.php . Complete getAction() : 1. Instantiate a ContactRequestCriteriaTransfer and set the contact request ID ( idContactRequest ) from the route parameter 2. Use getFactory() to access the ContactRequestClient 3. Find a contact request by the criteria and assign the result to $contactRequestResponseTransfer</a:t>
             </a:r>
           </a:p>
           <a:p>
@@ -9800,7 +9800,7 @@
               </a:defRPr>
             </a:pPr>
             <a:r>
-              <a:t>Open src/SprykerAcademy/Yves/ContactRequestPage/Plugin/Router/ContactRequestPageRouteProviderPlugin.php . In addContactRequestMessageGetRoute() , fill in the correct module name and controller name for the placeholders.</a:t>
+              <a:t>Open src/SprykerAcademy/Yves/ContactRequestPage/Plugin/Router/ContactRequestPageRouteProviderPlugin.php . In addContactRequestGetRoute() , fill in the correct module name and controller name for the placeholders.</a:t>
             </a:r>
           </a:p>
           <a:p>
@@ -9964,7 +9964,7 @@
               </a:defRPr>
             </a:pPr>
             <a:r>
-              <a:t>• Create a message via Back Office: http://backoffice.eu.spryker.local/contact-request/index/add</a:t>
+              <a:t>• Create a contact request via Back Office: http://backoffice.eu.spryker.local/contact-request/index/add</a:t>
             </a:r>
           </a:p>
           <a:p>
@@ -9979,7 +9979,7 @@
               </a:defRPr>
             </a:pPr>
             <a:r>
-              <a:t>• View the message in Yves using its ID: http://yves.eu.spryker.local/contact-request/1</a:t>
+              <a:t>• View the contact request in Yves using its idContactRequest : http://yves.eu.spryker.local/contact-request/1</a:t>
             </a:r>
           </a:p>
         </p:txBody>
@@ -19580,7 +19580,7 @@
                 </a:solidFill>
                 <a:latin typeface="Consolas"/>
               </a:rPr>
-              <a:t>   (table pyz_contact_request, namespace Orm\Zed\Message\Persistence). Run docker/sdk console propel:install.</a:t>
+              <a:t>   (table pyz_contact_request, namespace Orm\Zed\ContactRequest\Persistence). Run docker/sdk console propel:install.</a:t>
             </a:r>
           </a:p>
           <a:p>
@@ -19927,7 +19927,7 @@
                 </a:solidFill>
                 <a:latin typeface="Consolas"/>
               </a:rPr>
-              <a:t>   /contact-request/{idContactRequest} (route name contact-request/message/_idMessage_).</a:t>
+              <a:t>   /contact-request/{idContactRequest} (route parameter `idContactRequest`).</a:t>
             </a:r>
           </a:p>
           <a:p>
@@ -22835,7 +22835,7 @@
               </a:defRPr>
             </a:pPr>
             <a:r>
-              <a:t>• Add a fkCustomer property of type int to the Message transfer</a:t>
+              <a:t>• Add a fkCustomer property of type int to the ContactRequest transfer</a:t>
             </a:r>
           </a:p>
           <a:p>
@@ -22850,7 +22850,7 @@
               </a:defRPr>
             </a:pPr>
             <a:r>
-              <a:t>• Add a createdAt property of type string to the Message transfer</a:t>
+              <a:t>• Add a createdAt property of type string to the ContactRequest transfer</a:t>
             </a:r>
           </a:p>
           <a:p>
@@ -22880,7 +22880,7 @@
               </a:defRPr>
             </a:pPr>
             <a:r>
-              <a:t>• Add a new transfer named ContactRequestCollection with a property messages of type Message[]</a:t>
+              <a:t>• Add a new transfer named ContactRequestCollection with a property contactRequests of type ContactRequest[]</a:t>
             </a:r>
           </a:p>
           <a:p>
@@ -27016,7 +27016,7 @@
               </a:defRPr>
             </a:pPr>
             <a:r>
-              <a:t>• Use $this-&gt;castId($request-&gt;request-&gt;get('idContactRequest')) to safely extract and validate the message ID</a:t>
+              <a:t>• Use $this-&gt;castId($request-&gt;request-&gt;get('idContactRequest')) to safely extract and validate the contact request ID</a:t>
             </a:r>
           </a:p>
         </p:txBody>
@@ -27843,7 +27843,7 @@
                 </a:solidFill>
                 <a:latin typeface="Consolas"/>
               </a:rPr>
-              <a:t>            url: path('customer/messages'),</a:t>
+              <a:t>            url: path('customer/contact-requests'),</a:t>
             </a:r>
           </a:p>
           <a:p>
@@ -28034,7 +28034,7 @@
               </a:defRPr>
             </a:pPr>
             <a:r>
-              <a:t>❝ customer/messages is the route name ( ContactRequestController::ROUTE_CUSTOMER_CONTACT_REQUESTS ), not the path. Add the item only after the route is registered, otherwise path() fails on every account page. When you load the complete branch, the loader adds this item for you (between {# &gt;&gt;&gt; contact-request exercise #} markers) and removes it again when you load another branch.</a:t>
+              <a:t>❝ customer/contact-requests is the route name ( ContactRequestController::ROUTE_CUSTOMER_CONTACT_REQUESTS ), not the path. Add the item only after the route is registered, otherwise path() fails on every account page. When you load the complete branch, the loader adds this item for you (between {# &gt;&gt;&gt; contact-request exercise #} markers) and removes it again when you load another branch.</a:t>
             </a:r>
           </a:p>
           <a:p>
@@ -31706,7 +31706,7 @@
                 </a:solidFill>
                 <a:latin typeface="Consolas"/>
               </a:rPr>
-              <a:t>{% include molecule('ajax-form-submitter') with { attributes: { 'trigger-attribute': 'data-message-ajax-submit', 'provider-class-name': ajaxProviderClass } } only %}</a:t>
+              <a:t>{% include molecule('ajax-form-submitter') with { attributes: { 'trigger-attribute': 'data-contact-request-ajax-submit', 'provider-class-name': ajaxProviderClass } } only %}</a:t>
             </a:r>
           </a:p>
           <a:p>
@@ -31721,7 +31721,7 @@
               </a:defRPr>
             </a:pPr>
             <a:r>
-              <a:t>Form buttons use data-message-ajax-submit and formaction to point to the async endpoint:</a:t>
+              <a:t>Form buttons use data-contact-request-ajax-submit and formaction to point to the async endpoint:</a:t>
             </a:r>
           </a:p>
           <a:p>
@@ -31749,7 +31749,7 @@
                 </a:solidFill>
                 <a:latin typeface="Consolas"/>
               </a:rPr>
-              <a:t> data-message-ajax-submit formaction=</a:t>
+              <a:t> data-contact-request-ajax-submit formaction=</a:t>
             </a:r>
             <a:r>
               <a:rPr sz="900">
@@ -31813,7 +31813,7 @@
                 </a:solidFill>
                 <a:latin typeface="Consolas"/>
               </a:rPr>
-              <a:t> data-message-ajax-submit formaction=</a:t>
+              <a:t> data-contact-request-ajax-submit formaction=</a:t>
             </a:r>
             <a:r>
               <a:rPr sz="900">
@@ -31983,7 +31983,7 @@
               </a:defRPr>
             </a:pPr>
             <a:r>
-              <a:t>• MessageAsyncController — addAction() and deleteAction() return JsonResponse instead of redirects</a:t>
+              <a:t>• ContactRequestAsyncController — addAction() and deleteAction() return JsonResponse instead of redirects</a:t>
             </a:r>
           </a:p>
           <a:p>
@@ -32013,7 +32013,7 @@
               </a:defRPr>
             </a:pPr>
             <a:r>
-              <a:t>• message-async.twig — Content fragment re-rendered server-side after each operation</a:t>
+              <a:t>• contact-request-async.twig — Content fragment re-rendered server-side after each operation</a:t>
             </a:r>
           </a:p>
           <a:p>
@@ -32979,7 +32979,7 @@
                 </a:solidFill>
                 <a:latin typeface="Consolas"/>
               </a:rPr>
-              <a:t>"Message"</a:t>
+              <a:t>"ContactRequest"</a:t>
             </a:r>
             <a:r>
               <a:rPr sz="900" b="1">
@@ -33699,7 +33699,7 @@
                 </a:solidFill>
                 <a:latin typeface="Consolas"/>
               </a:rPr>
-              <a:t>"message"</a:t>
+              <a:t>"contactRequest"</a:t>
             </a:r>
             <a:r>
               <a:rPr sz="900">
@@ -33717,7 +33717,7 @@
                 </a:solidFill>
                 <a:latin typeface="Consolas"/>
               </a:rPr>
-              <a:t>"Message"</a:t>
+              <a:t>"ContactRequest"</a:t>
             </a:r>
             <a:r>
               <a:rPr sz="900" b="1">
@@ -39658,7 +39658,7 @@
                 </a:solidFill>
                 <a:latin typeface="Consolas"/>
               </a:rPr>
-              <a:t>'@ContactRequestPage/views/message/get.twig'</a:t>
+              <a:t>'@ContactRequestPage/views/contact-request/get.twig'</a:t>
             </a:r>
             <a:r>
               <a:rPr sz="900">
@@ -40895,7 +40895,7 @@
                 </a:solidFill>
                 <a:latin typeface="Consolas"/>
               </a:rPr>
-              <a:t>'/contact-request/gateway/find-message'</a:t>
+              <a:t>'/contact-request/gateway/find-contact-request'</a:t>
             </a:r>
             <a:r>
               <a:rPr sz="900">
@@ -41508,7 +41508,7 @@
               </a:defRPr>
             </a:pPr>
             <a:r>
-              <a:t>Gateway URL convention: /contact-request/gateway/find-message maps to ContactRequest module -&gt; GatewayController -&gt; findContactRequestAction() . Transfers are serialized/deserialized automatically.</a:t>
+              <a:t>Gateway URL convention: /contact-request/gateway/find-contact-request maps to ContactRequest module -&gt; GatewayController -&gt; findContactRequestAction() . Transfers are serialized/deserialized automatically.</a:t>
             </a:r>
           </a:p>
         </p:txBody>
@@ -62938,7 +62938,7 @@
                 </a:solidFill>
                 <a:latin typeface="Consolas"/>
               </a:rPr>
-              <a:t>      -&gt; ZedRequestClient::call('/contact-request/gateway/find-message', $transfer)</a:t>
+              <a:t>      -&gt; ZedRequestClient::call('/contact-request/gateway/find-contact-request', $transfer)</a:t>
             </a:r>
           </a:p>
           <a:p>
@@ -64566,7 +64566,7 @@
               </a:defRPr>
             </a:pPr>
             <a:r>
-              <a:t>Verify the pyz_contact_request table was created in the database (using a tool of your choice). Locate the generated entity in src/Orm/Zed/Message/Persistence/ and its subfolders.</a:t>
+              <a:t>Verify the pyz_contact_request table was created in the database (using a tool of your choice). Locate the generated entity in src/Orm/Zed/ContactRequest/Persistence/ and its subfolders.</a:t>
             </a:r>
           </a:p>
         </p:txBody>

--- a/guides-pptx/spryker-academy-fundamental.pptx
+++ b/guides-pptx/spryker-academy-fundamental.pptx
@@ -211,6 +211,7 @@
     <p:sldId id="459" r:id="rId210"/>
     <p:sldId id="460" r:id="rId211"/>
     <p:sldId id="461" r:id="rId212"/>
+    <p:sldId id="462" r:id="rId213"/>
   </p:sldIdLst>
   <p:sldSz cx="12191695" cy="6858000" type="screen4x3"/>
   <p:notesSz cx="6858000" cy="9144000"/>
@@ -7826,6 +7827,21 @@
               <a:t>Hint: The Writer returns a ContactRequestTransfer ; the Reader returns a ContactRequestResponseTransfer . No Business Factory is needed — the container injects ContactRequestEntityManagerInterface into the Writer and ContactRequestRepositoryInterface into the Reader automatically.</a:t>
             </a:r>
           </a:p>
+          <a:p>
+            <a:pPr>
+              <a:spcAft>
+                <a:spcPts val="800"/>
+              </a:spcAft>
+              <a:defRPr sz="1600">
+                <a:solidFill>
+                  <a:srgbClr val="1A1A1A"/>
+                </a:solidFill>
+              </a:defRPr>
+            </a:pPr>
+            <a:r>
+              <a:t>ContactRequestFacadeTest checks this step: it mocks the Writer and the Reader and asserts the Facade hands their result back, so leaving either method empty fails the suite.</a:t>
+            </a:r>
+          </a:p>
         </p:txBody>
       </p:sp>
     </p:spTree>
@@ -8959,7 +8975,7 @@
               </a:defRPr>
             </a:pPr>
             <a:r>
-              <a:t>This tests the ContactRequestReader and ContactRequestWriter business logic. All tests should pass if your implementation is correct.</a:t>
+              <a:t>This tests the ContactRequestReader, the ContactRequestWriter and the ContactRequestFacade. All tests should pass if your implementation is correct.</a:t>
             </a:r>
           </a:p>
         </p:txBody>
@@ -25051,7 +25067,7 @@
               </a:defRPr>
             </a:pPr>
             <a:r>
-              <a:t>Open src/SprykerAcademy/Zed/ContactRequest/Persistence/Propel/Schema/pyz_contact_request.schema.xml and: 1. Add a new column fk_customer of type INTEGER (not required, since existing messages have no customer) 2. Add a &lt;foreign-key&gt; element that references the spy_customer table, mapping fk_customer to id_customer with onDelete="CASCADE" 3. Add &lt;behavior name="timestampable"/&gt; — Propel will auto-add created_at and updated_at TIMESTAMP columns</a:t>
+              <a:t>Open src/SprykerAcademy/Zed/ContactRequest/Persistence/Propel/Schema/pyz_contact_request.schema.xml and: 1. Add a new column fk_customer of type INTEGER (not required, since existing contact requests have no customer) 2. Add fk_customer to the existing pyz_contact_request-message unique index, so two customers can send the same text 3. Add a &lt;foreign-key&gt; element that references the spy_customer table, mapping fk_customer to id_customer with onDelete="CASCADE" 4. Add &lt;behavior name="timestampable"/&gt; — Propel will auto-add created_at and updated_at TIMESTAMP columns</a:t>
             </a:r>
           </a:p>
           <a:p>
@@ -29560,40 +29576,37 @@
               </a:defRPr>
             </a:pPr>
             <a:r>
-              <a:t>• src/SprykerAcademy/Yves/CustomerPage/Theme/.../views/contact-request/list.twig — The Twig template showing the message table with delete buttons and the add form</a:t>
-            </a:r>
-          </a:p>
-          <a:p>
-            <a:pPr>
-              <a:spcAft>
-                <a:spcPts val="800"/>
-              </a:spcAft>
-              <a:defRPr sz="1600">
+              <a:t>• src/SprykerAcademy/Yves/CustomerPage/Theme/.../views/contact-request/list.twig — The Twig template showing the contact request table with delete buttons and the add form</a:t>
+            </a:r>
+          </a:p>
+          <a:p>
+            <a:pPr>
+              <a:spcAft>
+                <a:spcPts val="400"/>
+              </a:spcAft>
+              <a:defRPr sz="1500">
                 <a:solidFill>
                   <a:srgbClr val="1A1A1A"/>
                 </a:solidFill>
               </a:defRPr>
             </a:pPr>
             <a:r>
-              <a:t>Take a moment to review these files to understand: - How Spryker’s template override mechanism works (project-level Twig overrides vendor templates by matching the file path) - How the form is rendered with form_start / form_widget / form_end (Symfony form rendering helpers) - How each table row has a mini POST form for the delete button (no link — delete is always POST)</a:t>
-            </a:r>
-          </a:p>
-          <a:p>
-            <a:pPr>
-              <a:spcBef>
-                <a:spcPts val="800"/>
-              </a:spcBef>
+              <a:t>• src/SprykerAcademy/Zed/ContactRequest/Business/Deleter/ContactRequestDeleter.php and the Facade’s deleteContactRequest() — the delete business model, so Part 4 has something to call</a:t>
+            </a:r>
+          </a:p>
+          <a:p>
+            <a:pPr>
               <a:spcAft>
                 <a:spcPts val="400"/>
               </a:spcAft>
-              <a:defRPr sz="1700" b="1">
+              <a:defRPr sz="1500">
                 <a:solidFill>
                   <a:srgbClr val="1A1A1A"/>
                 </a:solidFill>
               </a:defRPr>
             </a:pPr>
             <a:r>
-              <a:t>6.7 Sidebar Menu Item</a:t>
+              <a:t>• ContactRequestController::castId() — the numeric-id guard described in 6.4</a:t>
             </a:r>
           </a:p>
         </p:txBody>
@@ -29727,121 +29740,40 @@
               </a:defRPr>
             </a:pPr>
             <a:r>
+              <a:t>Take a moment to review these files to understand: - How Spryker’s template override mechanism works (project-level Twig overrides vendor templates by matching the file path) - How the form is rendered with form_start / form_widget / form_end (Symfony form rendering helpers) - How each table row has a mini POST form for the delete button (no link — delete is always POST)</a:t>
+            </a:r>
+          </a:p>
+          <a:p>
+            <a:pPr>
+              <a:spcBef>
+                <a:spcPts val="800"/>
+              </a:spcBef>
+              <a:spcAft>
+                <a:spcPts val="400"/>
+              </a:spcAft>
+              <a:defRPr sz="1700" b="1">
+                <a:solidFill>
+                  <a:srgbClr val="1A1A1A"/>
+                </a:solidFill>
+              </a:defRPr>
+            </a:pPr>
+            <a:r>
+              <a:t>6.7 Sidebar Menu Item</a:t>
+            </a:r>
+          </a:p>
+          <a:p>
+            <a:pPr>
+              <a:spcAft>
+                <a:spcPts val="800"/>
+              </a:spcAft>
+              <a:defRPr sz="1600">
+                <a:solidFill>
+                  <a:srgbClr val="1A1A1A"/>
+                </a:solidFill>
+              </a:defRPr>
+            </a:pPr>
+            <a:r>
               <a:t>Once the route exists, add a “My Contact Requests” entry to the customer account sidebar. The project overrides that molecule in src/Pyz/Yves/CustomerPage/Theme/default/components/molecules/navigation-sidebar/navigation-sidebar.twig ; append one more entry to its items array:</a:t>
-            </a:r>
-          </a:p>
-          <a:p>
-            <a:pPr>
-              <a:spcBef>
-                <a:spcPts val="0"/>
-              </a:spcBef>
-              <a:spcAft>
-                <a:spcPts val="0"/>
-              </a:spcAft>
-            </a:pPr>
-            <a:r>
-              <a:rPr sz="900">
-                <a:solidFill>
-                  <a:srgbClr val="2D2D2D"/>
-                </a:solidFill>
-                <a:latin typeface="Consolas"/>
-              </a:rPr>
-              <a:t>        {</a:t>
-            </a:r>
-          </a:p>
-          <a:p>
-            <a:pPr>
-              <a:spcBef>
-                <a:spcPts val="0"/>
-              </a:spcBef>
-              <a:spcAft>
-                <a:spcPts val="0"/>
-              </a:spcAft>
-            </a:pPr>
-            <a:r>
-              <a:rPr sz="900">
-                <a:solidFill>
-                  <a:srgbClr val="2D2D2D"/>
-                </a:solidFill>
-                <a:latin typeface="Consolas"/>
-              </a:rPr>
-              <a:t>            name: 'contact-requests',</a:t>
-            </a:r>
-          </a:p>
-          <a:p>
-            <a:pPr>
-              <a:spcBef>
-                <a:spcPts val="0"/>
-              </a:spcBef>
-              <a:spcAft>
-                <a:spcPts val="0"/>
-              </a:spcAft>
-            </a:pPr>
-            <a:r>
-              <a:rPr sz="900">
-                <a:solidFill>
-                  <a:srgbClr val="2D2D2D"/>
-                </a:solidFill>
-                <a:latin typeface="Consolas"/>
-              </a:rPr>
-              <a:t>            url: path('customer/contact-requests'),</a:t>
-            </a:r>
-          </a:p>
-          <a:p>
-            <a:pPr>
-              <a:spcBef>
-                <a:spcPts val="0"/>
-              </a:spcBef>
-              <a:spcAft>
-                <a:spcPts val="0"/>
-              </a:spcAft>
-            </a:pPr>
-            <a:r>
-              <a:rPr sz="900">
-                <a:solidFill>
-                  <a:srgbClr val="2D2D2D"/>
-                </a:solidFill>
-                <a:latin typeface="Consolas"/>
-              </a:rPr>
-              <a:t>            label: 'My Contact Requests',</a:t>
-            </a:r>
-          </a:p>
-          <a:p>
-            <a:pPr>
-              <a:spcBef>
-                <a:spcPts val="0"/>
-              </a:spcBef>
-              <a:spcAft>
-                <a:spcPts val="0"/>
-              </a:spcAft>
-            </a:pPr>
-            <a:r>
-              <a:rPr sz="900">
-                <a:solidFill>
-                  <a:srgbClr val="2D2D2D"/>
-                </a:solidFill>
-                <a:latin typeface="Consolas"/>
-              </a:rPr>
-              <a:t>            icon: 'envelopes',</a:t>
-            </a:r>
-          </a:p>
-          <a:p>
-            <a:pPr>
-              <a:spcBef>
-                <a:spcPts val="0"/>
-              </a:spcBef>
-              <a:spcAft>
-                <a:spcPts val="0"/>
-              </a:spcAft>
-            </a:pPr>
-            <a:r>
-              <a:rPr sz="900">
-                <a:solidFill>
-                  <a:srgbClr val="2D2D2D"/>
-                </a:solidFill>
-                <a:latin typeface="Consolas"/>
-              </a:rPr>
-              <a:t>        },</a:t>
             </a:r>
           </a:p>
         </p:txBody>
@@ -29965,88 +29897,116 @@
           <a:lstStyle/>
           <a:p>
             <a:pPr>
-              <a:spcAft>
-                <a:spcPts val="800"/>
-              </a:spcAft>
-              <a:defRPr sz="1400" i="1">
-                <a:solidFill>
-                  <a:srgbClr val="888888"/>
-                </a:solidFill>
-              </a:defRPr>
-            </a:pPr>
-            <a:r>
-              <a:t>❝ customer/contact-requests is the route name ( ContactRequestController::ROUTE_CUSTOMER_CONTACT_REQUESTS ), not the path. Add the item only after the route is registered, otherwise path() fails on every account page. name is what the sidebar compares against the activePage the list page sets, so it has to read contact-requests for the entry to be highlighted. Do not wrap the entry in a Twig comment: the whole items array lives inside one {% define data = {...} %} tag, and a {# ... #} in there is read as an unclosed { , which kills every account page with a SyntaxError . When you load the complete branch, the loader adds this item for you and removes it again when you load another branch.</a:t>
-            </a:r>
-          </a:p>
-          <a:p>
-            <a:pPr>
-              <a:spcAft>
-                <a:spcPts val="800"/>
-              </a:spcAft>
-              <a:defRPr sz="1600">
-                <a:solidFill>
-                  <a:srgbClr val="1A1A1A"/>
-                </a:solidFill>
-              </a:defRPr>
-            </a:pPr>
-            <a:r>
-              <a:t>Clear cache:</a:t>
-            </a:r>
-          </a:p>
-          <a:p>
-            <a:pPr>
-              <a:spcBef>
-                <a:spcPts val="0"/>
-              </a:spcBef>
-              <a:spcAft>
-                <a:spcPts val="0"/>
-              </a:spcAft>
-            </a:pPr>
-            <a:r>
-              <a:rPr sz="900">
-                <a:solidFill>
-                  <a:srgbClr val="2D2D2D"/>
-                </a:solidFill>
-                <a:latin typeface="Consolas"/>
-              </a:rPr>
-              <a:t>docker/sdk</a:t>
-            </a:r>
-            <a:r>
-              <a:rPr sz="900">
-                <a:solidFill>
-                  <a:srgbClr val="2D2D2D"/>
-                </a:solidFill>
-                <a:latin typeface="Consolas"/>
-              </a:rPr>
-              <a:t> console cache:empty-all</a:t>
-            </a:r>
-          </a:p>
-          <a:p>
-            <a:pPr>
-              <a:spcBef>
-                <a:spcPts val="0"/>
-              </a:spcBef>
-              <a:spcAft>
-                <a:spcPts val="0"/>
-              </a:spcAft>
-            </a:pPr>
-            <a:r>
-              <a:rPr sz="900">
-                <a:solidFill>
-                  <a:srgbClr val="2D2D2D"/>
-                </a:solidFill>
-                <a:latin typeface="Consolas"/>
-              </a:rPr>
-              <a:t>docker/sdk</a:t>
-            </a:r>
-            <a:r>
-              <a:rPr sz="900">
-                <a:solidFill>
-                  <a:srgbClr val="2D2D2D"/>
-                </a:solidFill>
-                <a:latin typeface="Consolas"/>
-              </a:rPr>
-              <a:t> console propel:model:build</a:t>
+              <a:spcBef>
+                <a:spcPts val="0"/>
+              </a:spcBef>
+              <a:spcAft>
+                <a:spcPts val="0"/>
+              </a:spcAft>
+            </a:pPr>
+            <a:r>
+              <a:rPr sz="900">
+                <a:solidFill>
+                  <a:srgbClr val="2D2D2D"/>
+                </a:solidFill>
+                <a:latin typeface="Consolas"/>
+              </a:rPr>
+              <a:t>        {</a:t>
+            </a:r>
+          </a:p>
+          <a:p>
+            <a:pPr>
+              <a:spcBef>
+                <a:spcPts val="0"/>
+              </a:spcBef>
+              <a:spcAft>
+                <a:spcPts val="0"/>
+              </a:spcAft>
+            </a:pPr>
+            <a:r>
+              <a:rPr sz="900">
+                <a:solidFill>
+                  <a:srgbClr val="2D2D2D"/>
+                </a:solidFill>
+                <a:latin typeface="Consolas"/>
+              </a:rPr>
+              <a:t>            name: 'contact-requests',</a:t>
+            </a:r>
+          </a:p>
+          <a:p>
+            <a:pPr>
+              <a:spcBef>
+                <a:spcPts val="0"/>
+              </a:spcBef>
+              <a:spcAft>
+                <a:spcPts val="0"/>
+              </a:spcAft>
+            </a:pPr>
+            <a:r>
+              <a:rPr sz="900">
+                <a:solidFill>
+                  <a:srgbClr val="2D2D2D"/>
+                </a:solidFill>
+                <a:latin typeface="Consolas"/>
+              </a:rPr>
+              <a:t>            url: path('customer/contact-requests'),</a:t>
+            </a:r>
+          </a:p>
+          <a:p>
+            <a:pPr>
+              <a:spcBef>
+                <a:spcPts val="0"/>
+              </a:spcBef>
+              <a:spcAft>
+                <a:spcPts val="0"/>
+              </a:spcAft>
+            </a:pPr>
+            <a:r>
+              <a:rPr sz="900">
+                <a:solidFill>
+                  <a:srgbClr val="2D2D2D"/>
+                </a:solidFill>
+                <a:latin typeface="Consolas"/>
+              </a:rPr>
+              <a:t>            label: 'My Contact Requests',</a:t>
+            </a:r>
+          </a:p>
+          <a:p>
+            <a:pPr>
+              <a:spcBef>
+                <a:spcPts val="0"/>
+              </a:spcBef>
+              <a:spcAft>
+                <a:spcPts val="0"/>
+              </a:spcAft>
+            </a:pPr>
+            <a:r>
+              <a:rPr sz="900">
+                <a:solidFill>
+                  <a:srgbClr val="2D2D2D"/>
+                </a:solidFill>
+                <a:latin typeface="Consolas"/>
+              </a:rPr>
+              <a:t>            icon: 'envelopes',</a:t>
+            </a:r>
+          </a:p>
+          <a:p>
+            <a:pPr>
+              <a:spcBef>
+                <a:spcPts val="0"/>
+              </a:spcBef>
+              <a:spcAft>
+                <a:spcPts val="0"/>
+              </a:spcAft>
+            </a:pPr>
+            <a:r>
+              <a:rPr sz="900">
+                <a:solidFill>
+                  <a:srgbClr val="2D2D2D"/>
+                </a:solidFill>
+                <a:latin typeface="Consolas"/>
+              </a:rPr>
+              <a:t>        },</a:t>
             </a:r>
           </a:p>
         </p:txBody>
@@ -30099,7 +30059,7 @@
               </a:defRPr>
             </a:pPr>
             <a:r>
-              <a:t>Best Practices Applied in This Exercise</a:t>
+              <a:t>Part 6: Extend the CustomerPage Module (cont.)</a:t>
             </a:r>
           </a:p>
         </p:txBody>
@@ -30170,130 +30130,88 @@
           <a:lstStyle/>
           <a:p>
             <a:pPr>
-              <a:spcBef>
-                <a:spcPts val="1200"/>
-              </a:spcBef>
-              <a:spcAft>
-                <a:spcPts val="600"/>
-              </a:spcAft>
-              <a:defRPr sz="2000" b="1">
+              <a:spcAft>
+                <a:spcPts val="800"/>
+              </a:spcAft>
+              <a:defRPr sz="1400" i="1">
+                <a:solidFill>
+                  <a:srgbClr val="888888"/>
+                </a:solidFill>
+              </a:defRPr>
+            </a:pPr>
+            <a:r>
+              <a:t>❝ customer/contact-requests is the route name ( ContactRequestController::ROUTE_CUSTOMER_CONTACT_REQUESTS ), not the path. Add the item only after the route is registered, otherwise path() fails on every account page. name is what the sidebar compares against the activePage the list page sets, so it has to read contact-requests for the entry to be highlighted. Do not wrap the entry in a Twig comment: the whole items array lives inside one {% define data = {...} %} tag, and a {# ... #} in there is read as an unclosed { , which kills every account page with a SyntaxError . When you load the complete branch, the loader adds this item for you and removes it again when you load another branch.</a:t>
+            </a:r>
+          </a:p>
+          <a:p>
+            <a:pPr>
+              <a:spcAft>
+                <a:spcPts val="800"/>
+              </a:spcAft>
+              <a:defRPr sz="1600">
                 <a:solidFill>
                   <a:srgbClr val="1A1A1A"/>
                 </a:solidFill>
               </a:defRPr>
             </a:pPr>
             <a:r>
-              <a:t>SOLID: Single Responsibility for Business Models</a:t>
-            </a:r>
-          </a:p>
-          <a:p>
-            <a:pPr>
-              <a:spcAft>
-                <a:spcPts val="800"/>
-              </a:spcAft>
-              <a:defRPr sz="1600">
-                <a:solidFill>
-                  <a:srgbClr val="1A1A1A"/>
-                </a:solidFill>
-              </a:defRPr>
-            </a:pPr>
-            <a:r>
-              <a:t>The business layer separates concerns into dedicated classes:</a:t>
-            </a:r>
-          </a:p>
-          <a:p>
-            <a:pPr>
-              <a:spcAft>
-                <a:spcPts val="100"/>
-              </a:spcAft>
-              <a:defRPr sz="1000">
-                <a:solidFill>
-                  <a:srgbClr val="1A1A1A"/>
-                </a:solidFill>
-                <a:latin typeface="Consolas"/>
-              </a:defRPr>
-            </a:pPr>
-            <a:r>
-              <a:t>Class                  Responsibility                                   </a:t>
-            </a:r>
-          </a:p>
-          <a:p>
-            <a:pPr>
-              <a:spcAft>
-                <a:spcPts val="100"/>
-              </a:spcAft>
-              <a:defRPr sz="1000">
-                <a:solidFill>
-                  <a:srgbClr val="1A1A1A"/>
-                </a:solidFill>
-                <a:latin typeface="Consolas"/>
-              </a:defRPr>
-            </a:pPr>
-            <a:r>
-              <a:t>---------------------  -------------------------------------------------</a:t>
-            </a:r>
-          </a:p>
-          <a:p>
-            <a:pPr>
-              <a:spcAft>
-                <a:spcPts val="100"/>
-              </a:spcAft>
-              <a:defRPr sz="1000">
-                <a:solidFill>
-                  <a:srgbClr val="1A1A1A"/>
-                </a:solidFill>
-                <a:latin typeface="Consolas"/>
-              </a:defRPr>
-            </a:pPr>
-            <a:r>
-              <a:t>ContactRequestReader   Reading/querying messages (uses Repository)      </a:t>
-            </a:r>
-          </a:p>
-          <a:p>
-            <a:pPr>
-              <a:spcAft>
-                <a:spcPts val="100"/>
-              </a:spcAft>
-              <a:defRPr sz="1000">
-                <a:solidFill>
-                  <a:srgbClr val="1A1A1A"/>
-                </a:solidFill>
-                <a:latin typeface="Consolas"/>
-              </a:defRPr>
-            </a:pPr>
-            <a:r>
-              <a:t>ContactRequestWriter   Creating/persisting messages (uses EntityManager)</a:t>
-            </a:r>
-          </a:p>
-          <a:p>
-            <a:pPr>
-              <a:spcAft>
-                <a:spcPts val="100"/>
-              </a:spcAft>
-              <a:defRPr sz="1000">
-                <a:solidFill>
-                  <a:srgbClr val="1A1A1A"/>
-                </a:solidFill>
-                <a:latin typeface="Consolas"/>
-              </a:defRPr>
-            </a:pPr>
-            <a:r>
-              <a:t>ContactRequestDeleter  Deleting messages (uses EntityManager)</a:t>
-            </a:r>
-          </a:p>
-          <a:p>
-            <a:pPr>
-              <a:spcAft>
-                <a:spcPts val="800"/>
-              </a:spcAft>
-              <a:defRPr sz="1600">
-                <a:solidFill>
-                  <a:srgbClr val="1A1A1A"/>
-                </a:solidFill>
-              </a:defRPr>
-            </a:pPr>
-            <a:r>
-              <a:t>Each class has one reason to change . The Writer does not know how to delete. The Deleter does not know how to create. The Facade orchestrates all three through the BusinessFactory.</a:t>
+              <a:t>Clear cache:</a:t>
+            </a:r>
+          </a:p>
+          <a:p>
+            <a:pPr>
+              <a:spcBef>
+                <a:spcPts val="0"/>
+              </a:spcBef>
+              <a:spcAft>
+                <a:spcPts val="0"/>
+              </a:spcAft>
+            </a:pPr>
+            <a:r>
+              <a:rPr sz="900">
+                <a:solidFill>
+                  <a:srgbClr val="2D2D2D"/>
+                </a:solidFill>
+                <a:latin typeface="Consolas"/>
+              </a:rPr>
+              <a:t>docker/sdk</a:t>
+            </a:r>
+            <a:r>
+              <a:rPr sz="900">
+                <a:solidFill>
+                  <a:srgbClr val="2D2D2D"/>
+                </a:solidFill>
+                <a:latin typeface="Consolas"/>
+              </a:rPr>
+              <a:t> console cache:empty-all</a:t>
+            </a:r>
+          </a:p>
+          <a:p>
+            <a:pPr>
+              <a:spcBef>
+                <a:spcPts val="0"/>
+              </a:spcBef>
+              <a:spcAft>
+                <a:spcPts val="0"/>
+              </a:spcAft>
+            </a:pPr>
+            <a:r>
+              <a:rPr sz="900">
+                <a:solidFill>
+                  <a:srgbClr val="2D2D2D"/>
+                </a:solidFill>
+                <a:latin typeface="Consolas"/>
+              </a:rPr>
+              <a:t>docker/sdk</a:t>
+            </a:r>
+            <a:r>
+              <a:rPr sz="900">
+                <a:solidFill>
+                  <a:srgbClr val="2D2D2D"/>
+                </a:solidFill>
+                <a:latin typeface="Consolas"/>
+              </a:rPr>
+              <a:t> console propel:model:build</a:t>
             </a:r>
           </a:p>
         </p:txBody>
@@ -30346,7 +30264,7 @@
               </a:defRPr>
             </a:pPr>
             <a:r>
-              <a:t>Form Data Binding with Transfer Objects</a:t>
+              <a:t>Best Practices Applied in This Exercise</a:t>
             </a:r>
           </a:p>
         </p:txBody>
@@ -30417,6 +30335,24 @@
           <a:lstStyle/>
           <a:p>
             <a:pPr>
+              <a:spcBef>
+                <a:spcPts val="1200"/>
+              </a:spcBef>
+              <a:spcAft>
+                <a:spcPts val="600"/>
+              </a:spcAft>
+              <a:defRPr sz="2000" b="1">
+                <a:solidFill>
+                  <a:srgbClr val="1A1A1A"/>
+                </a:solidFill>
+              </a:defRPr>
+            </a:pPr>
+            <a:r>
+              <a:t>SOLID: Single Responsibility for Business Models</a:t>
+            </a:r>
+          </a:p>
+          <a:p>
+            <a:pPr>
               <a:spcAft>
                 <a:spcPts val="800"/>
               </a:spcAft>
@@ -30427,263 +30363,87 @@
               </a:defRPr>
             </a:pPr>
             <a:r>
-              <a:t>Instead of extracting form data from arrays:</a:t>
-            </a:r>
-          </a:p>
-          <a:p>
-            <a:pPr>
-              <a:spcBef>
-                <a:spcPts val="0"/>
-              </a:spcBef>
-              <a:spcAft>
-                <a:spcPts val="0"/>
-              </a:spcAft>
-            </a:pPr>
-            <a:r>
-              <a:rPr sz="900" i="1">
-                <a:solidFill>
-                  <a:srgbClr val="60A0B0"/>
-                </a:solidFill>
-                <a:latin typeface="Consolas"/>
-              </a:rPr>
-              <a:t>// Avoid this</a:t>
-            </a:r>
-          </a:p>
-          <a:p>
-            <a:pPr>
-              <a:spcBef>
-                <a:spcPts val="0"/>
-              </a:spcBef>
-              <a:spcAft>
-                <a:spcPts val="0"/>
-              </a:spcAft>
-            </a:pPr>
-            <a:r>
-              <a:rPr sz="900">
-                <a:solidFill>
-                  <a:srgbClr val="19177C"/>
-                </a:solidFill>
-                <a:latin typeface="Consolas"/>
-              </a:rPr>
-              <a:t>$formData</a:t>
-            </a:r>
-            <a:r>
-              <a:rPr sz="900">
-                <a:solidFill>
-                  <a:srgbClr val="2D2D2D"/>
-                </a:solidFill>
-                <a:latin typeface="Consolas"/>
-              </a:rPr>
-              <a:t> </a:t>
-            </a:r>
-            <a:r>
-              <a:rPr sz="900">
-                <a:solidFill>
-                  <a:srgbClr val="666666"/>
-                </a:solidFill>
-                <a:latin typeface="Consolas"/>
-              </a:rPr>
-              <a:t>=</a:t>
-            </a:r>
-            <a:r>
-              <a:rPr sz="900">
-                <a:solidFill>
-                  <a:srgbClr val="2D2D2D"/>
-                </a:solidFill>
-                <a:latin typeface="Consolas"/>
-              </a:rPr>
-              <a:t> </a:t>
-            </a:r>
-            <a:r>
-              <a:rPr sz="900">
-                <a:solidFill>
-                  <a:srgbClr val="19177C"/>
-                </a:solidFill>
-                <a:latin typeface="Consolas"/>
-              </a:rPr>
-              <a:t>$messageForm</a:t>
-            </a:r>
-            <a:r>
-              <a:rPr sz="900">
-                <a:solidFill>
-                  <a:srgbClr val="2D2D2D"/>
-                </a:solidFill>
-                <a:latin typeface="Consolas"/>
-              </a:rPr>
-              <a:t>-&gt;getData()</a:t>
-            </a:r>
-            <a:r>
-              <a:rPr sz="900">
-                <a:solidFill>
-                  <a:srgbClr val="007020"/>
-                </a:solidFill>
-                <a:latin typeface="Consolas"/>
-              </a:rPr>
-              <a:t>;</a:t>
-            </a:r>
-          </a:p>
-          <a:p>
-            <a:pPr>
-              <a:spcBef>
-                <a:spcPts val="0"/>
-              </a:spcBef>
-              <a:spcAft>
-                <a:spcPts val="0"/>
-              </a:spcAft>
-            </a:pPr>
-            <a:r>
-              <a:rPr sz="900">
-                <a:solidFill>
-                  <a:srgbClr val="19177C"/>
-                </a:solidFill>
-                <a:latin typeface="Consolas"/>
-              </a:rPr>
-              <a:t>$contactRequestTransfer</a:t>
-            </a:r>
-            <a:r>
-              <a:rPr sz="900">
-                <a:solidFill>
-                  <a:srgbClr val="2D2D2D"/>
-                </a:solidFill>
-                <a:latin typeface="Consolas"/>
-              </a:rPr>
-              <a:t> </a:t>
-            </a:r>
-            <a:r>
-              <a:rPr sz="900">
-                <a:solidFill>
-                  <a:srgbClr val="666666"/>
-                </a:solidFill>
-                <a:latin typeface="Consolas"/>
-              </a:rPr>
-              <a:t>=</a:t>
-            </a:r>
-            <a:r>
-              <a:rPr sz="900">
-                <a:solidFill>
-                  <a:srgbClr val="2D2D2D"/>
-                </a:solidFill>
-                <a:latin typeface="Consolas"/>
-              </a:rPr>
-              <a:t> </a:t>
-            </a:r>
-            <a:r>
-              <a:rPr sz="900" b="1">
-                <a:solidFill>
-                  <a:srgbClr val="007020"/>
-                </a:solidFill>
-                <a:latin typeface="Consolas"/>
-              </a:rPr>
-              <a:t>new</a:t>
-            </a:r>
-            <a:r>
-              <a:rPr sz="900">
-                <a:solidFill>
-                  <a:srgbClr val="2D2D2D"/>
-                </a:solidFill>
-                <a:latin typeface="Consolas"/>
-              </a:rPr>
-              <a:t> </a:t>
-            </a:r>
-            <a:r>
-              <a:rPr sz="900">
-                <a:solidFill>
-                  <a:srgbClr val="880000"/>
-                </a:solidFill>
-                <a:latin typeface="Consolas"/>
-              </a:rPr>
-              <a:t>C</a:t>
-            </a:r>
-            <a:r>
-              <a:rPr sz="900">
-                <a:solidFill>
-                  <a:srgbClr val="2D2D2D"/>
-                </a:solidFill>
-                <a:latin typeface="Consolas"/>
-              </a:rPr>
-              <a:t>ontactRequestTransfer()</a:t>
-            </a:r>
-            <a:r>
-              <a:rPr sz="900">
-                <a:solidFill>
-                  <a:srgbClr val="007020"/>
-                </a:solidFill>
-                <a:latin typeface="Consolas"/>
-              </a:rPr>
-              <a:t>;</a:t>
-            </a:r>
-          </a:p>
-          <a:p>
-            <a:pPr>
-              <a:spcBef>
-                <a:spcPts val="0"/>
-              </a:spcBef>
-              <a:spcAft>
-                <a:spcPts val="0"/>
-              </a:spcAft>
-            </a:pPr>
-            <a:r>
-              <a:rPr sz="900">
-                <a:solidFill>
-                  <a:srgbClr val="19177C"/>
-                </a:solidFill>
-                <a:latin typeface="Consolas"/>
-              </a:rPr>
-              <a:t>$contactRequestTransfer</a:t>
-            </a:r>
-            <a:r>
-              <a:rPr sz="900">
-                <a:solidFill>
-                  <a:srgbClr val="2D2D2D"/>
-                </a:solidFill>
-                <a:latin typeface="Consolas"/>
-              </a:rPr>
-              <a:t>-&gt;setMessage(</a:t>
-            </a:r>
-            <a:r>
-              <a:rPr sz="900">
-                <a:solidFill>
-                  <a:srgbClr val="19177C"/>
-                </a:solidFill>
-                <a:latin typeface="Consolas"/>
-              </a:rPr>
-              <a:t>$formData</a:t>
-            </a:r>
-            <a:r>
-              <a:rPr sz="900">
-                <a:solidFill>
-                  <a:srgbClr val="2D2D2D"/>
-                </a:solidFill>
-                <a:latin typeface="Consolas"/>
-              </a:rPr>
-              <a:t>[</a:t>
-            </a:r>
-            <a:r>
-              <a:rPr sz="900">
-                <a:solidFill>
-                  <a:srgbClr val="4070A0"/>
-                </a:solidFill>
-                <a:latin typeface="Consolas"/>
-              </a:rPr>
-              <a:t>'message'</a:t>
-            </a:r>
-            <a:r>
-              <a:rPr sz="900">
-                <a:solidFill>
-                  <a:srgbClr val="2D2D2D"/>
-                </a:solidFill>
-                <a:latin typeface="Consolas"/>
-              </a:rPr>
-              <a:t>])</a:t>
-            </a:r>
-            <a:r>
-              <a:rPr sz="900">
-                <a:solidFill>
-                  <a:srgbClr val="007020"/>
-                </a:solidFill>
-                <a:latin typeface="Consolas"/>
-              </a:rPr>
-              <a:t>;</a:t>
+              <a:t>The business layer separates concerns into dedicated classes:</a:t>
+            </a:r>
+          </a:p>
+          <a:p>
+            <a:pPr>
+              <a:spcAft>
+                <a:spcPts val="100"/>
+              </a:spcAft>
+              <a:defRPr sz="1000">
+                <a:solidFill>
+                  <a:srgbClr val="1A1A1A"/>
+                </a:solidFill>
+                <a:latin typeface="Consolas"/>
+              </a:defRPr>
+            </a:pPr>
+            <a:r>
+              <a:t>Class                  Responsibility                                   </a:t>
+            </a:r>
+          </a:p>
+          <a:p>
+            <a:pPr>
+              <a:spcAft>
+                <a:spcPts val="100"/>
+              </a:spcAft>
+              <a:defRPr sz="1000">
+                <a:solidFill>
+                  <a:srgbClr val="1A1A1A"/>
+                </a:solidFill>
+                <a:latin typeface="Consolas"/>
+              </a:defRPr>
+            </a:pPr>
+            <a:r>
+              <a:t>---------------------  -------------------------------------------------</a:t>
+            </a:r>
+          </a:p>
+          <a:p>
+            <a:pPr>
+              <a:spcAft>
+                <a:spcPts val="100"/>
+              </a:spcAft>
+              <a:defRPr sz="1000">
+                <a:solidFill>
+                  <a:srgbClr val="1A1A1A"/>
+                </a:solidFill>
+                <a:latin typeface="Consolas"/>
+              </a:defRPr>
+            </a:pPr>
+            <a:r>
+              <a:t>ContactRequestReader   Reading/querying messages (uses Repository)      </a:t>
+            </a:r>
+          </a:p>
+          <a:p>
+            <a:pPr>
+              <a:spcAft>
+                <a:spcPts val="100"/>
+              </a:spcAft>
+              <a:defRPr sz="1000">
+                <a:solidFill>
+                  <a:srgbClr val="1A1A1A"/>
+                </a:solidFill>
+                <a:latin typeface="Consolas"/>
+              </a:defRPr>
+            </a:pPr>
+            <a:r>
+              <a:t>ContactRequestWriter   Creating/persisting messages (uses EntityManager)</a:t>
+            </a:r>
+          </a:p>
+          <a:p>
+            <a:pPr>
+              <a:spcAft>
+                <a:spcPts val="100"/>
+              </a:spcAft>
+              <a:defRPr sz="1000">
+                <a:solidFill>
+                  <a:srgbClr val="1A1A1A"/>
+                </a:solidFill>
+                <a:latin typeface="Consolas"/>
+              </a:defRPr>
+            </a:pPr>
+            <a:r>
+              <a:t>ContactRequestDeleter  Deleting messages (uses EntityManager)</a:t>
             </a:r>
           </a:p>
           <a:p>
@@ -30698,281 +30458,7 @@
               </a:defRPr>
             </a:pPr>
             <a:r>
-              <a:t>Bind the form directly to a transfer:</a:t>
-            </a:r>
-          </a:p>
-          <a:p>
-            <a:pPr>
-              <a:spcBef>
-                <a:spcPts val="0"/>
-              </a:spcBef>
-              <a:spcAft>
-                <a:spcPts val="0"/>
-              </a:spcAft>
-            </a:pPr>
-            <a:r>
-              <a:rPr sz="900" i="1">
-                <a:solidFill>
-                  <a:srgbClr val="60A0B0"/>
-                </a:solidFill>
-                <a:latin typeface="Consolas"/>
-              </a:rPr>
-              <a:t>// Preferred</a:t>
-            </a:r>
-          </a:p>
-          <a:p>
-            <a:pPr>
-              <a:spcBef>
-                <a:spcPts val="0"/>
-              </a:spcBef>
-              <a:spcAft>
-                <a:spcPts val="0"/>
-              </a:spcAft>
-            </a:pPr>
-            <a:r>
-              <a:rPr sz="900">
-                <a:solidFill>
-                  <a:srgbClr val="19177C"/>
-                </a:solidFill>
-                <a:latin typeface="Consolas"/>
-              </a:rPr>
-              <a:t>$messageForm</a:t>
-            </a:r>
-            <a:r>
-              <a:rPr sz="900">
-                <a:solidFill>
-                  <a:srgbClr val="2D2D2D"/>
-                </a:solidFill>
-                <a:latin typeface="Consolas"/>
-              </a:rPr>
-              <a:t> </a:t>
-            </a:r>
-            <a:r>
-              <a:rPr sz="900">
-                <a:solidFill>
-                  <a:srgbClr val="666666"/>
-                </a:solidFill>
-                <a:latin typeface="Consolas"/>
-              </a:rPr>
-              <a:t>=</a:t>
-            </a:r>
-            <a:r>
-              <a:rPr sz="900">
-                <a:solidFill>
-                  <a:srgbClr val="2D2D2D"/>
-                </a:solidFill>
-                <a:latin typeface="Consolas"/>
-              </a:rPr>
-              <a:t> </a:t>
-            </a:r>
-            <a:r>
-              <a:rPr sz="900">
-                <a:solidFill>
-                  <a:srgbClr val="19177C"/>
-                </a:solidFill>
-                <a:latin typeface="Consolas"/>
-              </a:rPr>
-              <a:t>$factory</a:t>
-            </a:r>
-            <a:r>
-              <a:rPr sz="900">
-                <a:solidFill>
-                  <a:srgbClr val="2D2D2D"/>
-                </a:solidFill>
-                <a:latin typeface="Consolas"/>
-              </a:rPr>
-              <a:t>-&gt;createContactRequestForm(</a:t>
-            </a:r>
-            <a:r>
-              <a:rPr sz="900" b="1">
-                <a:solidFill>
-                  <a:srgbClr val="007020"/>
-                </a:solidFill>
-                <a:latin typeface="Consolas"/>
-              </a:rPr>
-              <a:t>new</a:t>
-            </a:r>
-            <a:r>
-              <a:rPr sz="900">
-                <a:solidFill>
-                  <a:srgbClr val="2D2D2D"/>
-                </a:solidFill>
-                <a:latin typeface="Consolas"/>
-              </a:rPr>
-              <a:t> </a:t>
-            </a:r>
-            <a:r>
-              <a:rPr sz="900">
-                <a:solidFill>
-                  <a:srgbClr val="880000"/>
-                </a:solidFill>
-                <a:latin typeface="Consolas"/>
-              </a:rPr>
-              <a:t>C</a:t>
-            </a:r>
-            <a:r>
-              <a:rPr sz="900">
-                <a:solidFill>
-                  <a:srgbClr val="2D2D2D"/>
-                </a:solidFill>
-                <a:latin typeface="Consolas"/>
-              </a:rPr>
-              <a:t>ontactRequestTransfer())</a:t>
-            </a:r>
-            <a:r>
-              <a:rPr sz="900">
-                <a:solidFill>
-                  <a:srgbClr val="007020"/>
-                </a:solidFill>
-                <a:latin typeface="Consolas"/>
-              </a:rPr>
-              <a:t>;</a:t>
-            </a:r>
-          </a:p>
-          <a:p>
-            <a:pPr>
-              <a:spcBef>
-                <a:spcPts val="0"/>
-              </a:spcBef>
-              <a:spcAft>
-                <a:spcPts val="0"/>
-              </a:spcAft>
-            </a:pPr>
-            <a:r>
-              <a:rPr sz="900">
-                <a:solidFill>
-                  <a:srgbClr val="19177C"/>
-                </a:solidFill>
-                <a:latin typeface="Consolas"/>
-              </a:rPr>
-              <a:t>$messageForm</a:t>
-            </a:r>
-            <a:r>
-              <a:rPr sz="900">
-                <a:solidFill>
-                  <a:srgbClr val="2D2D2D"/>
-                </a:solidFill>
-                <a:latin typeface="Consolas"/>
-              </a:rPr>
-              <a:t>-&gt;handleRequest(</a:t>
-            </a:r>
-            <a:r>
-              <a:rPr sz="900">
-                <a:solidFill>
-                  <a:srgbClr val="19177C"/>
-                </a:solidFill>
-                <a:latin typeface="Consolas"/>
-              </a:rPr>
-              <a:t>$request</a:t>
-            </a:r>
-            <a:r>
-              <a:rPr sz="900">
-                <a:solidFill>
-                  <a:srgbClr val="2D2D2D"/>
-                </a:solidFill>
-                <a:latin typeface="Consolas"/>
-              </a:rPr>
-              <a:t>)</a:t>
-            </a:r>
-            <a:r>
-              <a:rPr sz="900">
-                <a:solidFill>
-                  <a:srgbClr val="007020"/>
-                </a:solidFill>
-                <a:latin typeface="Consolas"/>
-              </a:rPr>
-              <a:t>;</a:t>
-            </a:r>
-          </a:p>
-          <a:p>
-            <a:pPr>
-              <a:spcBef>
-                <a:spcPts val="0"/>
-              </a:spcBef>
-              <a:spcAft>
-                <a:spcPts val="0"/>
-              </a:spcAft>
-            </a:pPr>
-            <a:r>
-              <a:rPr sz="900">
-                <a:solidFill>
-                  <a:srgbClr val="19177C"/>
-                </a:solidFill>
-                <a:latin typeface="Consolas"/>
-              </a:rPr>
-              <a:t>$contactRequestTransfer</a:t>
-            </a:r>
-            <a:r>
-              <a:rPr sz="900">
-                <a:solidFill>
-                  <a:srgbClr val="2D2D2D"/>
-                </a:solidFill>
-                <a:latin typeface="Consolas"/>
-              </a:rPr>
-              <a:t> </a:t>
-            </a:r>
-            <a:r>
-              <a:rPr sz="900">
-                <a:solidFill>
-                  <a:srgbClr val="666666"/>
-                </a:solidFill>
-                <a:latin typeface="Consolas"/>
-              </a:rPr>
-              <a:t>=</a:t>
-            </a:r>
-            <a:r>
-              <a:rPr sz="900">
-                <a:solidFill>
-                  <a:srgbClr val="2D2D2D"/>
-                </a:solidFill>
-                <a:latin typeface="Consolas"/>
-              </a:rPr>
-              <a:t> </a:t>
-            </a:r>
-            <a:r>
-              <a:rPr sz="900">
-                <a:solidFill>
-                  <a:srgbClr val="19177C"/>
-                </a:solidFill>
-                <a:latin typeface="Consolas"/>
-              </a:rPr>
-              <a:t>$messageForm</a:t>
-            </a:r>
-            <a:r>
-              <a:rPr sz="900">
-                <a:solidFill>
-                  <a:srgbClr val="2D2D2D"/>
-                </a:solidFill>
-                <a:latin typeface="Consolas"/>
-              </a:rPr>
-              <a:t>-&gt;getData()</a:t>
-            </a:r>
-            <a:r>
-              <a:rPr sz="900">
-                <a:solidFill>
-                  <a:srgbClr val="007020"/>
-                </a:solidFill>
-                <a:latin typeface="Consolas"/>
-              </a:rPr>
-              <a:t>;</a:t>
-            </a:r>
-            <a:r>
-              <a:rPr sz="900">
-                <a:solidFill>
-                  <a:srgbClr val="2D2D2D"/>
-                </a:solidFill>
-                <a:latin typeface="Consolas"/>
-              </a:rPr>
-              <a:t> </a:t>
-            </a:r>
-            <a:r>
-              <a:rPr sz="900" i="1">
-                <a:solidFill>
-                  <a:srgbClr val="60A0B0"/>
-                </a:solidFill>
-                <a:latin typeface="Consolas"/>
-              </a:rPr>
-              <a:t>// Already a ContactRequestTransfer</a:t>
+              <a:t>Each class has one reason to change . The Writer does not know how to delete. The Deleter does not know how to create. The Facade orchestrates all three through the BusinessFactory.</a:t>
             </a:r>
           </a:p>
         </p:txBody>
@@ -31025,7 +30511,7 @@
               </a:defRPr>
             </a:pPr>
             <a:r>
-              <a:t>Safe ID Handling with castId()</a:t>
+              <a:t>Form Data Binding with Transfer Objects</a:t>
             </a:r>
           </a:p>
         </p:txBody>
@@ -31106,7 +30592,26 @@
               </a:defRPr>
             </a:pPr>
             <a:r>
-              <a:t>Always validate IDs from user input before passing them to the persistence layer:</a:t>
+              <a:t>Instead of extracting form data from arrays:</a:t>
+            </a:r>
+          </a:p>
+          <a:p>
+            <a:pPr>
+              <a:spcBef>
+                <a:spcPts val="0"/>
+              </a:spcBef>
+              <a:spcAft>
+                <a:spcPts val="0"/>
+              </a:spcAft>
+            </a:pPr>
+            <a:r>
+              <a:rPr sz="900" i="1">
+                <a:solidFill>
+                  <a:srgbClr val="60A0B0"/>
+                </a:solidFill>
+                <a:latin typeface="Consolas"/>
+              </a:rPr>
+              <a:t>// Avoid this</a:t>
             </a:r>
           </a:p>
           <a:p>
@@ -31125,7 +30630,7 @@
                 </a:solidFill>
                 <a:latin typeface="Consolas"/>
               </a:rPr>
-              <a:t>$idContactRequest</a:t>
+              <a:t>$formData</a:t>
             </a:r>
             <a:r>
               <a:rPr sz="900">
@@ -31161,17 +30666,36 @@
                 </a:solidFill>
                 <a:latin typeface="Consolas"/>
               </a:rPr>
-              <a:t>$this</a:t>
-            </a:r>
-            <a:r>
-              <a:rPr sz="900">
-                <a:solidFill>
-                  <a:srgbClr val="2D2D2D"/>
-                </a:solidFill>
-                <a:latin typeface="Consolas"/>
-              </a:rPr>
-              <a:t>-&gt;castId(</a:t>
-            </a:r>
+              <a:t>$messageForm</a:t>
+            </a:r>
+            <a:r>
+              <a:rPr sz="900">
+                <a:solidFill>
+                  <a:srgbClr val="2D2D2D"/>
+                </a:solidFill>
+                <a:latin typeface="Consolas"/>
+              </a:rPr>
+              <a:t>-&gt;getData()</a:t>
+            </a:r>
+            <a:r>
+              <a:rPr sz="900">
+                <a:solidFill>
+                  <a:srgbClr val="007020"/>
+                </a:solidFill>
+                <a:latin typeface="Consolas"/>
+              </a:rPr>
+              <a:t>;</a:t>
+            </a:r>
+          </a:p>
+          <a:p>
+            <a:pPr>
+              <a:spcBef>
+                <a:spcPts val="0"/>
+              </a:spcBef>
+              <a:spcAft>
+                <a:spcPts val="0"/>
+              </a:spcAft>
+            </a:pPr>
             <a:r>
               <a:rPr sz="900">
                 <a:solidFill>
@@ -31179,6 +30703,331 @@
                 </a:solidFill>
                 <a:latin typeface="Consolas"/>
               </a:rPr>
+              <a:t>$contactRequestTransfer</a:t>
+            </a:r>
+            <a:r>
+              <a:rPr sz="900">
+                <a:solidFill>
+                  <a:srgbClr val="2D2D2D"/>
+                </a:solidFill>
+                <a:latin typeface="Consolas"/>
+              </a:rPr>
+              <a:t> </a:t>
+            </a:r>
+            <a:r>
+              <a:rPr sz="900">
+                <a:solidFill>
+                  <a:srgbClr val="666666"/>
+                </a:solidFill>
+                <a:latin typeface="Consolas"/>
+              </a:rPr>
+              <a:t>=</a:t>
+            </a:r>
+            <a:r>
+              <a:rPr sz="900">
+                <a:solidFill>
+                  <a:srgbClr val="2D2D2D"/>
+                </a:solidFill>
+                <a:latin typeface="Consolas"/>
+              </a:rPr>
+              <a:t> </a:t>
+            </a:r>
+            <a:r>
+              <a:rPr sz="900" b="1">
+                <a:solidFill>
+                  <a:srgbClr val="007020"/>
+                </a:solidFill>
+                <a:latin typeface="Consolas"/>
+              </a:rPr>
+              <a:t>new</a:t>
+            </a:r>
+            <a:r>
+              <a:rPr sz="900">
+                <a:solidFill>
+                  <a:srgbClr val="2D2D2D"/>
+                </a:solidFill>
+                <a:latin typeface="Consolas"/>
+              </a:rPr>
+              <a:t> </a:t>
+            </a:r>
+            <a:r>
+              <a:rPr sz="900">
+                <a:solidFill>
+                  <a:srgbClr val="880000"/>
+                </a:solidFill>
+                <a:latin typeface="Consolas"/>
+              </a:rPr>
+              <a:t>C</a:t>
+            </a:r>
+            <a:r>
+              <a:rPr sz="900">
+                <a:solidFill>
+                  <a:srgbClr val="2D2D2D"/>
+                </a:solidFill>
+                <a:latin typeface="Consolas"/>
+              </a:rPr>
+              <a:t>ontactRequestTransfer()</a:t>
+            </a:r>
+            <a:r>
+              <a:rPr sz="900">
+                <a:solidFill>
+                  <a:srgbClr val="007020"/>
+                </a:solidFill>
+                <a:latin typeface="Consolas"/>
+              </a:rPr>
+              <a:t>;</a:t>
+            </a:r>
+          </a:p>
+          <a:p>
+            <a:pPr>
+              <a:spcBef>
+                <a:spcPts val="0"/>
+              </a:spcBef>
+              <a:spcAft>
+                <a:spcPts val="0"/>
+              </a:spcAft>
+            </a:pPr>
+            <a:r>
+              <a:rPr sz="900">
+                <a:solidFill>
+                  <a:srgbClr val="19177C"/>
+                </a:solidFill>
+                <a:latin typeface="Consolas"/>
+              </a:rPr>
+              <a:t>$contactRequestTransfer</a:t>
+            </a:r>
+            <a:r>
+              <a:rPr sz="900">
+                <a:solidFill>
+                  <a:srgbClr val="2D2D2D"/>
+                </a:solidFill>
+                <a:latin typeface="Consolas"/>
+              </a:rPr>
+              <a:t>-&gt;setMessage(</a:t>
+            </a:r>
+            <a:r>
+              <a:rPr sz="900">
+                <a:solidFill>
+                  <a:srgbClr val="19177C"/>
+                </a:solidFill>
+                <a:latin typeface="Consolas"/>
+              </a:rPr>
+              <a:t>$formData</a:t>
+            </a:r>
+            <a:r>
+              <a:rPr sz="900">
+                <a:solidFill>
+                  <a:srgbClr val="2D2D2D"/>
+                </a:solidFill>
+                <a:latin typeface="Consolas"/>
+              </a:rPr>
+              <a:t>[</a:t>
+            </a:r>
+            <a:r>
+              <a:rPr sz="900">
+                <a:solidFill>
+                  <a:srgbClr val="4070A0"/>
+                </a:solidFill>
+                <a:latin typeface="Consolas"/>
+              </a:rPr>
+              <a:t>'message'</a:t>
+            </a:r>
+            <a:r>
+              <a:rPr sz="900">
+                <a:solidFill>
+                  <a:srgbClr val="2D2D2D"/>
+                </a:solidFill>
+                <a:latin typeface="Consolas"/>
+              </a:rPr>
+              <a:t>])</a:t>
+            </a:r>
+            <a:r>
+              <a:rPr sz="900">
+                <a:solidFill>
+                  <a:srgbClr val="007020"/>
+                </a:solidFill>
+                <a:latin typeface="Consolas"/>
+              </a:rPr>
+              <a:t>;</a:t>
+            </a:r>
+          </a:p>
+          <a:p>
+            <a:pPr>
+              <a:spcAft>
+                <a:spcPts val="800"/>
+              </a:spcAft>
+              <a:defRPr sz="1600">
+                <a:solidFill>
+                  <a:srgbClr val="1A1A1A"/>
+                </a:solidFill>
+              </a:defRPr>
+            </a:pPr>
+            <a:r>
+              <a:t>Bind the form directly to a transfer:</a:t>
+            </a:r>
+          </a:p>
+          <a:p>
+            <a:pPr>
+              <a:spcBef>
+                <a:spcPts val="0"/>
+              </a:spcBef>
+              <a:spcAft>
+                <a:spcPts val="0"/>
+              </a:spcAft>
+            </a:pPr>
+            <a:r>
+              <a:rPr sz="900" i="1">
+                <a:solidFill>
+                  <a:srgbClr val="60A0B0"/>
+                </a:solidFill>
+                <a:latin typeface="Consolas"/>
+              </a:rPr>
+              <a:t>// Preferred</a:t>
+            </a:r>
+          </a:p>
+          <a:p>
+            <a:pPr>
+              <a:spcBef>
+                <a:spcPts val="0"/>
+              </a:spcBef>
+              <a:spcAft>
+                <a:spcPts val="0"/>
+              </a:spcAft>
+            </a:pPr>
+            <a:r>
+              <a:rPr sz="900">
+                <a:solidFill>
+                  <a:srgbClr val="19177C"/>
+                </a:solidFill>
+                <a:latin typeface="Consolas"/>
+              </a:rPr>
+              <a:t>$messageForm</a:t>
+            </a:r>
+            <a:r>
+              <a:rPr sz="900">
+                <a:solidFill>
+                  <a:srgbClr val="2D2D2D"/>
+                </a:solidFill>
+                <a:latin typeface="Consolas"/>
+              </a:rPr>
+              <a:t> </a:t>
+            </a:r>
+            <a:r>
+              <a:rPr sz="900">
+                <a:solidFill>
+                  <a:srgbClr val="666666"/>
+                </a:solidFill>
+                <a:latin typeface="Consolas"/>
+              </a:rPr>
+              <a:t>=</a:t>
+            </a:r>
+            <a:r>
+              <a:rPr sz="900">
+                <a:solidFill>
+                  <a:srgbClr val="2D2D2D"/>
+                </a:solidFill>
+                <a:latin typeface="Consolas"/>
+              </a:rPr>
+              <a:t> </a:t>
+            </a:r>
+            <a:r>
+              <a:rPr sz="900">
+                <a:solidFill>
+                  <a:srgbClr val="19177C"/>
+                </a:solidFill>
+                <a:latin typeface="Consolas"/>
+              </a:rPr>
+              <a:t>$factory</a:t>
+            </a:r>
+            <a:r>
+              <a:rPr sz="900">
+                <a:solidFill>
+                  <a:srgbClr val="2D2D2D"/>
+                </a:solidFill>
+                <a:latin typeface="Consolas"/>
+              </a:rPr>
+              <a:t>-&gt;createContactRequestForm(</a:t>
+            </a:r>
+            <a:r>
+              <a:rPr sz="900" b="1">
+                <a:solidFill>
+                  <a:srgbClr val="007020"/>
+                </a:solidFill>
+                <a:latin typeface="Consolas"/>
+              </a:rPr>
+              <a:t>new</a:t>
+            </a:r>
+            <a:r>
+              <a:rPr sz="900">
+                <a:solidFill>
+                  <a:srgbClr val="2D2D2D"/>
+                </a:solidFill>
+                <a:latin typeface="Consolas"/>
+              </a:rPr>
+              <a:t> </a:t>
+            </a:r>
+            <a:r>
+              <a:rPr sz="900">
+                <a:solidFill>
+                  <a:srgbClr val="880000"/>
+                </a:solidFill>
+                <a:latin typeface="Consolas"/>
+              </a:rPr>
+              <a:t>C</a:t>
+            </a:r>
+            <a:r>
+              <a:rPr sz="900">
+                <a:solidFill>
+                  <a:srgbClr val="2D2D2D"/>
+                </a:solidFill>
+                <a:latin typeface="Consolas"/>
+              </a:rPr>
+              <a:t>ontactRequestTransfer())</a:t>
+            </a:r>
+            <a:r>
+              <a:rPr sz="900">
+                <a:solidFill>
+                  <a:srgbClr val="007020"/>
+                </a:solidFill>
+                <a:latin typeface="Consolas"/>
+              </a:rPr>
+              <a:t>;</a:t>
+            </a:r>
+          </a:p>
+          <a:p>
+            <a:pPr>
+              <a:spcBef>
+                <a:spcPts val="0"/>
+              </a:spcBef>
+              <a:spcAft>
+                <a:spcPts val="0"/>
+              </a:spcAft>
+            </a:pPr>
+            <a:r>
+              <a:rPr sz="900">
+                <a:solidFill>
+                  <a:srgbClr val="19177C"/>
+                </a:solidFill>
+                <a:latin typeface="Consolas"/>
+              </a:rPr>
+              <a:t>$messageForm</a:t>
+            </a:r>
+            <a:r>
+              <a:rPr sz="900">
+                <a:solidFill>
+                  <a:srgbClr val="2D2D2D"/>
+                </a:solidFill>
+                <a:latin typeface="Consolas"/>
+              </a:rPr>
+              <a:t>-&gt;handleRequest(</a:t>
+            </a:r>
+            <a:r>
+              <a:rPr sz="900">
+                <a:solidFill>
+                  <a:srgbClr val="19177C"/>
+                </a:solidFill>
+                <a:latin typeface="Consolas"/>
+              </a:rPr>
               <a:t>$request</a:t>
             </a:r>
             <a:r>
@@ -31188,25 +31037,7 @@
                 </a:solidFill>
                 <a:latin typeface="Consolas"/>
               </a:rPr>
-              <a:t>-&gt;request-&gt;get(</a:t>
-            </a:r>
-            <a:r>
-              <a:rPr sz="900">
-                <a:solidFill>
-                  <a:srgbClr val="4070A0"/>
-                </a:solidFill>
-                <a:latin typeface="Consolas"/>
-              </a:rPr>
-              <a:t>'idContactRequest'</a:t>
-            </a:r>
-            <a:r>
-              <a:rPr sz="900">
-                <a:solidFill>
-                  <a:srgbClr val="2D2D2D"/>
-                </a:solidFill>
-                <a:latin typeface="Consolas"/>
-              </a:rPr>
-              <a:t>))</a:t>
+              <a:t>)</a:t>
             </a:r>
             <a:r>
               <a:rPr sz="900">
@@ -31228,13 +31059,85 @@
               </a:spcAft>
             </a:pPr>
             <a:r>
+              <a:rPr sz="900">
+                <a:solidFill>
+                  <a:srgbClr val="19177C"/>
+                </a:solidFill>
+                <a:latin typeface="Consolas"/>
+              </a:rPr>
+              <a:t>$contactRequestTransfer</a:t>
+            </a:r>
+            <a:r>
+              <a:rPr sz="900">
+                <a:solidFill>
+                  <a:srgbClr val="2D2D2D"/>
+                </a:solidFill>
+                <a:latin typeface="Consolas"/>
+              </a:rPr>
+              <a:t> </a:t>
+            </a:r>
+            <a:r>
+              <a:rPr sz="900">
+                <a:solidFill>
+                  <a:srgbClr val="666666"/>
+                </a:solidFill>
+                <a:latin typeface="Consolas"/>
+              </a:rPr>
+              <a:t>=</a:t>
+            </a:r>
+            <a:r>
+              <a:rPr sz="900">
+                <a:solidFill>
+                  <a:srgbClr val="2D2D2D"/>
+                </a:solidFill>
+                <a:latin typeface="Consolas"/>
+              </a:rPr>
+              <a:t> </a:t>
+            </a:r>
+            <a:r>
+              <a:rPr sz="900">
+                <a:solidFill>
+                  <a:srgbClr val="19177C"/>
+                </a:solidFill>
+                <a:latin typeface="Consolas"/>
+              </a:rPr>
+              <a:t>$messageForm</a:t>
+            </a:r>
+            <a:r>
+              <a:rPr sz="900">
+                <a:solidFill>
+                  <a:srgbClr val="2D2D2D"/>
+                </a:solidFill>
+                <a:latin typeface="Consolas"/>
+              </a:rPr>
+              <a:t>-&gt;getData()</a:t>
+            </a:r>
+            <a:r>
+              <a:rPr sz="900">
+                <a:solidFill>
+                  <a:srgbClr val="007020"/>
+                </a:solidFill>
+                <a:latin typeface="Consolas"/>
+              </a:rPr>
+              <a:t>;</a:t>
+            </a:r>
+            <a:r>
+              <a:rPr sz="900">
+                <a:solidFill>
+                  <a:srgbClr val="2D2D2D"/>
+                </a:solidFill>
+                <a:latin typeface="Consolas"/>
+              </a:rPr>
+              <a:t> </a:t>
+            </a:r>
+            <a:r>
               <a:rPr sz="900" i="1">
                 <a:solidFill>
                   <a:srgbClr val="60A0B0"/>
                 </a:solidFill>
                 <a:latin typeface="Consolas"/>
               </a:rPr>
-              <a:t>// Throws InvalidArgumentException if not numeric or zero</a:t>
+              <a:t>// Already a ContactRequestTransfer</a:t>
             </a:r>
           </a:p>
         </p:txBody>
@@ -31747,7 +31650,7 @@
               </a:defRPr>
             </a:pPr>
             <a:r>
-              <a:t>Testing</a:t>
+              <a:t>Safe ID Handling with castId()</a:t>
             </a:r>
           </a:p>
         </p:txBody>
@@ -31819,76 +31722,144 @@
           <a:p>
             <a:pPr>
               <a:spcAft>
-                <a:spcPts val="400"/>
-              </a:spcAft>
-              <a:defRPr sz="1500">
+                <a:spcPts val="800"/>
+              </a:spcAft>
+              <a:defRPr sz="1600">
                 <a:solidFill>
                   <a:srgbClr val="1A1A1A"/>
                 </a:solidFill>
               </a:defRPr>
             </a:pPr>
             <a:r>
-              <a:t>• Log in to Yves: http://yves.eu.spryker.local/en/login (use sonia@spryker.com / change123 )</a:t>
-            </a:r>
-          </a:p>
-          <a:p>
-            <a:pPr>
-              <a:spcAft>
-                <a:spcPts val="400"/>
-              </a:spcAft>
-              <a:defRPr sz="1500">
-                <a:solidFill>
-                  <a:srgbClr val="1A1A1A"/>
-                </a:solidFill>
-              </a:defRPr>
-            </a:pPr>
-            <a:r>
-              <a:t>• Visit: http://yves.eu.spryker.local/en/customer/contact-requests</a:t>
-            </a:r>
-          </a:p>
-          <a:p>
-            <a:pPr>
-              <a:spcAft>
-                <a:spcPts val="400"/>
-              </a:spcAft>
-              <a:defRPr sz="1500">
-                <a:solidFill>
-                  <a:srgbClr val="1A1A1A"/>
-                </a:solidFill>
-              </a:defRPr>
-            </a:pPr>
-            <a:r>
-              <a:t>• You should see a message list (empty initially) and a form to add messages</a:t>
-            </a:r>
-          </a:p>
-          <a:p>
-            <a:pPr>
-              <a:spcAft>
-                <a:spcPts val="400"/>
-              </a:spcAft>
-              <a:defRPr sz="1500">
-                <a:solidFill>
-                  <a:srgbClr val="1A1A1A"/>
-                </a:solidFill>
-              </a:defRPr>
-            </a:pPr>
-            <a:r>
-              <a:t>• Add a message and verify it appears in the list with a created timestamp</a:t>
-            </a:r>
-          </a:p>
-          <a:p>
-            <a:pPr>
-              <a:spcAft>
-                <a:spcPts val="400"/>
-              </a:spcAft>
-              <a:defRPr sz="1500">
-                <a:solidFill>
-                  <a:srgbClr val="1A1A1A"/>
-                </a:solidFill>
-              </a:defRPr>
-            </a:pPr>
-            <a:r>
-              <a:t>• Click “Delete” on a message and verify it disappears</a:t>
+              <a:t>Always validate IDs from user input before passing them to the persistence layer:</a:t>
+            </a:r>
+          </a:p>
+          <a:p>
+            <a:pPr>
+              <a:spcBef>
+                <a:spcPts val="0"/>
+              </a:spcBef>
+              <a:spcAft>
+                <a:spcPts val="0"/>
+              </a:spcAft>
+            </a:pPr>
+            <a:r>
+              <a:rPr sz="900">
+                <a:solidFill>
+                  <a:srgbClr val="19177C"/>
+                </a:solidFill>
+                <a:latin typeface="Consolas"/>
+              </a:rPr>
+              <a:t>$idContactRequest</a:t>
+            </a:r>
+            <a:r>
+              <a:rPr sz="900">
+                <a:solidFill>
+                  <a:srgbClr val="2D2D2D"/>
+                </a:solidFill>
+                <a:latin typeface="Consolas"/>
+              </a:rPr>
+              <a:t> </a:t>
+            </a:r>
+            <a:r>
+              <a:rPr sz="900">
+                <a:solidFill>
+                  <a:srgbClr val="666666"/>
+                </a:solidFill>
+                <a:latin typeface="Consolas"/>
+              </a:rPr>
+              <a:t>=</a:t>
+            </a:r>
+            <a:r>
+              <a:rPr sz="900">
+                <a:solidFill>
+                  <a:srgbClr val="2D2D2D"/>
+                </a:solidFill>
+                <a:latin typeface="Consolas"/>
+              </a:rPr>
+              <a:t> </a:t>
+            </a:r>
+            <a:r>
+              <a:rPr sz="900">
+                <a:solidFill>
+                  <a:srgbClr val="19177C"/>
+                </a:solidFill>
+                <a:latin typeface="Consolas"/>
+              </a:rPr>
+              <a:t>$this</a:t>
+            </a:r>
+            <a:r>
+              <a:rPr sz="900">
+                <a:solidFill>
+                  <a:srgbClr val="2D2D2D"/>
+                </a:solidFill>
+                <a:latin typeface="Consolas"/>
+              </a:rPr>
+              <a:t>-&gt;castId(</a:t>
+            </a:r>
+            <a:r>
+              <a:rPr sz="900">
+                <a:solidFill>
+                  <a:srgbClr val="19177C"/>
+                </a:solidFill>
+                <a:latin typeface="Consolas"/>
+              </a:rPr>
+              <a:t>$request</a:t>
+            </a:r>
+            <a:r>
+              <a:rPr sz="900">
+                <a:solidFill>
+                  <a:srgbClr val="2D2D2D"/>
+                </a:solidFill>
+                <a:latin typeface="Consolas"/>
+              </a:rPr>
+              <a:t>-&gt;request-&gt;get(</a:t>
+            </a:r>
+            <a:r>
+              <a:rPr sz="900">
+                <a:solidFill>
+                  <a:srgbClr val="4070A0"/>
+                </a:solidFill>
+                <a:latin typeface="Consolas"/>
+              </a:rPr>
+              <a:t>'idContactRequest'</a:t>
+            </a:r>
+            <a:r>
+              <a:rPr sz="900">
+                <a:solidFill>
+                  <a:srgbClr val="2D2D2D"/>
+                </a:solidFill>
+                <a:latin typeface="Consolas"/>
+              </a:rPr>
+              <a:t>))</a:t>
+            </a:r>
+            <a:r>
+              <a:rPr sz="900">
+                <a:solidFill>
+                  <a:srgbClr val="007020"/>
+                </a:solidFill>
+                <a:latin typeface="Consolas"/>
+              </a:rPr>
+              <a:t>;</a:t>
+            </a:r>
+          </a:p>
+          <a:p>
+            <a:pPr>
+              <a:spcBef>
+                <a:spcPts val="0"/>
+              </a:spcBef>
+              <a:spcAft>
+                <a:spcPts val="0"/>
+              </a:spcAft>
+            </a:pPr>
+            <a:r>
+              <a:rPr sz="900" i="1">
+                <a:solidFill>
+                  <a:srgbClr val="60A0B0"/>
+                </a:solidFill>
+                <a:latin typeface="Consolas"/>
+              </a:rPr>
+              <a:t>// Throws InvalidArgumentException if not numeric or zero</a:t>
             </a:r>
           </a:p>
         </p:txBody>
@@ -31941,7 +31912,7 @@
               </a:defRPr>
             </a:pPr>
             <a:r>
-              <a:t>Verify Your Work</a:t>
+              <a:t>Testing</a:t>
             </a:r>
           </a:p>
         </p:txBody>
@@ -32013,138 +31984,76 @@
           <a:p>
             <a:pPr>
               <a:spcAft>
-                <a:spcPts val="800"/>
-              </a:spcAft>
-              <a:defRPr sz="1600">
+                <a:spcPts val="400"/>
+              </a:spcAft>
+              <a:defRPr sz="1500">
                 <a:solidFill>
                   <a:srgbClr val="1A1A1A"/>
                 </a:solidFill>
               </a:defRPr>
             </a:pPr>
             <a:r>
-              <a:t>Run the automated tests for this exercise:</a:t>
-            </a:r>
-          </a:p>
-          <a:p>
-            <a:pPr>
-              <a:spcBef>
-                <a:spcPts val="0"/>
-              </a:spcBef>
-              <a:spcAft>
-                <a:spcPts val="0"/>
-              </a:spcAft>
-            </a:pPr>
-            <a:r>
-              <a:rPr sz="900">
-                <a:solidFill>
-                  <a:srgbClr val="2D2D2D"/>
-                </a:solidFill>
-                <a:latin typeface="Consolas"/>
-              </a:rPr>
-              <a:t>docker/sdk</a:t>
-            </a:r>
-            <a:r>
-              <a:rPr sz="900">
-                <a:solidFill>
-                  <a:srgbClr val="2D2D2D"/>
-                </a:solidFill>
-                <a:latin typeface="Consolas"/>
-              </a:rPr>
-              <a:t> cli vendor/bin/codecept run </a:t>
-            </a:r>
-            <a:r>
-              <a:rPr sz="900">
-                <a:solidFill>
-                  <a:srgbClr val="2D2D2D"/>
-                </a:solidFill>
-                <a:latin typeface="Consolas"/>
-              </a:rPr>
-              <a:t>-c</a:t>
-            </a:r>
-            <a:r>
-              <a:rPr sz="900">
-                <a:solidFill>
-                  <a:srgbClr val="2D2D2D"/>
-                </a:solidFill>
-                <a:latin typeface="Consolas"/>
-              </a:rPr>
-              <a:t> tests/SprykerAcademyTest/Zed/ContactRequest/ Exercise7</a:t>
-            </a:r>
-          </a:p>
-          <a:p>
-            <a:pPr>
-              <a:spcAft>
-                <a:spcPts val="800"/>
-              </a:spcAft>
-              <a:defRPr sz="1600">
+              <a:t>• Log in to Yves: http://yves.eu.spryker.local/en/login (use sonia@spryker.com / change123 )</a:t>
+            </a:r>
+          </a:p>
+          <a:p>
+            <a:pPr>
+              <a:spcAft>
+                <a:spcPts val="400"/>
+              </a:spcAft>
+              <a:defRPr sz="1500">
                 <a:solidFill>
                   <a:srgbClr val="1A1A1A"/>
                 </a:solidFill>
               </a:defRPr>
             </a:pPr>
             <a:r>
-              <a:t>The test suite covers: - Schema XML: fk_customer column, foreign key, timestampable behavior - Transfer XML: fkCustomer , createdAt properties, ContactRequestCollection transfer ( strict="true" , singular="contactRequest" ) - Structural: All classes and methods exist across the full stack - Mock-based: Stub calls the correct gateway paths for create, get, and delete - Unit: ContactRequestDeleter delegates to EntityManager correctly - SOLID: ContactRequestWriter does NOT have a delete() method</a:t>
-            </a:r>
-          </a:p>
-          <a:p>
-            <a:pPr>
-              <a:spcAft>
-                <a:spcPts val="800"/>
-              </a:spcAft>
-              <a:defRPr sz="1600">
+              <a:t>• Visit: http://yves.eu.spryker.local/en/customer/contact-requests</a:t>
+            </a:r>
+          </a:p>
+          <a:p>
+            <a:pPr>
+              <a:spcAft>
+                <a:spcPts val="400"/>
+              </a:spcAft>
+              <a:defRPr sz="1500">
                 <a:solidFill>
                   <a:srgbClr val="1A1A1A"/>
                 </a:solidFill>
               </a:defRPr>
             </a:pPr>
             <a:r>
-              <a:t>Or run all exercise tests at once:</a:t>
-            </a:r>
-          </a:p>
-          <a:p>
-            <a:pPr>
-              <a:spcBef>
-                <a:spcPts val="0"/>
-              </a:spcBef>
-              <a:spcAft>
-                <a:spcPts val="0"/>
-              </a:spcAft>
-            </a:pPr>
-            <a:r>
-              <a:rPr sz="900">
-                <a:solidFill>
-                  <a:srgbClr val="2D2D2D"/>
-                </a:solidFill>
-                <a:latin typeface="Consolas"/>
-              </a:rPr>
-              <a:t>docker/sdk</a:t>
-            </a:r>
-            <a:r>
-              <a:rPr sz="900">
-                <a:solidFill>
-                  <a:srgbClr val="2D2D2D"/>
-                </a:solidFill>
-                <a:latin typeface="Consolas"/>
-              </a:rPr>
-              <a:t> cli vendor/bin/codecept run </a:t>
-            </a:r>
-            <a:r>
-              <a:rPr sz="900">
-                <a:solidFill>
-                  <a:srgbClr val="2D2D2D"/>
-                </a:solidFill>
-                <a:latin typeface="Consolas"/>
-              </a:rPr>
-              <a:t>-c</a:t>
-            </a:r>
-            <a:r>
-              <a:rPr sz="900">
-                <a:solidFill>
-                  <a:srgbClr val="2D2D2D"/>
-                </a:solidFill>
-                <a:latin typeface="Consolas"/>
-              </a:rPr>
-              <a:t> tests/SprykerAcademyTest/Zed/ContactRequest/</a:t>
+              <a:t>• You should see a message list (empty initially) and a form to add messages</a:t>
+            </a:r>
+          </a:p>
+          <a:p>
+            <a:pPr>
+              <a:spcAft>
+                <a:spcPts val="400"/>
+              </a:spcAft>
+              <a:defRPr sz="1500">
+                <a:solidFill>
+                  <a:srgbClr val="1A1A1A"/>
+                </a:solidFill>
+              </a:defRPr>
+            </a:pPr>
+            <a:r>
+              <a:t>• Add a message and verify it appears in the list with a created timestamp</a:t>
+            </a:r>
+          </a:p>
+          <a:p>
+            <a:pPr>
+              <a:spcAft>
+                <a:spcPts val="400"/>
+              </a:spcAft>
+              <a:defRPr sz="1500">
+                <a:solidFill>
+                  <a:srgbClr val="1A1A1A"/>
+                </a:solidFill>
+              </a:defRPr>
+            </a:pPr>
+            <a:r>
+              <a:t>• Click “Delete” on a message and verify it disappears</a:t>
             </a:r>
           </a:p>
         </p:txBody>
@@ -32197,7 +32106,7 @@
               </a:defRPr>
             </a:pPr>
             <a:r>
-              <a:t>Solution</a:t>
+              <a:t>Verify Your Work</a:t>
             </a:r>
           </a:p>
         </p:txBody>
@@ -32268,30 +32177,139 @@
           <a:lstStyle/>
           <a:p>
             <a:pPr>
-              <a:spcBef>
-                <a:spcPts val="0"/>
-              </a:spcBef>
-              <a:spcAft>
-                <a:spcPts val="0"/>
-              </a:spcAft>
-            </a:pPr>
-            <a:r>
-              <a:rPr sz="900">
-                <a:solidFill>
-                  <a:srgbClr val="2D2D2D"/>
-                </a:solidFill>
-                <a:latin typeface="Consolas"/>
-              </a:rPr>
-              <a:t>./exercises/load.sh</a:t>
-            </a:r>
-            <a:r>
-              <a:rPr sz="900">
-                <a:solidFill>
-                  <a:srgbClr val="2D2D2D"/>
-                </a:solidFill>
-                <a:latin typeface="Consolas"/>
-              </a:rPr>
-              <a:t> contact-request basics/extending-core-modules/complete</a:t>
+              <a:spcAft>
+                <a:spcPts val="800"/>
+              </a:spcAft>
+              <a:defRPr sz="1600">
+                <a:solidFill>
+                  <a:srgbClr val="1A1A1A"/>
+                </a:solidFill>
+              </a:defRPr>
+            </a:pPr>
+            <a:r>
+              <a:t>Run the automated tests for this exercise:</a:t>
+            </a:r>
+          </a:p>
+          <a:p>
+            <a:pPr>
+              <a:spcBef>
+                <a:spcPts val="0"/>
+              </a:spcBef>
+              <a:spcAft>
+                <a:spcPts val="0"/>
+              </a:spcAft>
+            </a:pPr>
+            <a:r>
+              <a:rPr sz="900">
+                <a:solidFill>
+                  <a:srgbClr val="2D2D2D"/>
+                </a:solidFill>
+                <a:latin typeface="Consolas"/>
+              </a:rPr>
+              <a:t>docker/sdk</a:t>
+            </a:r>
+            <a:r>
+              <a:rPr sz="900">
+                <a:solidFill>
+                  <a:srgbClr val="2D2D2D"/>
+                </a:solidFill>
+                <a:latin typeface="Consolas"/>
+              </a:rPr>
+              <a:t> cli vendor/bin/codecept run </a:t>
+            </a:r>
+            <a:r>
+              <a:rPr sz="900">
+                <a:solidFill>
+                  <a:srgbClr val="2D2D2D"/>
+                </a:solidFill>
+                <a:latin typeface="Consolas"/>
+              </a:rPr>
+              <a:t>-c</a:t>
+            </a:r>
+            <a:r>
+              <a:rPr sz="900">
+                <a:solidFill>
+                  <a:srgbClr val="2D2D2D"/>
+                </a:solidFill>
+                <a:latin typeface="Consolas"/>
+              </a:rPr>
+              <a:t> tests/SprykerAcademyTest/Zed/ContactRequest/ Exercise7</a:t>
+            </a:r>
+          </a:p>
+          <a:p>
+            <a:pPr>
+              <a:spcAft>
+                <a:spcPts val="800"/>
+              </a:spcAft>
+              <a:defRPr sz="1600">
+                <a:solidFill>
+                  <a:srgbClr val="1A1A1A"/>
+                </a:solidFill>
+              </a:defRPr>
+            </a:pPr>
+            <a:r>
+              <a:t>The test suite covers: - Schema XML: fk_customer column, foreign key, timestampable behavior - Transfer XML: fkCustomer , createdAt properties, ContactRequestCollection transfer ( strict="true" , singular="contactRequest" ) - Structural: All classes and methods exist across the full stack - Mock-based: Stub calls the correct gateway paths for create, get, and delete - Unit: ContactRequestDeleter delegates to EntityManager correctly - SOLID: ContactRequestWriter does NOT have a delete() method</a:t>
+            </a:r>
+          </a:p>
+          <a:p>
+            <a:pPr>
+              <a:spcAft>
+                <a:spcPts val="800"/>
+              </a:spcAft>
+              <a:defRPr sz="1600">
+                <a:solidFill>
+                  <a:srgbClr val="1A1A1A"/>
+                </a:solidFill>
+              </a:defRPr>
+            </a:pPr>
+            <a:r>
+              <a:t>Or run all exercise tests at once:</a:t>
+            </a:r>
+          </a:p>
+          <a:p>
+            <a:pPr>
+              <a:spcBef>
+                <a:spcPts val="0"/>
+              </a:spcBef>
+              <a:spcAft>
+                <a:spcPts val="0"/>
+              </a:spcAft>
+            </a:pPr>
+            <a:r>
+              <a:rPr sz="900">
+                <a:solidFill>
+                  <a:srgbClr val="2D2D2D"/>
+                </a:solidFill>
+                <a:latin typeface="Consolas"/>
+              </a:rPr>
+              <a:t>docker/sdk</a:t>
+            </a:r>
+            <a:r>
+              <a:rPr sz="900">
+                <a:solidFill>
+                  <a:srgbClr val="2D2D2D"/>
+                </a:solidFill>
+                <a:latin typeface="Consolas"/>
+              </a:rPr>
+              <a:t> cli vendor/bin/codecept run </a:t>
+            </a:r>
+            <a:r>
+              <a:rPr sz="900">
+                <a:solidFill>
+                  <a:srgbClr val="2D2D2D"/>
+                </a:solidFill>
+                <a:latin typeface="Consolas"/>
+              </a:rPr>
+              <a:t>-c</a:t>
+            </a:r>
+            <a:r>
+              <a:rPr sz="900">
+                <a:solidFill>
+                  <a:srgbClr val="2D2D2D"/>
+                </a:solidFill>
+                <a:latin typeface="Consolas"/>
+              </a:rPr>
+              <a:t> tests/SprykerAcademyTest/Zed/ContactRequest/</a:t>
             </a:r>
           </a:p>
         </p:txBody>
@@ -32344,7 +32362,7 @@
               </a:defRPr>
             </a:pPr>
             <a:r>
-              <a:t>Bonus: AJAX Version</a:t>
+              <a:t>Solution</a:t>
             </a:r>
           </a:p>
         </p:txBody>
@@ -32415,146 +32433,30 @@
           <a:lstStyle/>
           <a:p>
             <a:pPr>
-              <a:spcAft>
-                <a:spcPts val="800"/>
-              </a:spcAft>
-              <a:defRPr sz="1600">
-                <a:solidFill>
-                  <a:srgbClr val="1A1A1A"/>
-                </a:solidFill>
-              </a:defRPr>
-            </a:pPr>
-            <a:r>
-              <a:t>An extended solution is available that uses Spryker’s built-in AJAX component pattern to add and delete messages without a full page reload. The message table refreshes dynamically.</a:t>
-            </a:r>
-          </a:p>
-          <a:p>
-            <a:pPr>
-              <a:spcBef>
-                <a:spcPts val="1200"/>
-              </a:spcBef>
-              <a:spcAft>
-                <a:spcPts val="600"/>
-              </a:spcAft>
-              <a:defRPr sz="2000" b="1">
-                <a:solidFill>
-                  <a:srgbClr val="1A1A1A"/>
-                </a:solidFill>
-              </a:defRPr>
-            </a:pPr>
-            <a:r>
-              <a:t>How Spryker AJAX Works</a:t>
-            </a:r>
-          </a:p>
-          <a:p>
-            <a:pPr>
-              <a:spcAft>
-                <a:spcPts val="800"/>
-              </a:spcAft>
-              <a:defRPr sz="1600">
-                <a:solidFill>
-                  <a:srgbClr val="1A1A1A"/>
-                </a:solidFill>
-              </a:defRPr>
-            </a:pPr>
-            <a:r>
-              <a:t>Spryker provides a component-based AJAX pattern using four Twig molecules from ShopUi :</a:t>
-            </a:r>
-          </a:p>
-          <a:p>
-            <a:pPr>
-              <a:spcAft>
-                <a:spcPts val="100"/>
-              </a:spcAft>
-              <a:defRPr sz="1000">
-                <a:solidFill>
-                  <a:srgbClr val="1A1A1A"/>
-                </a:solidFill>
-                <a:latin typeface="Consolas"/>
-              </a:defRPr>
-            </a:pPr>
-            <a:r>
-              <a:t>Component            Role                                                                                              </a:t>
-            </a:r>
-          </a:p>
-          <a:p>
-            <a:pPr>
-              <a:spcAft>
-                <a:spcPts val="100"/>
-              </a:spcAft>
-              <a:defRPr sz="1000">
-                <a:solidFill>
-                  <a:srgbClr val="1A1A1A"/>
-                </a:solidFill>
-                <a:latin typeface="Consolas"/>
-              </a:defRPr>
-            </a:pPr>
-            <a:r>
-              <a:t>-------------------  --------------------------------------------------------------------------------------------------</a:t>
-            </a:r>
-          </a:p>
-          <a:p>
-            <a:pPr>
-              <a:spcAft>
-                <a:spcPts val="100"/>
-              </a:spcAft>
-              <a:defRPr sz="1000">
-                <a:solidFill>
-                  <a:srgbClr val="1A1A1A"/>
-                </a:solidFill>
-                <a:latin typeface="Consolas"/>
-              </a:defRPr>
-            </a:pPr>
-            <a:r>
-              <a:t>ajax-provider        XMLHttpRequest wrapper — sends requests and dispatches fetching / fetched events                  </a:t>
-            </a:r>
-          </a:p>
-          <a:p>
-            <a:pPr>
-              <a:spcAft>
-                <a:spcPts val="100"/>
-              </a:spcAft>
-              <a:defRPr sz="1000">
-                <a:solidFill>
-                  <a:srgbClr val="1A1A1A"/>
-                </a:solidFill>
-                <a:latin typeface="Consolas"/>
-              </a:defRPr>
-            </a:pPr>
-            <a:r>
-              <a:t>ajax-form-submitter  Intercepts form submit (via data-* trigger attribute) and delegates to the provider               </a:t>
-            </a:r>
-          </a:p>
-          <a:p>
-            <a:pPr>
-              <a:spcAft>
-                <a:spcPts val="100"/>
-              </a:spcAft>
-              <a:defRPr sz="1000">
-                <a:solidFill>
-                  <a:srgbClr val="1A1A1A"/>
-                </a:solidFill>
-                <a:latin typeface="Consolas"/>
-              </a:defRPr>
-            </a:pPr>
-            <a:r>
-              <a:t>ajax-renderer        Listens for the fetched event, parses JSON response, and inserts content into a target DOM element</a:t>
-            </a:r>
-          </a:p>
-          <a:p>
-            <a:pPr>
-              <a:spcAft>
-                <a:spcPts val="100"/>
-              </a:spcAft>
-              <a:defRPr sz="1000">
-                <a:solidFill>
-                  <a:srgbClr val="1A1A1A"/>
-                </a:solidFill>
-                <a:latin typeface="Consolas"/>
-              </a:defRPr>
-            </a:pPr>
-            <a:r>
-              <a:t>ajax-loader          Shows/hides a spinner during the request</a:t>
+              <a:spcBef>
+                <a:spcPts val="0"/>
+              </a:spcBef>
+              <a:spcAft>
+                <a:spcPts val="0"/>
+              </a:spcAft>
+            </a:pPr>
+            <a:r>
+              <a:rPr sz="900">
+                <a:solidFill>
+                  <a:srgbClr val="2D2D2D"/>
+                </a:solidFill>
+                <a:latin typeface="Consolas"/>
+              </a:rPr>
+              <a:t>./exercises/load.sh</a:t>
+            </a:r>
+            <a:r>
+              <a:rPr sz="900">
+                <a:solidFill>
+                  <a:srgbClr val="2D2D2D"/>
+                </a:solidFill>
+                <a:latin typeface="Consolas"/>
+              </a:rPr>
+              <a:t> contact-request basics/extending-core-modules/complete</a:t>
             </a:r>
           </a:p>
         </p:txBody>
@@ -32607,7 +32509,7 @@
               </a:defRPr>
             </a:pPr>
             <a:r>
-              <a:t>The JSON Response Contract</a:t>
+              <a:t>Bonus: AJAX Version</a:t>
             </a:r>
           </a:p>
         </p:txBody>
@@ -32688,227 +32590,136 @@
               </a:defRPr>
             </a:pPr>
             <a:r>
-              <a:t>Async controllers return JsonResponse with this structure:</a:t>
-            </a:r>
-          </a:p>
-          <a:p>
-            <a:pPr>
-              <a:spcBef>
-                <a:spcPts val="0"/>
-              </a:spcBef>
-              <a:spcAft>
-                <a:spcPts val="0"/>
-              </a:spcAft>
-            </a:pPr>
-            <a:r>
-              <a:rPr sz="900">
-                <a:solidFill>
-                  <a:srgbClr val="06287E"/>
-                </a:solidFill>
-                <a:latin typeface="Consolas"/>
-              </a:rPr>
-              <a:t>{</a:t>
-            </a:r>
-          </a:p>
-          <a:p>
-            <a:pPr>
-              <a:spcBef>
-                <a:spcPts val="0"/>
-              </a:spcBef>
-              <a:spcAft>
-                <a:spcPts val="0"/>
-              </a:spcAft>
-            </a:pPr>
-            <a:r>
-              <a:rPr sz="900">
-                <a:solidFill>
-                  <a:srgbClr val="2D2D2D"/>
-                </a:solidFill>
-                <a:latin typeface="Consolas"/>
-              </a:rPr>
-              <a:t>    </a:t>
-            </a:r>
-            <a:r>
-              <a:rPr sz="900">
-                <a:solidFill>
-                  <a:srgbClr val="902000"/>
-                </a:solidFill>
-                <a:latin typeface="Consolas"/>
-              </a:rPr>
-              <a:t>"messages"</a:t>
-            </a:r>
-            <a:r>
-              <a:rPr sz="900">
-                <a:solidFill>
-                  <a:srgbClr val="06287E"/>
-                </a:solidFill>
-                <a:latin typeface="Consolas"/>
-              </a:rPr>
-              <a:t>:</a:t>
-            </a:r>
-            <a:r>
-              <a:rPr sz="900">
-                <a:solidFill>
-                  <a:srgbClr val="2D2D2D"/>
-                </a:solidFill>
-                <a:latin typeface="Consolas"/>
-              </a:rPr>
-              <a:t> </a:t>
-            </a:r>
-            <a:r>
-              <a:rPr sz="900">
-                <a:solidFill>
-                  <a:srgbClr val="4070A0"/>
-                </a:solidFill>
-                <a:latin typeface="Consolas"/>
-              </a:rPr>
-              <a:t>"&lt;rendered flash message HTML&gt;"</a:t>
-            </a:r>
-            <a:r>
-              <a:rPr sz="900">
-                <a:solidFill>
-                  <a:srgbClr val="06287E"/>
-                </a:solidFill>
-                <a:latin typeface="Consolas"/>
-              </a:rPr>
-              <a:t>,</a:t>
-            </a:r>
-          </a:p>
-          <a:p>
-            <a:pPr>
-              <a:spcBef>
-                <a:spcPts val="0"/>
-              </a:spcBef>
-              <a:spcAft>
-                <a:spcPts val="0"/>
-              </a:spcAft>
-            </a:pPr>
-            <a:r>
-              <a:rPr sz="900">
-                <a:solidFill>
-                  <a:srgbClr val="2D2D2D"/>
-                </a:solidFill>
-                <a:latin typeface="Consolas"/>
-              </a:rPr>
-              <a:t>    </a:t>
-            </a:r>
-            <a:r>
-              <a:rPr sz="900">
-                <a:solidFill>
-                  <a:srgbClr val="902000"/>
-                </a:solidFill>
-                <a:latin typeface="Consolas"/>
-              </a:rPr>
-              <a:t>"content"</a:t>
-            </a:r>
-            <a:r>
-              <a:rPr sz="900">
-                <a:solidFill>
-                  <a:srgbClr val="06287E"/>
-                </a:solidFill>
-                <a:latin typeface="Consolas"/>
-              </a:rPr>
-              <a:t>:</a:t>
-            </a:r>
-            <a:r>
-              <a:rPr sz="900">
-                <a:solidFill>
-                  <a:srgbClr val="2D2D2D"/>
-                </a:solidFill>
-                <a:latin typeface="Consolas"/>
-              </a:rPr>
-              <a:t> </a:t>
-            </a:r>
-            <a:r>
-              <a:rPr sz="900">
-                <a:solidFill>
-                  <a:srgbClr val="4070A0"/>
-                </a:solidFill>
-                <a:latin typeface="Consolas"/>
-              </a:rPr>
-              <a:t>"&lt;rendered HTML fragment to replace in the DOM&gt;"</a:t>
-            </a:r>
-          </a:p>
-          <a:p>
-            <a:pPr>
-              <a:spcBef>
-                <a:spcPts val="0"/>
-              </a:spcBef>
-              <a:spcAft>
-                <a:spcPts val="0"/>
-              </a:spcAft>
-            </a:pPr>
-            <a:r>
-              <a:rPr sz="900">
-                <a:solidFill>
-                  <a:srgbClr val="06287E"/>
-                </a:solidFill>
-                <a:latin typeface="Consolas"/>
-              </a:rPr>
-              <a:t>}</a:t>
-            </a:r>
-          </a:p>
-          <a:p>
-            <a:pPr>
-              <a:spcAft>
-                <a:spcPts val="400"/>
-              </a:spcAft>
-              <a:defRPr sz="1500">
+              <a:t>An extended solution is available that uses Spryker’s built-in AJAX component pattern to add and delete messages without a full page reload. The message table refreshes dynamically.</a:t>
+            </a:r>
+          </a:p>
+          <a:p>
+            <a:pPr>
+              <a:spcBef>
+                <a:spcPts val="1200"/>
+              </a:spcBef>
+              <a:spcAft>
+                <a:spcPts val="600"/>
+              </a:spcAft>
+              <a:defRPr sz="2000" b="1">
                 <a:solidFill>
                   <a:srgbClr val="1A1A1A"/>
                 </a:solidFill>
               </a:defRPr>
             </a:pPr>
             <a:r>
-              <a:t>• messages — Rendered via @ShopUi/components/organisms/flash-message-list/flash-message-list.twig . Dispatched as a DOM event for the flash message component to pick up.</a:t>
-            </a:r>
-          </a:p>
-          <a:p>
-            <a:pPr>
-              <a:spcAft>
-                <a:spcPts val="400"/>
-              </a:spcAft>
-              <a:defRPr sz="1500">
+              <a:t>How Spryker AJAX Works</a:t>
+            </a:r>
+          </a:p>
+          <a:p>
+            <a:pPr>
+              <a:spcAft>
+                <a:spcPts val="800"/>
+              </a:spcAft>
+              <a:defRPr sz="1600">
                 <a:solidFill>
                   <a:srgbClr val="1A1A1A"/>
                 </a:solidFill>
               </a:defRPr>
             </a:pPr>
             <a:r>
-              <a:t>• content — The re-rendered page fragment. The ajax-renderer inserts this into the target element.</a:t>
-            </a:r>
-          </a:p>
-          <a:p>
-            <a:pPr>
-              <a:spcBef>
-                <a:spcPts val="1200"/>
-              </a:spcBef>
-              <a:spcAft>
-                <a:spcPts val="600"/>
-              </a:spcAft>
-              <a:defRPr sz="2000" b="1">
+              <a:t>Spryker provides a component-based AJAX pattern using four Twig molecules from ShopUi :</a:t>
+            </a:r>
+          </a:p>
+          <a:p>
+            <a:pPr>
+              <a:spcAft>
+                <a:spcPts val="100"/>
+              </a:spcAft>
+              <a:defRPr sz="1000">
                 <a:solidFill>
                   <a:srgbClr val="1A1A1A"/>
                 </a:solidFill>
-              </a:defRPr>
-            </a:pPr>
-            <a:r>
-              <a:t>Twig Integration</a:t>
-            </a:r>
-          </a:p>
-          <a:p>
-            <a:pPr>
-              <a:spcAft>
-                <a:spcPts val="800"/>
-              </a:spcAft>
-              <a:defRPr sz="1600">
+                <a:latin typeface="Consolas"/>
+              </a:defRPr>
+            </a:pPr>
+            <a:r>
+              <a:t>Component            Role                                                                                              </a:t>
+            </a:r>
+          </a:p>
+          <a:p>
+            <a:pPr>
+              <a:spcAft>
+                <a:spcPts val="100"/>
+              </a:spcAft>
+              <a:defRPr sz="1000">
                 <a:solidFill>
                   <a:srgbClr val="1A1A1A"/>
                 </a:solidFill>
-              </a:defRPr>
-            </a:pPr>
-            <a:r>
-              <a:t>The template includes the AJAX trio after the content wrapper:</a:t>
+                <a:latin typeface="Consolas"/>
+              </a:defRPr>
+            </a:pPr>
+            <a:r>
+              <a:t>-------------------  --------------------------------------------------------------------------------------------------</a:t>
+            </a:r>
+          </a:p>
+          <a:p>
+            <a:pPr>
+              <a:spcAft>
+                <a:spcPts val="100"/>
+              </a:spcAft>
+              <a:defRPr sz="1000">
+                <a:solidFill>
+                  <a:srgbClr val="1A1A1A"/>
+                </a:solidFill>
+                <a:latin typeface="Consolas"/>
+              </a:defRPr>
+            </a:pPr>
+            <a:r>
+              <a:t>ajax-provider        XMLHttpRequest wrapper — sends requests and dispatches fetching / fetched events                  </a:t>
+            </a:r>
+          </a:p>
+          <a:p>
+            <a:pPr>
+              <a:spcAft>
+                <a:spcPts val="100"/>
+              </a:spcAft>
+              <a:defRPr sz="1000">
+                <a:solidFill>
+                  <a:srgbClr val="1A1A1A"/>
+                </a:solidFill>
+                <a:latin typeface="Consolas"/>
+              </a:defRPr>
+            </a:pPr>
+            <a:r>
+              <a:t>ajax-form-submitter  Intercepts form submit (via data-* trigger attribute) and delegates to the provider               </a:t>
+            </a:r>
+          </a:p>
+          <a:p>
+            <a:pPr>
+              <a:spcAft>
+                <a:spcPts val="100"/>
+              </a:spcAft>
+              <a:defRPr sz="1000">
+                <a:solidFill>
+                  <a:srgbClr val="1A1A1A"/>
+                </a:solidFill>
+                <a:latin typeface="Consolas"/>
+              </a:defRPr>
+            </a:pPr>
+            <a:r>
+              <a:t>ajax-renderer        Listens for the fetched event, parses JSON response, and inserts content into a target DOM element</a:t>
+            </a:r>
+          </a:p>
+          <a:p>
+            <a:pPr>
+              <a:spcAft>
+                <a:spcPts val="100"/>
+              </a:spcAft>
+              <a:defRPr sz="1000">
+                <a:solidFill>
+                  <a:srgbClr val="1A1A1A"/>
+                </a:solidFill>
+                <a:latin typeface="Consolas"/>
+              </a:defRPr>
+            </a:pPr>
+            <a:r>
+              <a:t>ajax-loader          Shows/hides a spinner during the request</a:t>
             </a:r>
           </a:p>
         </p:txBody>
@@ -32961,7 +32772,7 @@
               </a:defRPr>
             </a:pPr>
             <a:r>
-              <a:t>The JSON Response Contract (cont.)</a:t>
+              <a:t>The JSON Response Contract</a:t>
             </a:r>
           </a:p>
         </p:txBody>
@@ -33032,170 +32843,222 @@
           <a:lstStyle/>
           <a:p>
             <a:pPr>
-              <a:spcBef>
-                <a:spcPts val="0"/>
-              </a:spcBef>
-              <a:spcAft>
-                <a:spcPts val="0"/>
-              </a:spcAft>
-            </a:pPr>
-            <a:r>
-              <a:rPr sz="900">
-                <a:solidFill>
-                  <a:srgbClr val="2D2D2D"/>
-                </a:solidFill>
-                <a:latin typeface="Consolas"/>
-              </a:rPr>
-              <a:t>{# Content area that gets replaced #}</a:t>
-            </a:r>
-          </a:p>
-          <a:p>
-            <a:pPr>
-              <a:spcBef>
-                <a:spcPts val="0"/>
-              </a:spcBef>
-              <a:spcAft>
-                <a:spcPts val="0"/>
-              </a:spcAft>
-            </a:pPr>
-            <a:r>
-              <a:rPr sz="900">
-                <a:solidFill>
-                  <a:srgbClr val="2D2D2D"/>
-                </a:solidFill>
-                <a:latin typeface="Consolas"/>
-              </a:rPr>
-              <a:t>&lt;div class="{{ ajaxContentClass }}"&gt;</a:t>
-            </a:r>
-          </a:p>
-          <a:p>
-            <a:pPr>
-              <a:spcBef>
-                <a:spcPts val="0"/>
-              </a:spcBef>
-              <a:spcAft>
-                <a:spcPts val="0"/>
-              </a:spcAft>
-            </a:pPr>
-            <a:r>
-              <a:rPr sz="900">
-                <a:solidFill>
-                  <a:srgbClr val="2D2D2D"/>
-                </a:solidFill>
-                <a:latin typeface="Consolas"/>
-              </a:rPr>
-              <a:t>    {# ... table, form, loader ... #}</a:t>
-            </a:r>
-          </a:p>
-          <a:p>
-            <a:pPr>
-              <a:spcBef>
-                <a:spcPts val="0"/>
-              </a:spcBef>
-              <a:spcAft>
-                <a:spcPts val="0"/>
-              </a:spcAft>
-            </a:pPr>
-            <a:r>
-              <a:rPr sz="900">
-                <a:solidFill>
-                  <a:srgbClr val="2D2D2D"/>
-                </a:solidFill>
-                <a:latin typeface="Consolas"/>
-              </a:rPr>
-              <a:t>&lt;/div&gt;</a:t>
-            </a:r>
-          </a:p>
-          <a:p>
-            <a:pPr>
-              <a:spcBef>
-                <a:spcPts val="0"/>
-              </a:spcBef>
-              <a:spcAft>
-                <a:spcPts val="0"/>
-              </a:spcAft>
-            </a:pPr>
-            <a:r>
-              <a:rPr sz="900">
+              <a:spcAft>
+                <a:spcPts val="800"/>
+              </a:spcAft>
+              <a:defRPr sz="1600">
+                <a:solidFill>
+                  <a:srgbClr val="1A1A1A"/>
+                </a:solidFill>
+              </a:defRPr>
+            </a:pPr>
+            <a:r>
+              <a:t>Async controllers return JsonResponse with this structure:</a:t>
+            </a:r>
+          </a:p>
+          <a:p>
+            <a:pPr>
+              <a:spcBef>
+                <a:spcPts val="0"/>
+              </a:spcBef>
+              <a:spcAft>
+                <a:spcPts val="0"/>
+              </a:spcAft>
+            </a:pPr>
+            <a:r>
+              <a:rPr sz="900">
+                <a:solidFill>
+                  <a:srgbClr val="06287E"/>
+                </a:solidFill>
+                <a:latin typeface="Consolas"/>
+              </a:rPr>
+              <a:t>{</a:t>
+            </a:r>
+          </a:p>
+          <a:p>
+            <a:pPr>
+              <a:spcBef>
+                <a:spcPts val="0"/>
+              </a:spcBef>
+              <a:spcAft>
+                <a:spcPts val="0"/>
+              </a:spcAft>
+            </a:pPr>
+            <a:r>
+              <a:rPr sz="900">
+                <a:solidFill>
+                  <a:srgbClr val="2D2D2D"/>
+                </a:solidFill>
+                <a:latin typeface="Consolas"/>
+              </a:rPr>
+              <a:t>    </a:t>
+            </a:r>
+            <a:r>
+              <a:rPr sz="900">
+                <a:solidFill>
+                  <a:srgbClr val="902000"/>
+                </a:solidFill>
+                <a:latin typeface="Consolas"/>
+              </a:rPr>
+              <a:t>"messages"</a:t>
+            </a:r>
+            <a:r>
+              <a:rPr sz="900">
+                <a:solidFill>
+                  <a:srgbClr val="06287E"/>
+                </a:solidFill>
+                <a:latin typeface="Consolas"/>
+              </a:rPr>
+              <a:t>:</a:t>
+            </a:r>
+            <a:r>
+              <a:rPr sz="900">
+                <a:solidFill>
+                  <a:srgbClr val="2D2D2D"/>
+                </a:solidFill>
                 <a:latin typeface="Consolas"/>
               </a:rPr>
               <a:t> </a:t>
             </a:r>
-          </a:p>
-          <a:p>
-            <a:pPr>
-              <a:spcBef>
-                <a:spcPts val="0"/>
-              </a:spcBef>
-              <a:spcAft>
-                <a:spcPts val="0"/>
-              </a:spcAft>
-            </a:pPr>
-            <a:r>
-              <a:rPr sz="900">
-                <a:solidFill>
-                  <a:srgbClr val="2D2D2D"/>
-                </a:solidFill>
-                <a:latin typeface="Consolas"/>
-              </a:rPr>
-              <a:t>{# AJAX components #}</a:t>
-            </a:r>
-          </a:p>
-          <a:p>
-            <a:pPr>
-              <a:spcBef>
-                <a:spcPts val="0"/>
-              </a:spcBef>
-              <a:spcAft>
-                <a:spcPts val="0"/>
-              </a:spcAft>
-            </a:pPr>
-            <a:r>
-              <a:rPr sz="900">
-                <a:solidFill>
-                  <a:srgbClr val="2D2D2D"/>
-                </a:solidFill>
-                <a:latin typeface="Consolas"/>
-              </a:rPr>
-              <a:t>{% include molecule('ajax-provider') with { class: ajaxProviderClass, attributes: { method: 'POST' } } only %}</a:t>
-            </a:r>
-          </a:p>
-          <a:p>
-            <a:pPr>
-              <a:spcBef>
-                <a:spcPts val="0"/>
-              </a:spcBef>
-              <a:spcAft>
-                <a:spcPts val="0"/>
-              </a:spcAft>
-            </a:pPr>
-            <a:r>
-              <a:rPr sz="900">
-                <a:solidFill>
-                  <a:srgbClr val="2D2D2D"/>
-                </a:solidFill>
-                <a:latin typeface="Consolas"/>
-              </a:rPr>
-              <a:t>{% include molecule('ajax-renderer') with { attributes: { 'provider-class-name': ajaxProviderClass, 'target-class-name': ajaxContentClass, 'mount-after-render': true } } only %}</a:t>
-            </a:r>
-          </a:p>
-          <a:p>
-            <a:pPr>
-              <a:spcBef>
-                <a:spcPts val="0"/>
-              </a:spcBef>
-              <a:spcAft>
-                <a:spcPts val="0"/>
-              </a:spcAft>
-            </a:pPr>
-            <a:r>
-              <a:rPr sz="900">
-                <a:solidFill>
-                  <a:srgbClr val="2D2D2D"/>
-                </a:solidFill>
-                <a:latin typeface="Consolas"/>
-              </a:rPr>
-              <a:t>{% include molecule('ajax-form-submitter') with { attributes: { 'trigger-attribute': 'data-contact-request-ajax-submit', 'provider-class-name': ajaxProviderClass } } only %}</a:t>
+            <a:r>
+              <a:rPr sz="900">
+                <a:solidFill>
+                  <a:srgbClr val="4070A0"/>
+                </a:solidFill>
+                <a:latin typeface="Consolas"/>
+              </a:rPr>
+              <a:t>"&lt;rendered flash message HTML&gt;"</a:t>
+            </a:r>
+            <a:r>
+              <a:rPr sz="900">
+                <a:solidFill>
+                  <a:srgbClr val="06287E"/>
+                </a:solidFill>
+                <a:latin typeface="Consolas"/>
+              </a:rPr>
+              <a:t>,</a:t>
+            </a:r>
+          </a:p>
+          <a:p>
+            <a:pPr>
+              <a:spcBef>
+                <a:spcPts val="0"/>
+              </a:spcBef>
+              <a:spcAft>
+                <a:spcPts val="0"/>
+              </a:spcAft>
+            </a:pPr>
+            <a:r>
+              <a:rPr sz="900">
+                <a:solidFill>
+                  <a:srgbClr val="2D2D2D"/>
+                </a:solidFill>
+                <a:latin typeface="Consolas"/>
+              </a:rPr>
+              <a:t>    </a:t>
+            </a:r>
+            <a:r>
+              <a:rPr sz="900">
+                <a:solidFill>
+                  <a:srgbClr val="902000"/>
+                </a:solidFill>
+                <a:latin typeface="Consolas"/>
+              </a:rPr>
+              <a:t>"content"</a:t>
+            </a:r>
+            <a:r>
+              <a:rPr sz="900">
+                <a:solidFill>
+                  <a:srgbClr val="06287E"/>
+                </a:solidFill>
+                <a:latin typeface="Consolas"/>
+              </a:rPr>
+              <a:t>:</a:t>
+            </a:r>
+            <a:r>
+              <a:rPr sz="900">
+                <a:solidFill>
+                  <a:srgbClr val="2D2D2D"/>
+                </a:solidFill>
+                <a:latin typeface="Consolas"/>
+              </a:rPr>
+              <a:t> </a:t>
+            </a:r>
+            <a:r>
+              <a:rPr sz="900">
+                <a:solidFill>
+                  <a:srgbClr val="4070A0"/>
+                </a:solidFill>
+                <a:latin typeface="Consolas"/>
+              </a:rPr>
+              <a:t>"&lt;rendered HTML fragment to replace in the DOM&gt;"</a:t>
+            </a:r>
+          </a:p>
+          <a:p>
+            <a:pPr>
+              <a:spcBef>
+                <a:spcPts val="0"/>
+              </a:spcBef>
+              <a:spcAft>
+                <a:spcPts val="0"/>
+              </a:spcAft>
+            </a:pPr>
+            <a:r>
+              <a:rPr sz="900">
+                <a:solidFill>
+                  <a:srgbClr val="06287E"/>
+                </a:solidFill>
+                <a:latin typeface="Consolas"/>
+              </a:rPr>
+              <a:t>}</a:t>
+            </a:r>
+          </a:p>
+          <a:p>
+            <a:pPr>
+              <a:spcAft>
+                <a:spcPts val="400"/>
+              </a:spcAft>
+              <a:defRPr sz="1500">
+                <a:solidFill>
+                  <a:srgbClr val="1A1A1A"/>
+                </a:solidFill>
+              </a:defRPr>
+            </a:pPr>
+            <a:r>
+              <a:t>• messages — Rendered via @ShopUi/components/organisms/flash-message-list/flash-message-list.twig . Dispatched as a DOM event for the flash message component to pick up.</a:t>
+            </a:r>
+          </a:p>
+          <a:p>
+            <a:pPr>
+              <a:spcAft>
+                <a:spcPts val="400"/>
+              </a:spcAft>
+              <a:defRPr sz="1500">
+                <a:solidFill>
+                  <a:srgbClr val="1A1A1A"/>
+                </a:solidFill>
+              </a:defRPr>
+            </a:pPr>
+            <a:r>
+              <a:t>• content — The re-rendered page fragment. The ajax-renderer inserts this into the target element.</a:t>
+            </a:r>
+          </a:p>
+          <a:p>
+            <a:pPr>
+              <a:spcBef>
+                <a:spcPts val="1200"/>
+              </a:spcBef>
+              <a:spcAft>
+                <a:spcPts val="600"/>
+              </a:spcAft>
+              <a:defRPr sz="2000" b="1">
+                <a:solidFill>
+                  <a:srgbClr val="1A1A1A"/>
+                </a:solidFill>
+              </a:defRPr>
+            </a:pPr>
+            <a:r>
+              <a:t>Twig Integration</a:t>
             </a:r>
           </a:p>
           <a:p>
@@ -33210,135 +33073,7 @@
               </a:defRPr>
             </a:pPr>
             <a:r>
-              <a:t>Form buttons use data-contact-request-ajax-submit and formaction to point to the async endpoint:</a:t>
-            </a:r>
-          </a:p>
-          <a:p>
-            <a:pPr>
-              <a:spcBef>
-                <a:spcPts val="0"/>
-              </a:spcBef>
-              <a:spcAft>
-                <a:spcPts val="0"/>
-              </a:spcAft>
-            </a:pPr>
-            <a:r>
-              <a:rPr sz="900" b="1">
-                <a:solidFill>
-                  <a:srgbClr val="007020"/>
-                </a:solidFill>
-                <a:latin typeface="Consolas"/>
-              </a:rPr>
-              <a:t>&lt;button</a:t>
-            </a:r>
-            <a:r>
-              <a:rPr sz="900">
-                <a:solidFill>
-                  <a:srgbClr val="007020"/>
-                </a:solidFill>
-                <a:latin typeface="Consolas"/>
-              </a:rPr>
-              <a:t> data-contact-request-ajax-submit formaction=</a:t>
-            </a:r>
-            <a:r>
-              <a:rPr sz="900">
-                <a:solidFill>
-                  <a:srgbClr val="4070A0"/>
-                </a:solidFill>
-                <a:latin typeface="Consolas"/>
-              </a:rPr>
-              <a:t>"/customer/contact-requests/async/add"</a:t>
-            </a:r>
-            <a:r>
-              <a:rPr sz="900" b="1">
-                <a:solidFill>
-                  <a:srgbClr val="007020"/>
-                </a:solidFill>
-                <a:latin typeface="Consolas"/>
-              </a:rPr>
-              <a:t>&gt;</a:t>
-            </a:r>
-            <a:r>
-              <a:rPr sz="900">
-                <a:solidFill>
-                  <a:srgbClr val="2D2D2D"/>
-                </a:solidFill>
-                <a:latin typeface="Consolas"/>
-              </a:rPr>
-              <a:t>Add Contact Request</a:t>
-            </a:r>
-            <a:r>
-              <a:rPr sz="900" b="1">
-                <a:solidFill>
-                  <a:srgbClr val="007020"/>
-                </a:solidFill>
-                <a:latin typeface="Consolas"/>
-              </a:rPr>
-              <a:t>&lt;/button&gt;</a:t>
-            </a:r>
-          </a:p>
-          <a:p>
-            <a:pPr>
-              <a:spcBef>
-                <a:spcPts val="0"/>
-              </a:spcBef>
-              <a:spcAft>
-                <a:spcPts val="0"/>
-              </a:spcAft>
-            </a:pPr>
-            <a:r>
-              <a:rPr sz="900" b="1">
-                <a:solidFill>
-                  <a:srgbClr val="007020"/>
-                </a:solidFill>
-                <a:latin typeface="Consolas"/>
-              </a:rPr>
-              <a:t>&lt;button</a:t>
-            </a:r>
-            <a:r>
-              <a:rPr sz="900">
-                <a:solidFill>
-                  <a:srgbClr val="007020"/>
-                </a:solidFill>
-                <a:latin typeface="Consolas"/>
-              </a:rPr>
-              <a:t> data-contact-request-ajax-submit formaction=</a:t>
-            </a:r>
-            <a:r>
-              <a:rPr sz="900">
-                <a:solidFill>
-                  <a:srgbClr val="4070A0"/>
-                </a:solidFill>
-                <a:latin typeface="Consolas"/>
-              </a:rPr>
-              <a:t>"/customer/contact-requests/async/delete"</a:t>
-            </a:r>
-            <a:r>
-              <a:rPr sz="900" b="1">
-                <a:solidFill>
-                  <a:srgbClr val="007020"/>
-                </a:solidFill>
-                <a:latin typeface="Consolas"/>
-              </a:rPr>
-              <a:t>&gt;</a:t>
-            </a:r>
-            <a:r>
-              <a:rPr sz="900">
-                <a:solidFill>
-                  <a:srgbClr val="2D2D2D"/>
-                </a:solidFill>
-                <a:latin typeface="Consolas"/>
-              </a:rPr>
-              <a:t>Delete</a:t>
-            </a:r>
-            <a:r>
-              <a:rPr sz="900" b="1">
-                <a:solidFill>
-                  <a:srgbClr val="007020"/>
-                </a:solidFill>
-                <a:latin typeface="Consolas"/>
-              </a:rPr>
-              <a:t>&lt;/button&gt;</a:t>
+              <a:t>The template includes the AJAX trio after the content wrapper:</a:t>
             </a:r>
           </a:p>
         </p:txBody>
@@ -33352,6 +33087,436 @@
 </file>
 
 <file path=ppt/slides/slide206.xml><?xml version="1.0" encoding="utf-8"?>
+<p:sld xmlns:a="http://schemas.openxmlformats.org/drawingml/2006/main" xmlns:p="http://schemas.openxmlformats.org/presentationml/2006/main" xmlns:r="http://schemas.openxmlformats.org/officeDocument/2006/relationships">
+  <p:cSld>
+    <p:spTree>
+      <p:nvGrpSpPr>
+        <p:cNvPr id="1" name=""/>
+        <p:cNvGrpSpPr/>
+        <p:nvPr/>
+      </p:nvGrpSpPr>
+      <p:grpSpPr/>
+      <p:sp>
+        <p:nvSpPr>
+          <p:cNvPr id="2" name="TextBox 1"/>
+          <p:cNvSpPr txBox="1"/>
+          <p:nvPr/>
+        </p:nvSpPr>
+        <p:spPr>
+          <a:xfrm>
+            <a:off x="640080" y="365760"/>
+            <a:ext cx="10881360" cy="731520"/>
+          </a:xfrm>
+          <a:prstGeom prst="rect">
+            <a:avLst/>
+          </a:prstGeom>
+          <a:noFill/>
+        </p:spPr>
+        <p:txBody>
+          <a:bodyPr wrap="square">
+            <a:spAutoFit/>
+          </a:bodyPr>
+          <a:lstStyle/>
+          <a:p>
+            <a:pPr>
+              <a:defRPr sz="2800" b="1">
+                <a:solidFill>
+                  <a:srgbClr val="00A89B"/>
+                </a:solidFill>
+              </a:defRPr>
+            </a:pPr>
+            <a:r>
+              <a:t>The JSON Response Contract (cont.)</a:t>
+            </a:r>
+          </a:p>
+        </p:txBody>
+      </p:sp>
+      <p:sp>
+        <p:nvSpPr>
+          <p:cNvPr id="3" name="Rectangle 2"/>
+          <p:cNvSpPr/>
+          <p:nvPr/>
+        </p:nvSpPr>
+        <p:spPr>
+          <a:xfrm>
+            <a:off x="640080" y="1051560"/>
+            <a:ext cx="1828800" cy="25400"/>
+          </a:xfrm>
+          <a:prstGeom prst="rect">
+            <a:avLst/>
+          </a:prstGeom>
+          <a:solidFill>
+            <a:srgbClr val="00A89B"/>
+          </a:solidFill>
+          <a:ln>
+            <a:noFill/>
+          </a:ln>
+        </p:spPr>
+        <p:style>
+          <a:lnRef idx="1">
+            <a:schemeClr val="accent1"/>
+          </a:lnRef>
+          <a:fillRef idx="3">
+            <a:schemeClr val="accent1"/>
+          </a:fillRef>
+          <a:effectRef idx="2">
+            <a:schemeClr val="accent1"/>
+          </a:effectRef>
+          <a:fontRef idx="minor">
+            <a:schemeClr val="lt1"/>
+          </a:fontRef>
+        </p:style>
+        <p:txBody>
+          <a:bodyPr rtlCol="0" anchor="ctr"/>
+          <a:lstStyle/>
+          <a:p>
+            <a:pPr algn="ctr"/>
+          </a:p>
+        </p:txBody>
+      </p:sp>
+      <p:sp>
+        <p:nvSpPr>
+          <p:cNvPr id="4" name="TextBox 3"/>
+          <p:cNvSpPr txBox="1"/>
+          <p:nvPr/>
+        </p:nvSpPr>
+        <p:spPr>
+          <a:xfrm>
+            <a:off x="640080" y="1371600"/>
+            <a:ext cx="10881360" cy="5029200"/>
+          </a:xfrm>
+          <a:prstGeom prst="rect">
+            <a:avLst/>
+          </a:prstGeom>
+          <a:noFill/>
+        </p:spPr>
+        <p:txBody>
+          <a:bodyPr wrap="square">
+            <a:spAutoFit/>
+          </a:bodyPr>
+          <a:lstStyle/>
+          <a:p>
+            <a:pPr>
+              <a:spcBef>
+                <a:spcPts val="0"/>
+              </a:spcBef>
+              <a:spcAft>
+                <a:spcPts val="0"/>
+              </a:spcAft>
+            </a:pPr>
+            <a:r>
+              <a:rPr sz="900">
+                <a:solidFill>
+                  <a:srgbClr val="2D2D2D"/>
+                </a:solidFill>
+                <a:latin typeface="Consolas"/>
+              </a:rPr>
+              <a:t>{# Content area that gets replaced #}</a:t>
+            </a:r>
+          </a:p>
+          <a:p>
+            <a:pPr>
+              <a:spcBef>
+                <a:spcPts val="0"/>
+              </a:spcBef>
+              <a:spcAft>
+                <a:spcPts val="0"/>
+              </a:spcAft>
+            </a:pPr>
+            <a:r>
+              <a:rPr sz="900">
+                <a:solidFill>
+                  <a:srgbClr val="2D2D2D"/>
+                </a:solidFill>
+                <a:latin typeface="Consolas"/>
+              </a:rPr>
+              <a:t>&lt;div class="{{ ajaxContentClass }}"&gt;</a:t>
+            </a:r>
+          </a:p>
+          <a:p>
+            <a:pPr>
+              <a:spcBef>
+                <a:spcPts val="0"/>
+              </a:spcBef>
+              <a:spcAft>
+                <a:spcPts val="0"/>
+              </a:spcAft>
+            </a:pPr>
+            <a:r>
+              <a:rPr sz="900">
+                <a:solidFill>
+                  <a:srgbClr val="2D2D2D"/>
+                </a:solidFill>
+                <a:latin typeface="Consolas"/>
+              </a:rPr>
+              <a:t>    {# ... table, form, loader ... #}</a:t>
+            </a:r>
+          </a:p>
+          <a:p>
+            <a:pPr>
+              <a:spcBef>
+                <a:spcPts val="0"/>
+              </a:spcBef>
+              <a:spcAft>
+                <a:spcPts val="0"/>
+              </a:spcAft>
+            </a:pPr>
+            <a:r>
+              <a:rPr sz="900">
+                <a:solidFill>
+                  <a:srgbClr val="2D2D2D"/>
+                </a:solidFill>
+                <a:latin typeface="Consolas"/>
+              </a:rPr>
+              <a:t>&lt;/div&gt;</a:t>
+            </a:r>
+          </a:p>
+          <a:p>
+            <a:pPr>
+              <a:spcBef>
+                <a:spcPts val="0"/>
+              </a:spcBef>
+              <a:spcAft>
+                <a:spcPts val="0"/>
+              </a:spcAft>
+            </a:pPr>
+            <a:r>
+              <a:rPr sz="900">
+                <a:latin typeface="Consolas"/>
+              </a:rPr>
+              <a:t> </a:t>
+            </a:r>
+          </a:p>
+          <a:p>
+            <a:pPr>
+              <a:spcBef>
+                <a:spcPts val="0"/>
+              </a:spcBef>
+              <a:spcAft>
+                <a:spcPts val="0"/>
+              </a:spcAft>
+            </a:pPr>
+            <a:r>
+              <a:rPr sz="900">
+                <a:solidFill>
+                  <a:srgbClr val="2D2D2D"/>
+                </a:solidFill>
+                <a:latin typeface="Consolas"/>
+              </a:rPr>
+              <a:t>{# AJAX components #}</a:t>
+            </a:r>
+          </a:p>
+          <a:p>
+            <a:pPr>
+              <a:spcBef>
+                <a:spcPts val="0"/>
+              </a:spcBef>
+              <a:spcAft>
+                <a:spcPts val="0"/>
+              </a:spcAft>
+            </a:pPr>
+            <a:r>
+              <a:rPr sz="900">
+                <a:solidFill>
+                  <a:srgbClr val="2D2D2D"/>
+                </a:solidFill>
+                <a:latin typeface="Consolas"/>
+              </a:rPr>
+              <a:t>{% include molecule('ajax-provider') with { class: ajaxProviderClass, attributes: { method: 'POST' } } only %}</a:t>
+            </a:r>
+          </a:p>
+          <a:p>
+            <a:pPr>
+              <a:spcBef>
+                <a:spcPts val="0"/>
+              </a:spcBef>
+              <a:spcAft>
+                <a:spcPts val="0"/>
+              </a:spcAft>
+            </a:pPr>
+            <a:r>
+              <a:rPr sz="900">
+                <a:solidFill>
+                  <a:srgbClr val="2D2D2D"/>
+                </a:solidFill>
+                <a:latin typeface="Consolas"/>
+              </a:rPr>
+              <a:t>{% include molecule('ajax-renderer') with { attributes: { 'provider-class-name': ajaxProviderClass, 'target-class-name': ajaxContentClass, 'mount-after-render': true } } only %}</a:t>
+            </a:r>
+          </a:p>
+          <a:p>
+            <a:pPr>
+              <a:spcBef>
+                <a:spcPts val="0"/>
+              </a:spcBef>
+              <a:spcAft>
+                <a:spcPts val="0"/>
+              </a:spcAft>
+            </a:pPr>
+            <a:r>
+              <a:rPr sz="900">
+                <a:solidFill>
+                  <a:srgbClr val="2D2D2D"/>
+                </a:solidFill>
+                <a:latin typeface="Consolas"/>
+              </a:rPr>
+              <a:t>{% include molecule('ajax-form-submitter') with { attributes: { 'trigger-attribute': 'data-contact-request-ajax-submit', 'provider-class-name': ajaxProviderClass } } only %}</a:t>
+            </a:r>
+          </a:p>
+          <a:p>
+            <a:pPr>
+              <a:spcAft>
+                <a:spcPts val="800"/>
+              </a:spcAft>
+              <a:defRPr sz="1600">
+                <a:solidFill>
+                  <a:srgbClr val="1A1A1A"/>
+                </a:solidFill>
+              </a:defRPr>
+            </a:pPr>
+            <a:r>
+              <a:t>Form buttons use data-contact-request-ajax-submit and formaction to point to the async endpoint:</a:t>
+            </a:r>
+          </a:p>
+          <a:p>
+            <a:pPr>
+              <a:spcBef>
+                <a:spcPts val="0"/>
+              </a:spcBef>
+              <a:spcAft>
+                <a:spcPts val="0"/>
+              </a:spcAft>
+            </a:pPr>
+            <a:r>
+              <a:rPr sz="900" b="1">
+                <a:solidFill>
+                  <a:srgbClr val="007020"/>
+                </a:solidFill>
+                <a:latin typeface="Consolas"/>
+              </a:rPr>
+              <a:t>&lt;button</a:t>
+            </a:r>
+            <a:r>
+              <a:rPr sz="900">
+                <a:solidFill>
+                  <a:srgbClr val="007020"/>
+                </a:solidFill>
+                <a:latin typeface="Consolas"/>
+              </a:rPr>
+              <a:t> data-contact-request-ajax-submit formaction=</a:t>
+            </a:r>
+            <a:r>
+              <a:rPr sz="900">
+                <a:solidFill>
+                  <a:srgbClr val="4070A0"/>
+                </a:solidFill>
+                <a:latin typeface="Consolas"/>
+              </a:rPr>
+              <a:t>"/customer/contact-requests/async/add"</a:t>
+            </a:r>
+            <a:r>
+              <a:rPr sz="900" b="1">
+                <a:solidFill>
+                  <a:srgbClr val="007020"/>
+                </a:solidFill>
+                <a:latin typeface="Consolas"/>
+              </a:rPr>
+              <a:t>&gt;</a:t>
+            </a:r>
+            <a:r>
+              <a:rPr sz="900">
+                <a:solidFill>
+                  <a:srgbClr val="2D2D2D"/>
+                </a:solidFill>
+                <a:latin typeface="Consolas"/>
+              </a:rPr>
+              <a:t>Add Contact Request</a:t>
+            </a:r>
+            <a:r>
+              <a:rPr sz="900" b="1">
+                <a:solidFill>
+                  <a:srgbClr val="007020"/>
+                </a:solidFill>
+                <a:latin typeface="Consolas"/>
+              </a:rPr>
+              <a:t>&lt;/button&gt;</a:t>
+            </a:r>
+          </a:p>
+          <a:p>
+            <a:pPr>
+              <a:spcBef>
+                <a:spcPts val="0"/>
+              </a:spcBef>
+              <a:spcAft>
+                <a:spcPts val="0"/>
+              </a:spcAft>
+            </a:pPr>
+            <a:r>
+              <a:rPr sz="900" b="1">
+                <a:solidFill>
+                  <a:srgbClr val="007020"/>
+                </a:solidFill>
+                <a:latin typeface="Consolas"/>
+              </a:rPr>
+              <a:t>&lt;button</a:t>
+            </a:r>
+            <a:r>
+              <a:rPr sz="900">
+                <a:solidFill>
+                  <a:srgbClr val="007020"/>
+                </a:solidFill>
+                <a:latin typeface="Consolas"/>
+              </a:rPr>
+              <a:t> data-contact-request-ajax-submit formaction=</a:t>
+            </a:r>
+            <a:r>
+              <a:rPr sz="900">
+                <a:solidFill>
+                  <a:srgbClr val="4070A0"/>
+                </a:solidFill>
+                <a:latin typeface="Consolas"/>
+              </a:rPr>
+              <a:t>"/customer/contact-requests/async/delete"</a:t>
+            </a:r>
+            <a:r>
+              <a:rPr sz="900" b="1">
+                <a:solidFill>
+                  <a:srgbClr val="007020"/>
+                </a:solidFill>
+                <a:latin typeface="Consolas"/>
+              </a:rPr>
+              <a:t>&gt;</a:t>
+            </a:r>
+            <a:r>
+              <a:rPr sz="900">
+                <a:solidFill>
+                  <a:srgbClr val="2D2D2D"/>
+                </a:solidFill>
+                <a:latin typeface="Consolas"/>
+              </a:rPr>
+              <a:t>Delete</a:t>
+            </a:r>
+            <a:r>
+              <a:rPr sz="900" b="1">
+                <a:solidFill>
+                  <a:srgbClr val="007020"/>
+                </a:solidFill>
+                <a:latin typeface="Consolas"/>
+              </a:rPr>
+              <a:t>&lt;/button&gt;</a:t>
+            </a:r>
+          </a:p>
+        </p:txBody>
+      </p:sp>
+    </p:spTree>
+  </p:cSld>
+  <p:clrMapOvr>
+    <a:masterClrMapping/>
+  </p:clrMapOvr>
+</p:sld>
+</file>
+
+<file path=ppt/slides/slide207.xml><?xml version="1.0" encoding="utf-8"?>
 <p:sld xmlns:a="http://schemas.openxmlformats.org/drawingml/2006/main" xmlns:p="http://schemas.openxmlformats.org/presentationml/2006/main" xmlns:r="http://schemas.openxmlformats.org/officeDocument/2006/relationships">
   <p:cSld>
     <p:spTree>

--- a/guides-pptx/spryker-academy-fundamental.pptx
+++ b/guides-pptx/spryker-academy-fundamental.pptx
@@ -212,6 +212,8 @@
     <p:sldId id="460" r:id="rId211"/>
     <p:sldId id="461" r:id="rId212"/>
     <p:sldId id="462" r:id="rId213"/>
+    <p:sldId id="463" r:id="rId214"/>
+    <p:sldId id="464" r:id="rId215"/>
   </p:sldIdLst>
   <p:sldSz cx="12191695" cy="6858000" type="screen4x3"/>
   <p:notesSz cx="6858000" cy="9144000"/>
@@ -26293,21 +26295,6 @@
               <a:t>Coding time:</a:t>
             </a:r>
           </a:p>
-          <a:p>
-            <a:pPr>
-              <a:spcAft>
-                <a:spcPts val="800"/>
-              </a:spcAft>
-              <a:defRPr sz="1600">
-                <a:solidFill>
-                  <a:srgbClr val="1A1A1A"/>
-                </a:solidFill>
-              </a:defRPr>
-            </a:pPr>
-            <a:r>
-              <a:t>Open src/SprykerAcademy/Zed/ContactRequest/Business/ContactRequestFacade.php . Implement findContactRequestsByCustomer() by delegating to the factory’s ContactRequestReader.</a:t>
-            </a:r>
-          </a:p>
         </p:txBody>
       </p:sp>
     </p:spTree>
@@ -26358,7 +26345,7 @@
               </a:defRPr>
             </a:pPr>
             <a:r>
-              <a:t>Part 4: Expose via GatewayController</a:t>
+              <a:t>Part 3: Update Persistence and Business Layers (cont.)</a:t>
             </a:r>
           </a:p>
         </p:txBody>
@@ -26439,108 +26426,7 @@
               </a:defRPr>
             </a:pPr>
             <a:r>
-              <a:t>We need three new gateway actions: create, get by customer, and delete.</a:t>
-            </a:r>
-          </a:p>
-          <a:p>
-            <a:pPr>
-              <a:spcAft>
-                <a:spcPts val="800"/>
-              </a:spcAft>
-              <a:defRPr sz="1600">
-                <a:solidFill>
-                  <a:srgbClr val="1A1A1A"/>
-                </a:solidFill>
-              </a:defRPr>
-            </a:pPr>
-            <a:r>
-              <a:t>Coding time:</a:t>
-            </a:r>
-          </a:p>
-          <a:p>
-            <a:pPr>
-              <a:spcAft>
-                <a:spcPts val="800"/>
-              </a:spcAft>
-              <a:defRPr sz="1600">
-                <a:solidFill>
-                  <a:srgbClr val="1A1A1A"/>
-                </a:solidFill>
-              </a:defRPr>
-            </a:pPr>
-            <a:r>
-              <a:t>Open src/SprykerAcademy/Zed/ContactRequest/Communication/Controller/GatewayController.php : 1. In createContactRequestAction() , use the Facade to create and return the message 2. In getContactRequestsByCustomerAction() , use the Facade to find messages by customer and return the collection 3. In deleteContactRequestAction() , use the Facade to delete by ID and return a ContactRequestResponseTransfer with the isSuccessful flag</a:t>
-            </a:r>
-          </a:p>
-          <a:p>
-            <a:pPr>
-              <a:spcAft>
-                <a:spcPts val="800"/>
-              </a:spcAft>
-              <a:defRPr sz="1600">
-                <a:solidFill>
-                  <a:srgbClr val="1A1A1A"/>
-                </a:solidFill>
-              </a:defRPr>
-            </a:pPr>
-            <a:r>
-              <a:t>Clear cache after adding new controller actions:</a:t>
-            </a:r>
-          </a:p>
-          <a:p>
-            <a:pPr>
-              <a:spcBef>
-                <a:spcPts val="0"/>
-              </a:spcBef>
-              <a:spcAft>
-                <a:spcPts val="0"/>
-              </a:spcAft>
-            </a:pPr>
-            <a:r>
-              <a:rPr sz="900">
-                <a:solidFill>
-                  <a:srgbClr val="2D2D2D"/>
-                </a:solidFill>
-                <a:latin typeface="Consolas"/>
-              </a:rPr>
-              <a:t>docker/sdk</a:t>
-            </a:r>
-            <a:r>
-              <a:rPr sz="900">
-                <a:solidFill>
-                  <a:srgbClr val="2D2D2D"/>
-                </a:solidFill>
-                <a:latin typeface="Consolas"/>
-              </a:rPr>
-              <a:t> console cache:empty-all</a:t>
-            </a:r>
-          </a:p>
-          <a:p>
-            <a:pPr>
-              <a:spcBef>
-                <a:spcPts val="0"/>
-              </a:spcBef>
-              <a:spcAft>
-                <a:spcPts val="0"/>
-              </a:spcAft>
-            </a:pPr>
-            <a:r>
-              <a:rPr sz="900">
-                <a:solidFill>
-                  <a:srgbClr val="2D2D2D"/>
-                </a:solidFill>
-                <a:latin typeface="Consolas"/>
-              </a:rPr>
-              <a:t>docker/sdk</a:t>
-            </a:r>
-            <a:r>
-              <a:rPr sz="900">
-                <a:solidFill>
-                  <a:srgbClr val="2D2D2D"/>
-                </a:solidFill>
-                <a:latin typeface="Consolas"/>
-              </a:rPr>
-              <a:t> console propel:model:build</a:t>
+              <a:t>Open src/SprykerAcademy/Zed/ContactRequest/Business/ContactRequestFacade.php . Implement findContactRequestsByCustomer() the same way you wrote the other two in Exercise 4 : delegate to $this-&gt;getService(ContactRequestReader::class) . No Business Factory is involved — the container wires the Reader’s ContactRequestRepositoryInterface for you.</a:t>
             </a:r>
           </a:p>
         </p:txBody>
@@ -26593,7 +26479,7 @@
               </a:defRPr>
             </a:pPr>
             <a:r>
-              <a:t>Part 5: Build the Client</a:t>
+              <a:t>Part 4: Expose via GatewayController</a:t>
             </a:r>
           </a:p>
         </p:txBody>
@@ -26664,20 +26550,17 @@
           <a:lstStyle/>
           <a:p>
             <a:pPr>
-              <a:spcBef>
+              <a:spcAft>
                 <a:spcPts val="800"/>
-              </a:spcBef>
-              <a:spcAft>
-                <a:spcPts val="400"/>
-              </a:spcAft>
-              <a:defRPr sz="1700" b="1">
+              </a:spcAft>
+              <a:defRPr sz="1600">
                 <a:solidFill>
                   <a:srgbClr val="1A1A1A"/>
                 </a:solidFill>
               </a:defRPr>
             </a:pPr>
             <a:r>
-              <a:t>5.1 Update the Stub</a:t>
+              <a:t>We need three new gateway actions: create, get by customer, and delete.</a:t>
             </a:r>
           </a:p>
           <a:p>
@@ -26707,7 +26590,37 @@
               </a:defRPr>
             </a:pPr>
             <a:r>
-              <a:t>Open src/SprykerAcademy/Client/ContactRequest/Stub/ContactRequestStub.php : 1. In createContactRequest() , use $this-&gt;zedRequestClient-&gt;call() with the path /contact-request/gateway/create-contact-request 2. In getContactRequestsByCustomer() , use the path /contact-request/gateway/get-contact-requests-by-customer 3. In deleteContactRequest() , use the path /contact-request/gateway/delete-contact-request</a:t>
+              <a:t>Open src/SprykerAcademy/Zed/ContactRequest/Communication/Controller/GatewayController.php : 1. In createContactRequestAction() , use the Facade to create and return the message 2. In getContactRequestsByCustomerAction() , use the Facade to find messages by customer and return the collection 3. In deleteContactRequestAction() , use the Facade to delete by ID and return a ContactRequestResponseTransfer with the isSuccessful flag</a:t>
+            </a:r>
+          </a:p>
+          <a:p>
+            <a:pPr>
+              <a:spcAft>
+                <a:spcPts val="800"/>
+              </a:spcAft>
+              <a:defRPr sz="1600">
+                <a:solidFill>
+                  <a:srgbClr val="1A1A1A"/>
+                </a:solidFill>
+              </a:defRPr>
+            </a:pPr>
+            <a:r>
+              <a:t>The Facade’s deleteContactRequest() is provided and reaches the Deleter through $this-&gt;getService(ContactRequestDeleter::class) — the same pattern again.</a:t>
+            </a:r>
+          </a:p>
+          <a:p>
+            <a:pPr>
+              <a:spcAft>
+                <a:spcPts val="800"/>
+              </a:spcAft>
+              <a:defRPr sz="1600">
+                <a:solidFill>
+                  <a:srgbClr val="1A1A1A"/>
+                </a:solidFill>
+              </a:defRPr>
+            </a:pPr>
+            <a:r>
+              <a:t>Clear cache after adding new controller actions:</a:t>
             </a:r>
           </a:p>
         </p:txBody>
@@ -26760,7 +26673,7 @@
               </a:defRPr>
             </a:pPr>
             <a:r>
-              <a:t>Part 5: Build the Client (cont.)</a:t>
+              <a:t>Part 4: Expose via GatewayController (cont.)</a:t>
             </a:r>
           </a:p>
         </p:txBody>
@@ -26831,65 +26744,58 @@
           <a:lstStyle/>
           <a:p>
             <a:pPr>
-              <a:spcAft>
-                <a:spcPts val="800"/>
-              </a:spcAft>
-              <a:defRPr sz="1400" i="1">
-                <a:solidFill>
-                  <a:srgbClr val="888888"/>
-                </a:solidFill>
-              </a:defRPr>
-            </a:pPr>
-            <a:r>
-              <a:t>❝ Gateway path convention: /module-name/gateway/action-name where the action name is the controller method without the Action suffix, converted to kebab-case. For example, deleteContactRequestAction() becomes /contact-request/gateway/delete-contact-request .</a:t>
-            </a:r>
-          </a:p>
-          <a:p>
-            <a:pPr>
-              <a:spcBef>
-                <a:spcPts val="800"/>
-              </a:spcBef>
-              <a:spcAft>
-                <a:spcPts val="400"/>
-              </a:spcAft>
-              <a:defRPr sz="1700" b="1">
-                <a:solidFill>
-                  <a:srgbClr val="1A1A1A"/>
-                </a:solidFill>
-              </a:defRPr>
-            </a:pPr>
-            <a:r>
-              <a:t>5.2 Update the Client</a:t>
-            </a:r>
-          </a:p>
-          <a:p>
-            <a:pPr>
-              <a:spcAft>
-                <a:spcPts val="800"/>
-              </a:spcAft>
-              <a:defRPr sz="1600">
-                <a:solidFill>
-                  <a:srgbClr val="1A1A1A"/>
-                </a:solidFill>
-              </a:defRPr>
-            </a:pPr>
-            <a:r>
-              <a:t>Coding time:</a:t>
-            </a:r>
-          </a:p>
-          <a:p>
-            <a:pPr>
-              <a:spcAft>
-                <a:spcPts val="800"/>
-              </a:spcAft>
-              <a:defRPr sz="1600">
-                <a:solidFill>
-                  <a:srgbClr val="1A1A1A"/>
-                </a:solidFill>
-              </a:defRPr>
-            </a:pPr>
-            <a:r>
-              <a:t>Open src/SprykerAcademy/Client/ContactRequest/ContactRequestClient.php : 1. In createContactRequest() , delegate to the ContactRequestStub via the factory 2. In getContactRequestsByCustomer() , delegate to the ContactRequestStub via the factory 3. In deleteContactRequest() , delegate to the ContactRequestStub via the factory</a:t>
+              <a:spcBef>
+                <a:spcPts val="0"/>
+              </a:spcBef>
+              <a:spcAft>
+                <a:spcPts val="0"/>
+              </a:spcAft>
+            </a:pPr>
+            <a:r>
+              <a:rPr sz="900">
+                <a:solidFill>
+                  <a:srgbClr val="2D2D2D"/>
+                </a:solidFill>
+                <a:latin typeface="Consolas"/>
+              </a:rPr>
+              <a:t>docker/sdk</a:t>
+            </a:r>
+            <a:r>
+              <a:rPr sz="900">
+                <a:solidFill>
+                  <a:srgbClr val="2D2D2D"/>
+                </a:solidFill>
+                <a:latin typeface="Consolas"/>
+              </a:rPr>
+              <a:t> console cache:empty-all</a:t>
+            </a:r>
+          </a:p>
+          <a:p>
+            <a:pPr>
+              <a:spcBef>
+                <a:spcPts val="0"/>
+              </a:spcBef>
+              <a:spcAft>
+                <a:spcPts val="0"/>
+              </a:spcAft>
+            </a:pPr>
+            <a:r>
+              <a:rPr sz="900">
+                <a:solidFill>
+                  <a:srgbClr val="2D2D2D"/>
+                </a:solidFill>
+                <a:latin typeface="Consolas"/>
+              </a:rPr>
+              <a:t>docker/sdk</a:t>
+            </a:r>
+            <a:r>
+              <a:rPr sz="900">
+                <a:solidFill>
+                  <a:srgbClr val="2D2D2D"/>
+                </a:solidFill>
+                <a:latin typeface="Consolas"/>
+              </a:rPr>
+              <a:t> console propel:model:build</a:t>
             </a:r>
           </a:p>
         </p:txBody>
@@ -26942,7 +26848,7 @@
               </a:defRPr>
             </a:pPr>
             <a:r>
-              <a:t>Part 5: Build the Client (cont.)</a:t>
+              <a:t>Part 5: Build the Client</a:t>
             </a:r>
           </a:p>
         </p:txBody>
@@ -27013,8 +26919,26 @@
           <a:lstStyle/>
           <a:p>
             <a:pPr>
-              <a:spcAft>
+              <a:spcBef>
                 <a:spcPts val="800"/>
+              </a:spcBef>
+              <a:spcAft>
+                <a:spcPts val="400"/>
+              </a:spcAft>
+              <a:defRPr sz="1700" b="1">
+                <a:solidFill>
+                  <a:srgbClr val="1A1A1A"/>
+                </a:solidFill>
+              </a:defRPr>
+            </a:pPr>
+            <a:r>
+              <a:t>5.1 Update the Stub</a:t>
+            </a:r>
+          </a:p>
+          <a:p>
+            <a:pPr>
+              <a:spcAft>
+                <a:spcPts val="800"/>
               </a:spcAft>
               <a:defRPr sz="1600">
                 <a:solidFill>
@@ -27023,35 +26947,22 @@
               </a:defRPr>
             </a:pPr>
             <a:r>
-              <a:t>Update IDE auto-completion:</a:t>
-            </a:r>
-          </a:p>
-          <a:p>
-            <a:pPr>
-              <a:spcBef>
-                <a:spcPts val="0"/>
-              </a:spcBef>
-              <a:spcAft>
-                <a:spcPts val="0"/>
-              </a:spcAft>
-            </a:pPr>
-            <a:r>
-              <a:rPr sz="900">
-                <a:solidFill>
-                  <a:srgbClr val="2D2D2D"/>
-                </a:solidFill>
-                <a:latin typeface="Consolas"/>
-              </a:rPr>
-              <a:t>docker/sdk</a:t>
-            </a:r>
-            <a:r>
-              <a:rPr sz="900">
-                <a:solidFill>
-                  <a:srgbClr val="2D2D2D"/>
-                </a:solidFill>
-                <a:latin typeface="Consolas"/>
-              </a:rPr>
-              <a:t> console dev:ide-auto-completion:generate</a:t>
+              <a:t>Coding time:</a:t>
+            </a:r>
+          </a:p>
+          <a:p>
+            <a:pPr>
+              <a:spcAft>
+                <a:spcPts val="800"/>
+              </a:spcAft>
+              <a:defRPr sz="1600">
+                <a:solidFill>
+                  <a:srgbClr val="1A1A1A"/>
+                </a:solidFill>
+              </a:defRPr>
+            </a:pPr>
+            <a:r>
+              <a:t>Open src/SprykerAcademy/Client/ContactRequest/Stub/ContactRequestStub.php : 1. In createContactRequest() , use $this-&gt;zedRequestClient-&gt;call() with the path /contact-request/gateway/create-contact-request 2. In getContactRequestsByCustomer() , use the path /contact-request/gateway/get-contact-requests-by-customer 3. In deleteContactRequest() , use the path /contact-request/gateway/delete-contact-request</a:t>
             </a:r>
           </a:p>
         </p:txBody>
@@ -27104,7 +27015,7 @@
               </a:defRPr>
             </a:pPr>
             <a:r>
-              <a:t>Part 6: Extend the CustomerPage Module</a:t>
+              <a:t>Part 5: Build the Client (cont.)</a:t>
             </a:r>
           </a:p>
         </p:txBody>
@@ -27178,6 +27089,39 @@
               <a:spcAft>
                 <a:spcPts val="800"/>
               </a:spcAft>
+              <a:defRPr sz="1400" i="1">
+                <a:solidFill>
+                  <a:srgbClr val="888888"/>
+                </a:solidFill>
+              </a:defRPr>
+            </a:pPr>
+            <a:r>
+              <a:t>❝ Gateway path convention: /module-name/gateway/action-name where the action name is the controller method without the Action suffix, converted to kebab-case. For example, deleteContactRequestAction() becomes /contact-request/gateway/delete-contact-request .</a:t>
+            </a:r>
+          </a:p>
+          <a:p>
+            <a:pPr>
+              <a:spcBef>
+                <a:spcPts val="800"/>
+              </a:spcBef>
+              <a:spcAft>
+                <a:spcPts val="400"/>
+              </a:spcAft>
+              <a:defRPr sz="1700" b="1">
+                <a:solidFill>
+                  <a:srgbClr val="1A1A1A"/>
+                </a:solidFill>
+              </a:defRPr>
+            </a:pPr>
+            <a:r>
+              <a:t>5.2 Update the Client</a:t>
+            </a:r>
+          </a:p>
+          <a:p>
+            <a:pPr>
+              <a:spcAft>
+                <a:spcPts val="800"/>
+              </a:spcAft>
               <a:defRPr sz="1600">
                 <a:solidFill>
                   <a:srgbClr val="1A1A1A"/>
@@ -27185,7 +27129,7 @@
               </a:defRPr>
             </a:pPr>
             <a:r>
-              <a:t>Now we extend Spryker’s core CustomerPage module to add our message functionality. This is the key part of the exercise that demonstrates how to extend core Spryker modules at project level.</a:t>
+              <a:t>Coding time:</a:t>
             </a:r>
           </a:p>
           <a:p>
@@ -27200,55 +27144,7 @@
               </a:defRPr>
             </a:pPr>
             <a:r>
-              <a:t>The pattern: extend the core class in your project namespace, and override or add the methods you need.</a:t>
-            </a:r>
-          </a:p>
-          <a:p>
-            <a:pPr>
-              <a:spcBef>
-                <a:spcPts val="800"/>
-              </a:spcBef>
-              <a:spcAft>
-                <a:spcPts val="400"/>
-              </a:spcAft>
-              <a:defRPr sz="1700" b="1">
-                <a:solidFill>
-                  <a:srgbClr val="1A1A1A"/>
-                </a:solidFill>
-              </a:defRPr>
-            </a:pPr>
-            <a:r>
-              <a:t>6.1 DependencyProvider</a:t>
-            </a:r>
-          </a:p>
-          <a:p>
-            <a:pPr>
-              <a:spcAft>
-                <a:spcPts val="800"/>
-              </a:spcAft>
-              <a:defRPr sz="1600">
-                <a:solidFill>
-                  <a:srgbClr val="1A1A1A"/>
-                </a:solidFill>
-              </a:defRPr>
-            </a:pPr>
-            <a:r>
-              <a:t>We need to inject our ContactRequestClient into the extended CustomerPage module.</a:t>
-            </a:r>
-          </a:p>
-          <a:p>
-            <a:pPr>
-              <a:spcAft>
-                <a:spcPts val="800"/>
-              </a:spcAft>
-              <a:defRPr sz="1600">
-                <a:solidFill>
-                  <a:srgbClr val="1A1A1A"/>
-                </a:solidFill>
-              </a:defRPr>
-            </a:pPr>
-            <a:r>
-              <a:t>Coding time:</a:t>
+              <a:t>Open src/SprykerAcademy/Client/ContactRequest/ContactRequestClient.php : 1. In createContactRequest() , delegate to the ContactRequestStub via the factory 2. In getContactRequestsByCustomer() , delegate to the ContactRequestStub via the factory 3. In deleteContactRequest() , delegate to the ContactRequestStub via the factory</a:t>
             </a:r>
           </a:p>
         </p:txBody>
@@ -27301,7 +27197,7 @@
               </a:defRPr>
             </a:pPr>
             <a:r>
-              <a:t>Part 6: Extend the CustomerPage Module (cont.)</a:t>
+              <a:t>Part 5: Build the Client (cont.)</a:t>
             </a:r>
           </a:p>
         </p:txBody>
@@ -27382,55 +27278,35 @@
               </a:defRPr>
             </a:pPr>
             <a:r>
-              <a:t>Open src/SprykerAcademy/Yves/CustomerPage/CustomerPageDependencyProvider.php . In addContactRequestClient() , use $container-&gt;set() with the CLIENT_CONTACT_REQUEST constant to provide the ContactRequestClient through the locator.</a:t>
-            </a:r>
-          </a:p>
-          <a:p>
-            <a:pPr>
-              <a:spcAft>
-                <a:spcPts val="800"/>
-              </a:spcAft>
-              <a:defRPr sz="1600">
-                <a:solidFill>
-                  <a:srgbClr val="1A1A1A"/>
-                </a:solidFill>
-              </a:defRPr>
-            </a:pPr>
-            <a:r>
-              <a:t>The locator pattern: $container-&gt;getLocator()-&gt;contactRequest()-&gt;client() .</a:t>
-            </a:r>
-          </a:p>
-          <a:p>
-            <a:pPr>
-              <a:spcBef>
-                <a:spcPts val="800"/>
-              </a:spcBef>
-              <a:spcAft>
-                <a:spcPts val="400"/>
-              </a:spcAft>
-              <a:defRPr sz="1700" b="1">
-                <a:solidFill>
-                  <a:srgbClr val="1A1A1A"/>
-                </a:solidFill>
-              </a:defRPr>
-            </a:pPr>
-            <a:r>
-              <a:t>6.2 Factory</a:t>
-            </a:r>
-          </a:p>
-          <a:p>
-            <a:pPr>
-              <a:spcAft>
-                <a:spcPts val="800"/>
-              </a:spcAft>
-              <a:defRPr sz="1600">
-                <a:solidFill>
-                  <a:srgbClr val="1A1A1A"/>
-                </a:solidFill>
-              </a:defRPr>
-            </a:pPr>
-            <a:r>
-              <a:t>Coding time:</a:t>
+              <a:t>Update IDE auto-completion:</a:t>
+            </a:r>
+          </a:p>
+          <a:p>
+            <a:pPr>
+              <a:spcBef>
+                <a:spcPts val="0"/>
+              </a:spcBef>
+              <a:spcAft>
+                <a:spcPts val="0"/>
+              </a:spcAft>
+            </a:pPr>
+            <a:r>
+              <a:rPr sz="900">
+                <a:solidFill>
+                  <a:srgbClr val="2D2D2D"/>
+                </a:solidFill>
+                <a:latin typeface="Consolas"/>
+              </a:rPr>
+              <a:t>docker/sdk</a:t>
+            </a:r>
+            <a:r>
+              <a:rPr sz="900">
+                <a:solidFill>
+                  <a:srgbClr val="2D2D2D"/>
+                </a:solidFill>
+                <a:latin typeface="Consolas"/>
+              </a:rPr>
+              <a:t> console dev:ide-auto-completion:generate</a:t>
             </a:r>
           </a:p>
         </p:txBody>
@@ -27483,7 +27359,7 @@
               </a:defRPr>
             </a:pPr>
             <a:r>
-              <a:t>Part 6: Extend the CustomerPage Module (cont.)</a:t>
+              <a:t>Part 6: Extend the CustomerPage Module</a:t>
             </a:r>
           </a:p>
         </p:txBody>
@@ -27564,7 +27440,7 @@
               </a:defRPr>
             </a:pPr>
             <a:r>
-              <a:t>Open src/SprykerAcademy/Yves/CustomerPage/CustomerPageFactory.php : 1. In getContactRequestClient() , return the provided dependency using the CLIENT_CONTACT_REQUEST constant 2. In createContactRequestForm() , use the Spryker form factory chain to instantiate the form: php $this-&gt;createCustomerFormFactory()-&gt;getFormFactory()-&gt;create(ContactRequestForm::class, $contactRequestTransfer)</a:t>
+              <a:t>Now we extend Spryker’s core CustomerPage module to add our message functionality. This is the key part of the exercise that demonstrates how to extend core Spryker modules at project level.</a:t>
             </a:r>
           </a:p>
           <a:p>
@@ -27572,14 +27448,62 @@
               <a:spcAft>
                 <a:spcPts val="800"/>
               </a:spcAft>
-              <a:defRPr sz="1400" i="1">
-                <a:solidFill>
-                  <a:srgbClr val="888888"/>
-                </a:solidFill>
-              </a:defRPr>
-            </a:pPr>
-            <a:r>
-              <a:t>❝ How Spryker forms work: Spryker Yves doesn’t expose Symfony’s FormFactory directly on the module factory. Instead, each module that uses forms has a proxy FormFactory class (e.g., SprykerShop\Yves\CustomerPage\Form\FormFactory ) that extends AbstractFactory and provides getFormFactory() through the application container. The chain is: CustomerPageFactory::createCustomerFormFactory() -&gt; FormFactory::getFormFactory() -&gt; Symfony’s FormFactory::create() .</a:t>
+              <a:defRPr sz="1600">
+                <a:solidFill>
+                  <a:srgbClr val="1A1A1A"/>
+                </a:solidFill>
+              </a:defRPr>
+            </a:pPr>
+            <a:r>
+              <a:t>The pattern: extend the core class in your project namespace, and override or add the methods you need.</a:t>
+            </a:r>
+          </a:p>
+          <a:p>
+            <a:pPr>
+              <a:spcBef>
+                <a:spcPts val="800"/>
+              </a:spcBef>
+              <a:spcAft>
+                <a:spcPts val="400"/>
+              </a:spcAft>
+              <a:defRPr sz="1700" b="1">
+                <a:solidFill>
+                  <a:srgbClr val="1A1A1A"/>
+                </a:solidFill>
+              </a:defRPr>
+            </a:pPr>
+            <a:r>
+              <a:t>6.1 DependencyProvider</a:t>
+            </a:r>
+          </a:p>
+          <a:p>
+            <a:pPr>
+              <a:spcAft>
+                <a:spcPts val="800"/>
+              </a:spcAft>
+              <a:defRPr sz="1600">
+                <a:solidFill>
+                  <a:srgbClr val="1A1A1A"/>
+                </a:solidFill>
+              </a:defRPr>
+            </a:pPr>
+            <a:r>
+              <a:t>We need to inject our ContactRequestClient into the extended CustomerPage module.</a:t>
+            </a:r>
+          </a:p>
+          <a:p>
+            <a:pPr>
+              <a:spcAft>
+                <a:spcPts val="800"/>
+              </a:spcAft>
+              <a:defRPr sz="1600">
+                <a:solidFill>
+                  <a:srgbClr val="1A1A1A"/>
+                </a:solidFill>
+              </a:defRPr>
+            </a:pPr>
+            <a:r>
+              <a:t>Coding time:</a:t>
             </a:r>
           </a:p>
         </p:txBody>
@@ -27706,20 +27630,35 @@
               <a:spcAft>
                 <a:spcPts val="800"/>
               </a:spcAft>
-              <a:defRPr sz="1400" i="1">
-                <a:solidFill>
-                  <a:srgbClr val="888888"/>
-                </a:solidFill>
-              </a:defRPr>
-            </a:pPr>
-            <a:r>
-              <a:t>❝ Data-mapped forms: Notice we pass $contactRequestTransfer as the second argument to create() . This tells Symfony to bind the form directly to the transfer object. When the form is submitted, $form-&gt;getData() returns the hydrated ContactRequestTransfer directly — no manual field mapping needed.</a:t>
-            </a:r>
-          </a:p>
-          <a:p>
-            <a:pPr>
-              <a:spcBef>
+              <a:defRPr sz="1600">
+                <a:solidFill>
+                  <a:srgbClr val="1A1A1A"/>
+                </a:solidFill>
+              </a:defRPr>
+            </a:pPr>
+            <a:r>
+              <a:t>Open src/SprykerAcademy/Yves/CustomerPage/CustomerPageDependencyProvider.php . In addContactRequestClient() , use $container-&gt;set() with the CLIENT_CONTACT_REQUEST constant to provide the ContactRequestClient through the locator.</a:t>
+            </a:r>
+          </a:p>
+          <a:p>
+            <a:pPr>
+              <a:spcAft>
                 <a:spcPts val="800"/>
+              </a:spcAft>
+              <a:defRPr sz="1600">
+                <a:solidFill>
+                  <a:srgbClr val="1A1A1A"/>
+                </a:solidFill>
+              </a:defRPr>
+            </a:pPr>
+            <a:r>
+              <a:t>The locator pattern: $container-&gt;getLocator()-&gt;contactRequest()-&gt;client() .</a:t>
+            </a:r>
+          </a:p>
+          <a:p>
+            <a:pPr>
+              <a:spcBef>
+                <a:spcPts val="800"/>
               </a:spcBef>
               <a:spcAft>
                 <a:spcPts val="400"/>
@@ -27731,7 +27670,7 @@
               </a:defRPr>
             </a:pPr>
             <a:r>
-              <a:t>6.3 ContactRequestForm</a:t>
+              <a:t>6.2 Factory</a:t>
             </a:r>
           </a:p>
           <a:p>
@@ -27746,37 +27685,7 @@
               </a:defRPr>
             </a:pPr>
             <a:r>
-              <a:t>This is a standard Symfony form with a text field for the message.</a:t>
-            </a:r>
-          </a:p>
-          <a:p>
-            <a:pPr>
-              <a:spcAft>
-                <a:spcPts val="800"/>
-              </a:spcAft>
-              <a:defRPr sz="1600">
-                <a:solidFill>
-                  <a:srgbClr val="1A1A1A"/>
-                </a:solidFill>
-              </a:defRPr>
-            </a:pPr>
-            <a:r>
               <a:t>Coding time:</a:t>
-            </a:r>
-          </a:p>
-          <a:p>
-            <a:pPr>
-              <a:spcAft>
-                <a:spcPts val="800"/>
-              </a:spcAft>
-              <a:defRPr sz="1600">
-                <a:solidFill>
-                  <a:srgbClr val="1A1A1A"/>
-                </a:solidFill>
-              </a:defRPr>
-            </a:pPr>
-            <a:r>
-              <a:t>Open src/SprykerAcademy/Yves/CustomerPage/Form/ContactRequestForm.php . In addMessageField() , add a TextType field using the FIELD_MESSAGE constant, with a label and a NotBlank constraint.</a:t>
             </a:r>
           </a:p>
         </p:txBody>
@@ -27903,6 +27812,21 @@
               <a:spcAft>
                 <a:spcPts val="800"/>
               </a:spcAft>
+              <a:defRPr sz="1600">
+                <a:solidFill>
+                  <a:srgbClr val="1A1A1A"/>
+                </a:solidFill>
+              </a:defRPr>
+            </a:pPr>
+            <a:r>
+              <a:t>Open src/SprykerAcademy/Yves/CustomerPage/CustomerPageFactory.php : 1. In getContactRequestClient() , return the provided dependency using the CLIENT_CONTACT_REQUEST constant 2. In createContactRequestForm() , use the Spryker form factory chain to instantiate the form: php $this-&gt;createCustomerFormFactory()-&gt;getFormFactory()-&gt;create(ContactRequestForm::class, $contactRequestTransfer)</a:t>
+            </a:r>
+          </a:p>
+          <a:p>
+            <a:pPr>
+              <a:spcAft>
+                <a:spcPts val="800"/>
+              </a:spcAft>
               <a:defRPr sz="1400" i="1">
                 <a:solidFill>
                   <a:srgbClr val="888888"/>
@@ -27910,40 +27834,7 @@
               </a:defRPr>
             </a:pPr>
             <a:r>
-              <a:t>❝ Symfony form + Spryker transfers: Spryker transfer objects implement ArrayAccess , so Symfony’s PropertyAccessor can read/write properties by name. When the form field name matches a transfer property (e.g., message maps to getMessage() / setMessage() ), data binding works automatically. No need for configureOptions() with data_class — though adding it would be more explicit.</a:t>
-            </a:r>
-          </a:p>
-          <a:p>
-            <a:pPr>
-              <a:spcAft>
-                <a:spcPts val="800"/>
-              </a:spcAft>
-              <a:defRPr sz="1400" i="1">
-                <a:solidFill>
-                  <a:srgbClr val="888888"/>
-                </a:solidFill>
-              </a:defRPr>
-            </a:pPr>
-            <a:r>
-              <a:t>❝ No SubmitType in the form class: The submit button is rendered directly in the Twig template with Spryker’s button CSS classes. This keeps the form class focused on data fields and validation, and gives the template full control over button styling.</a:t>
-            </a:r>
-          </a:p>
-          <a:p>
-            <a:pPr>
-              <a:spcBef>
-                <a:spcPts val="800"/>
-              </a:spcBef>
-              <a:spcAft>
-                <a:spcPts val="400"/>
-              </a:spcAft>
-              <a:defRPr sz="1700" b="1">
-                <a:solidFill>
-                  <a:srgbClr val="1A1A1A"/>
-                </a:solidFill>
-              </a:defRPr>
-            </a:pPr>
-            <a:r>
-              <a:t>6.4 ContactRequestController</a:t>
+              <a:t>❝ How Spryker forms work: Spryker Yves doesn’t expose Symfony’s FormFactory directly on the module factory. Instead, each module that uses forms has a proxy FormFactory class (e.g., SprykerShop\Yves\CustomerPage\Form\FormFactory ) that extends AbstractFactory and provides getFormFactory() through the application container. The chain is: CustomerPageFactory::createCustomerFormFactory() -&gt; FormFactory::getFormFactory() -&gt; Symfony’s FormFactory::create() .</a:t>
             </a:r>
           </a:p>
         </p:txBody>
@@ -28892,6 +28783,39 @@
               <a:spcAft>
                 <a:spcPts val="800"/>
               </a:spcAft>
+              <a:defRPr sz="1400" i="1">
+                <a:solidFill>
+                  <a:srgbClr val="888888"/>
+                </a:solidFill>
+              </a:defRPr>
+            </a:pPr>
+            <a:r>
+              <a:t>❝ Data-mapped forms: Notice we pass $contactRequestTransfer as the second argument to create() . This tells Symfony to bind the form directly to the transfer object. When the form is submitted, $form-&gt;getData() returns the hydrated ContactRequestTransfer directly — no manual field mapping needed.</a:t>
+            </a:r>
+          </a:p>
+          <a:p>
+            <a:pPr>
+              <a:spcBef>
+                <a:spcPts val="800"/>
+              </a:spcBef>
+              <a:spcAft>
+                <a:spcPts val="400"/>
+              </a:spcAft>
+              <a:defRPr sz="1700" b="1">
+                <a:solidFill>
+                  <a:srgbClr val="1A1A1A"/>
+                </a:solidFill>
+              </a:defRPr>
+            </a:pPr>
+            <a:r>
+              <a:t>6.3 ContactRequestForm</a:t>
+            </a:r>
+          </a:p>
+          <a:p>
+            <a:pPr>
+              <a:spcAft>
+                <a:spcPts val="800"/>
+              </a:spcAft>
               <a:defRPr sz="1600">
                 <a:solidFill>
                   <a:srgbClr val="1A1A1A"/>
@@ -28899,7 +28823,7 @@
               </a:defRPr>
             </a:pPr>
             <a:r>
-              <a:t>The controller handles listing messages, creating new ones, and deleting. It extends AbstractCustomerController from SprykerShop which provides getLoggedInCustomerTransfer() .</a:t>
+              <a:t>This is a standard Symfony form with a text field for the message.</a:t>
             </a:r>
           </a:p>
           <a:p>
@@ -28929,7 +28853,7 @@
               </a:defRPr>
             </a:pPr>
             <a:r>
-              <a:t>Open src/SprykerAcademy/Yves/CustomerPage/Controller/ContactRequestController.php :</a:t>
+              <a:t>Open src/SprykerAcademy/Yves/CustomerPage/Form/ContactRequestForm.php . In addMessageField() , add a TextType field using the FIELD_MESSAGE constant, with a label and a NotBlank constraint.</a:t>
             </a:r>
           </a:p>
         </p:txBody>
@@ -29056,14 +28980,47 @@
               <a:spcAft>
                 <a:spcPts val="800"/>
               </a:spcAft>
-              <a:defRPr sz="1600">
+              <a:defRPr sz="1400" i="1">
+                <a:solidFill>
+                  <a:srgbClr val="888888"/>
+                </a:solidFill>
+              </a:defRPr>
+            </a:pPr>
+            <a:r>
+              <a:t>❝ Symfony form + Spryker transfers: Spryker transfer objects implement ArrayAccess , so Symfony’s PropertyAccessor can read/write properties by name. When the form field name matches a transfer property (e.g., message maps to getMessage() / setMessage() ), data binding works automatically. No need for configureOptions() with data_class — though adding it would be more explicit.</a:t>
+            </a:r>
+          </a:p>
+          <a:p>
+            <a:pPr>
+              <a:spcAft>
+                <a:spcPts val="800"/>
+              </a:spcAft>
+              <a:defRPr sz="1400" i="1">
+                <a:solidFill>
+                  <a:srgbClr val="888888"/>
+                </a:solidFill>
+              </a:defRPr>
+            </a:pPr>
+            <a:r>
+              <a:t>❝ No SubmitType in the form class: The submit button is rendered directly in the Twig template with Spryker’s button CSS classes. This keeps the form class focused on data fields and validation, and gives the template full control over button styling.</a:t>
+            </a:r>
+          </a:p>
+          <a:p>
+            <a:pPr>
+              <a:spcBef>
+                <a:spcPts val="800"/>
+              </a:spcBef>
+              <a:spcAft>
+                <a:spcPts val="400"/>
+              </a:spcAft>
+              <a:defRPr sz="1700" b="1">
                 <a:solidFill>
                   <a:srgbClr val="1A1A1A"/>
                 </a:solidFill>
               </a:defRPr>
             </a:pPr>
             <a:r>
-              <a:t>In listAction() : 1. Get the logged-in customer using $this-&gt;getLoggedInCustomerTransfer() 2. Create a ContactRequestCriteriaTransfer and set the fkCustomer using setFkCustomerOrFail() for strict validation 3. Fetch messages using the ContactRequestClient through the factory 4. Create the message form with $this-&gt;getFactory()-&gt;createContactRequestForm(new ContactRequestTransfer()) — pass a fresh transfer as the data object 5. Handle the request with $messageForm-&gt;handleRequest($request) 6. If the form is submitted and valid, get the hydrated transfer with $messageForm-&gt;getData() , set the fkCustomer , and create the message 7. Return a view with the contactRequests and contactRequestForm variables, using the template @CustomerPage/views/contact-request/list.twig</a:t>
+              <a:t>6.4 ContactRequestController</a:t>
             </a:r>
           </a:p>
         </p:txBody>
@@ -29197,7 +29154,7 @@
               </a:defRPr>
             </a:pPr>
             <a:r>
-              <a:t>In deleteAction() : 1. Use $this-&gt;castId($request-&gt;request-&gt;get('idContactRequest')) to safely extract and validate the contact request ID 2. Create a ContactRequestCriteriaTransfer , set the idContactRequest , and call deleteContactRequest() on the client 3. Redirect back to the messages list</a:t>
+              <a:t>The controller handles listing messages, creating new ones, and deleting. It extends AbstractCustomerController from SprykerShop which provides getLoggedInCustomerTransfer() .</a:t>
             </a:r>
           </a:p>
           <a:p>
@@ -29205,14 +29162,14 @@
               <a:spcAft>
                 <a:spcPts val="800"/>
               </a:spcAft>
-              <a:defRPr sz="1400" i="1">
-                <a:solidFill>
-                  <a:srgbClr val="888888"/>
-                </a:solidFill>
-              </a:defRPr>
-            </a:pPr>
-            <a:r>
-              <a:t>❝ castId() pattern: Spryker’s Zed AbstractController provides castId() which validates that an ID is numeric and non-zero, throwing an exception otherwise. Since this method isn’t available in Yves controllers, we add a protected castId() method following the same pattern. This prevents silently passing 0 or non-numeric values to the persistence layer.</a:t>
+              <a:defRPr sz="1600">
+                <a:solidFill>
+                  <a:srgbClr val="1A1A1A"/>
+                </a:solidFill>
+              </a:defRPr>
+            </a:pPr>
+            <a:r>
+              <a:t>Coding time:</a:t>
             </a:r>
           </a:p>
           <a:p>
@@ -29220,14 +29177,14 @@
               <a:spcAft>
                 <a:spcPts val="800"/>
               </a:spcAft>
-              <a:defRPr sz="1400" i="1">
-                <a:solidFill>
-                  <a:srgbClr val="888888"/>
-                </a:solidFill>
-              </a:defRPr>
-            </a:pPr>
-            <a:r>
-              <a:t>❝ setFkCustomerOrFail() vs setFkCustomer() : The OrFail variant throws an exception if the value is null. Use it when the value is required for the operation to make sense — it fails fast with a clear error instead of silently proceeding with null.</a:t>
+              <a:defRPr sz="1600">
+                <a:solidFill>
+                  <a:srgbClr val="1A1A1A"/>
+                </a:solidFill>
+              </a:defRPr>
+            </a:pPr>
+            <a:r>
+              <a:t>Open src/SprykerAcademy/Yves/CustomerPage/Controller/ContactRequestController.php :</a:t>
             </a:r>
           </a:p>
         </p:txBody>
@@ -29351,83 +29308,17 @@
           <a:lstStyle/>
           <a:p>
             <a:pPr>
-              <a:spcBef>
+              <a:spcAft>
                 <a:spcPts val="800"/>
-              </a:spcBef>
-              <a:spcAft>
-                <a:spcPts val="400"/>
-              </a:spcAft>
-              <a:defRPr sz="1700" b="1">
+              </a:spcAft>
+              <a:defRPr sz="1600">
                 <a:solidFill>
                   <a:srgbClr val="1A1A1A"/>
                 </a:solidFill>
               </a:defRPr>
             </a:pPr>
             <a:r>
-              <a:t>6.5 Route Provider Plugin</a:t>
-            </a:r>
-          </a:p>
-          <a:p>
-            <a:pPr>
-              <a:spcAft>
-                <a:spcPts val="800"/>
-              </a:spcAft>
-              <a:defRPr sz="1600">
-                <a:solidFill>
-                  <a:srgbClr val="1A1A1A"/>
-                </a:solidFill>
-              </a:defRPr>
-            </a:pPr>
-            <a:r>
-              <a:t>Coding time:</a:t>
-            </a:r>
-          </a:p>
-          <a:p>
-            <a:pPr>
-              <a:spcAft>
-                <a:spcPts val="800"/>
-              </a:spcAft>
-              <a:defRPr sz="1600">
-                <a:solidFill>
-                  <a:srgbClr val="1A1A1A"/>
-                </a:solidFill>
-              </a:defRPr>
-            </a:pPr>
-            <a:r>
-              <a:t>Open src/SprykerAcademy/Yves/CustomerPage/Plugin/Router/CustomerPageRouteProviderPlugin.php : 1. In addCustomerContactRequestsRoute() , build a route for /customer/contact-requests pointing to the ContactRequest controller, listAction (GET + POST) 2. Add an addCustomerContactRequestsDeleteRoute() for POST /customer/contact-requests/delete pointing to the ContactRequest controller, deleteAction</a:t>
-            </a:r>
-          </a:p>
-          <a:p>
-            <a:pPr>
-              <a:spcBef>
-                <a:spcPts val="800"/>
-              </a:spcBef>
-              <a:spcAft>
-                <a:spcPts val="400"/>
-              </a:spcAft>
-              <a:defRPr sz="1700" b="1">
-                <a:solidFill>
-                  <a:srgbClr val="1A1A1A"/>
-                </a:solidFill>
-              </a:defRPr>
-            </a:pPr>
-            <a:r>
-              <a:t>6.6 Provided Scaffolding (no coding needed)</a:t>
-            </a:r>
-          </a:p>
-          <a:p>
-            <a:pPr>
-              <a:spcAft>
-                <a:spcPts val="800"/>
-              </a:spcAft>
-              <a:defRPr sz="1600">
-                <a:solidFill>
-                  <a:srgbClr val="1A1A1A"/>
-                </a:solidFill>
-              </a:defRPr>
-            </a:pPr>
-            <a:r>
-              <a:t>The following files are already provided by the exercise skeleton:</a:t>
+              <a:t>In listAction() : 1. Get the logged-in customer using $this-&gt;getLoggedInCustomerTransfer() 2. Create a ContactRequestCriteriaTransfer and set the fkCustomer using setFkCustomerOrFail() for strict validation 3. Fetch messages using the ContactRequestClient through the factory 4. Create the message form with $this-&gt;getFactory()-&gt;createContactRequestForm(new ContactRequestTransfer()) — pass a fresh transfer as the data object 5. Handle the request with $messageForm-&gt;handleRequest($request) 6. If the form is submitted and valid, get the hydrated transfer with $messageForm-&gt;getData() , set the fkCustomer , and create the message 7. Return a view with the contactRequests and contactRequestForm variables, using the template @CustomerPage/views/contact-request/list.twig</a:t>
             </a:r>
           </a:p>
         </p:txBody>
@@ -29552,61 +29443,46 @@
           <a:p>
             <a:pPr>
               <a:spcAft>
-                <a:spcPts val="400"/>
-              </a:spcAft>
-              <a:defRPr sz="1500">
+                <a:spcPts val="800"/>
+              </a:spcAft>
+              <a:defRPr sz="1600">
                 <a:solidFill>
                   <a:srgbClr val="1A1A1A"/>
                 </a:solidFill>
               </a:defRPr>
             </a:pPr>
             <a:r>
-              <a:t>• src/SprykerAcademy/Yves/Router/RouterDependencyProvider.php — Extends the project’s Pyz\Yves\Router\RouterDependencyProvider and swaps the core CustomerPageRouteProviderPlugin for your extended version. Because SprykerAcademy is resolved before Pyz , no project file is edited.</a:t>
-            </a:r>
-          </a:p>
-          <a:p>
-            <a:pPr>
-              <a:spcAft>
-                <a:spcPts val="400"/>
-              </a:spcAft>
-              <a:defRPr sz="1500">
-                <a:solidFill>
-                  <a:srgbClr val="1A1A1A"/>
-                </a:solidFill>
-              </a:defRPr>
-            </a:pPr>
-            <a:r>
-              <a:t>• src/SprykerAcademy/Yves/CustomerPage/Theme/.../views/contact-request/list.twig — The Twig template showing the contact request table with delete buttons and the add form</a:t>
-            </a:r>
-          </a:p>
-          <a:p>
-            <a:pPr>
-              <a:spcAft>
-                <a:spcPts val="400"/>
-              </a:spcAft>
-              <a:defRPr sz="1500">
-                <a:solidFill>
-                  <a:srgbClr val="1A1A1A"/>
-                </a:solidFill>
-              </a:defRPr>
-            </a:pPr>
-            <a:r>
-              <a:t>• src/SprykerAcademy/Zed/ContactRequest/Business/Deleter/ContactRequestDeleter.php and the Facade’s deleteContactRequest() — the delete business model, so Part 4 has something to call</a:t>
-            </a:r>
-          </a:p>
-          <a:p>
-            <a:pPr>
-              <a:spcAft>
-                <a:spcPts val="400"/>
-              </a:spcAft>
-              <a:defRPr sz="1500">
-                <a:solidFill>
-                  <a:srgbClr val="1A1A1A"/>
-                </a:solidFill>
-              </a:defRPr>
-            </a:pPr>
-            <a:r>
-              <a:t>• ContactRequestController::castId() — the numeric-id guard described in 6.4</a:t>
+              <a:t>In deleteAction() : 1. Use $this-&gt;castId($request-&gt;request-&gt;get('idContactRequest')) to safely extract and validate the contact request ID 2. Create a ContactRequestCriteriaTransfer , set the idContactRequest , and call deleteContactRequest() on the client 3. Redirect back to the messages list</a:t>
+            </a:r>
+          </a:p>
+          <a:p>
+            <a:pPr>
+              <a:spcAft>
+                <a:spcPts val="800"/>
+              </a:spcAft>
+              <a:defRPr sz="1400" i="1">
+                <a:solidFill>
+                  <a:srgbClr val="888888"/>
+                </a:solidFill>
+              </a:defRPr>
+            </a:pPr>
+            <a:r>
+              <a:t>❝ castId() pattern: Spryker’s Zed AbstractController provides castId() which validates that an ID is numeric and non-zero, throwing an exception otherwise. Since this method isn’t available in Yves controllers, we add a protected castId() method following the same pattern. This prevents silently passing 0 or non-numeric values to the persistence layer.</a:t>
+            </a:r>
+          </a:p>
+          <a:p>
+            <a:pPr>
+              <a:spcAft>
+                <a:spcPts val="800"/>
+              </a:spcAft>
+              <a:defRPr sz="1400" i="1">
+                <a:solidFill>
+                  <a:srgbClr val="888888"/>
+                </a:solidFill>
+              </a:defRPr>
+            </a:pPr>
+            <a:r>
+              <a:t>❝ setFkCustomerOrFail() vs setFkCustomer() : The OrFail variant throws an exception if the value is null. Use it when the value is required for the operation to make sense — it fails fast with a clear error instead of silently proceeding with null.</a:t>
             </a:r>
           </a:p>
         </p:txBody>
@@ -29730,8 +29606,26 @@
           <a:lstStyle/>
           <a:p>
             <a:pPr>
-              <a:spcAft>
+              <a:spcBef>
                 <a:spcPts val="800"/>
+              </a:spcBef>
+              <a:spcAft>
+                <a:spcPts val="400"/>
+              </a:spcAft>
+              <a:defRPr sz="1700" b="1">
+                <a:solidFill>
+                  <a:srgbClr val="1A1A1A"/>
+                </a:solidFill>
+              </a:defRPr>
+            </a:pPr>
+            <a:r>
+              <a:t>6.5 Route Provider Plugin</a:t>
+            </a:r>
+          </a:p>
+          <a:p>
+            <a:pPr>
+              <a:spcAft>
+                <a:spcPts val="800"/>
               </a:spcAft>
               <a:defRPr sz="1600">
                 <a:solidFill>
@@ -29740,13 +29634,28 @@
               </a:defRPr>
             </a:pPr>
             <a:r>
-              <a:t>Take a moment to review these files to understand: - How Spryker’s template override mechanism works (project-level Twig overrides vendor templates by matching the file path) - How the form is rendered with form_start / form_widget / form_end (Symfony form rendering helpers) - How each table row has a mini POST form for the delete button (no link — delete is always POST)</a:t>
-            </a:r>
-          </a:p>
-          <a:p>
-            <a:pPr>
-              <a:spcBef>
+              <a:t>Coding time:</a:t>
+            </a:r>
+          </a:p>
+          <a:p>
+            <a:pPr>
+              <a:spcAft>
                 <a:spcPts val="800"/>
+              </a:spcAft>
+              <a:defRPr sz="1600">
+                <a:solidFill>
+                  <a:srgbClr val="1A1A1A"/>
+                </a:solidFill>
+              </a:defRPr>
+            </a:pPr>
+            <a:r>
+              <a:t>Open src/SprykerAcademy/Yves/CustomerPage/Plugin/Router/CustomerPageRouteProviderPlugin.php : 1. In addCustomerContactRequestsRoute() , build a route for /customer/contact-requests pointing to the ContactRequest controller, listAction (GET + POST) 2. Add an addCustomerContactRequestsDeleteRoute() for POST /customer/contact-requests/delete pointing to the ContactRequest controller, deleteAction</a:t>
+            </a:r>
+          </a:p>
+          <a:p>
+            <a:pPr>
+              <a:spcBef>
+                <a:spcPts val="800"/>
               </a:spcBef>
               <a:spcAft>
                 <a:spcPts val="400"/>
@@ -29758,7 +29667,7 @@
               </a:defRPr>
             </a:pPr>
             <a:r>
-              <a:t>6.7 Sidebar Menu Item</a:t>
+              <a:t>6.6 Provided Scaffolding (no coding needed)</a:t>
             </a:r>
           </a:p>
           <a:p>
@@ -29773,7 +29682,7 @@
               </a:defRPr>
             </a:pPr>
             <a:r>
-              <a:t>Once the route exists, add a “My Contact Requests” entry to the customer account sidebar. The project overrides that molecule in src/Pyz/Yves/CustomerPage/Theme/default/components/molecules/navigation-sidebar/navigation-sidebar.twig ; append one more entry to its items array:</a:t>
+              <a:t>The following files are already provided by the exercise skeleton:</a:t>
             </a:r>
           </a:p>
         </p:txBody>
@@ -29897,116 +29806,62 @@
           <a:lstStyle/>
           <a:p>
             <a:pPr>
-              <a:spcBef>
-                <a:spcPts val="0"/>
-              </a:spcBef>
-              <a:spcAft>
-                <a:spcPts val="0"/>
-              </a:spcAft>
-            </a:pPr>
-            <a:r>
-              <a:rPr sz="900">
-                <a:solidFill>
-                  <a:srgbClr val="2D2D2D"/>
-                </a:solidFill>
-                <a:latin typeface="Consolas"/>
-              </a:rPr>
-              <a:t>        {</a:t>
-            </a:r>
-          </a:p>
-          <a:p>
-            <a:pPr>
-              <a:spcBef>
-                <a:spcPts val="0"/>
-              </a:spcBef>
-              <a:spcAft>
-                <a:spcPts val="0"/>
-              </a:spcAft>
-            </a:pPr>
-            <a:r>
-              <a:rPr sz="900">
-                <a:solidFill>
-                  <a:srgbClr val="2D2D2D"/>
-                </a:solidFill>
-                <a:latin typeface="Consolas"/>
-              </a:rPr>
-              <a:t>            name: 'contact-requests',</a:t>
-            </a:r>
-          </a:p>
-          <a:p>
-            <a:pPr>
-              <a:spcBef>
-                <a:spcPts val="0"/>
-              </a:spcBef>
-              <a:spcAft>
-                <a:spcPts val="0"/>
-              </a:spcAft>
-            </a:pPr>
-            <a:r>
-              <a:rPr sz="900">
-                <a:solidFill>
-                  <a:srgbClr val="2D2D2D"/>
-                </a:solidFill>
-                <a:latin typeface="Consolas"/>
-              </a:rPr>
-              <a:t>            url: path('customer/contact-requests'),</a:t>
-            </a:r>
-          </a:p>
-          <a:p>
-            <a:pPr>
-              <a:spcBef>
-                <a:spcPts val="0"/>
-              </a:spcBef>
-              <a:spcAft>
-                <a:spcPts val="0"/>
-              </a:spcAft>
-            </a:pPr>
-            <a:r>
-              <a:rPr sz="900">
-                <a:solidFill>
-                  <a:srgbClr val="2D2D2D"/>
-                </a:solidFill>
-                <a:latin typeface="Consolas"/>
-              </a:rPr>
-              <a:t>            label: 'My Contact Requests',</a:t>
-            </a:r>
-          </a:p>
-          <a:p>
-            <a:pPr>
-              <a:spcBef>
-                <a:spcPts val="0"/>
-              </a:spcBef>
-              <a:spcAft>
-                <a:spcPts val="0"/>
-              </a:spcAft>
-            </a:pPr>
-            <a:r>
-              <a:rPr sz="900">
-                <a:solidFill>
-                  <a:srgbClr val="2D2D2D"/>
-                </a:solidFill>
-                <a:latin typeface="Consolas"/>
-              </a:rPr>
-              <a:t>            icon: 'envelopes',</a:t>
-            </a:r>
-          </a:p>
-          <a:p>
-            <a:pPr>
-              <a:spcBef>
-                <a:spcPts val="0"/>
-              </a:spcBef>
-              <a:spcAft>
-                <a:spcPts val="0"/>
-              </a:spcAft>
-            </a:pPr>
-            <a:r>
-              <a:rPr sz="900">
-                <a:solidFill>
-                  <a:srgbClr val="2D2D2D"/>
-                </a:solidFill>
-                <a:latin typeface="Consolas"/>
-              </a:rPr>
-              <a:t>        },</a:t>
+              <a:spcAft>
+                <a:spcPts val="400"/>
+              </a:spcAft>
+              <a:defRPr sz="1500">
+                <a:solidFill>
+                  <a:srgbClr val="1A1A1A"/>
+                </a:solidFill>
+              </a:defRPr>
+            </a:pPr>
+            <a:r>
+              <a:t>• src/SprykerAcademy/Yves/Router/RouterDependencyProvider.php — Extends the project’s Pyz\Yves\Router\RouterDependencyProvider and swaps the core CustomerPageRouteProviderPlugin for your extended version. Because SprykerAcademy is resolved before Pyz , no project file is edited.</a:t>
+            </a:r>
+          </a:p>
+          <a:p>
+            <a:pPr>
+              <a:spcAft>
+                <a:spcPts val="400"/>
+              </a:spcAft>
+              <a:defRPr sz="1500">
+                <a:solidFill>
+                  <a:srgbClr val="1A1A1A"/>
+                </a:solidFill>
+              </a:defRPr>
+            </a:pPr>
+            <a:r>
+              <a:t>• src/SprykerAcademy/Yves/CustomerPage/Theme/.../views/contact-request/list.twig — The Twig template showing the contact request table with delete buttons and the add form</a:t>
+            </a:r>
+          </a:p>
+          <a:p>
+            <a:pPr>
+              <a:spcAft>
+                <a:spcPts val="400"/>
+              </a:spcAft>
+              <a:defRPr sz="1500">
+                <a:solidFill>
+                  <a:srgbClr val="1A1A1A"/>
+                </a:solidFill>
+              </a:defRPr>
+            </a:pPr>
+            <a:r>
+              <a:t>• src/SprykerAcademy/Zed/ContactRequest/Business/Deleter/ContactRequestDeleter.php and the Facade’s deleteContactRequest() — the delete business model, so Part 4 has something to call</a:t>
+            </a:r>
+          </a:p>
+          <a:p>
+            <a:pPr>
+              <a:spcAft>
+                <a:spcPts val="400"/>
+              </a:spcAft>
+              <a:defRPr sz="1500">
+                <a:solidFill>
+                  <a:srgbClr val="1A1A1A"/>
+                </a:solidFill>
+              </a:defRPr>
+            </a:pPr>
+            <a:r>
+              <a:t>• ContactRequestController::castId() — the numeric-id guard described in 6.4</a:t>
             </a:r>
           </a:p>
         </p:txBody>
@@ -30133,20 +29988,38 @@
               <a:spcAft>
                 <a:spcPts val="800"/>
               </a:spcAft>
-              <a:defRPr sz="1400" i="1">
-                <a:solidFill>
-                  <a:srgbClr val="888888"/>
-                </a:solidFill>
-              </a:defRPr>
-            </a:pPr>
-            <a:r>
-              <a:t>❝ customer/contact-requests is the route name ( ContactRequestController::ROUTE_CUSTOMER_CONTACT_REQUESTS ), not the path. Add the item only after the route is registered, otherwise path() fails on every account page. name is what the sidebar compares against the activePage the list page sets, so it has to read contact-requests for the entry to be highlighted. Do not wrap the entry in a Twig comment: the whole items array lives inside one {% define data = {...} %} tag, and a {# ... #} in there is read as an unclosed { , which kills every account page with a SyntaxError . When you load the complete branch, the loader adds this item for you and removes it again when you load another branch.</a:t>
-            </a:r>
-          </a:p>
-          <a:p>
-            <a:pPr>
-              <a:spcAft>
+              <a:defRPr sz="1600">
+                <a:solidFill>
+                  <a:srgbClr val="1A1A1A"/>
+                </a:solidFill>
+              </a:defRPr>
+            </a:pPr>
+            <a:r>
+              <a:t>Take a moment to review these files to understand: - How Spryker’s template override mechanism works (project-level Twig overrides vendor templates by matching the file path) - How the form is rendered with form_start / form_widget / form_end (Symfony form rendering helpers) - How each table row has a mini POST form for the delete button (no link — delete is always POST)</a:t>
+            </a:r>
+          </a:p>
+          <a:p>
+            <a:pPr>
+              <a:spcBef>
                 <a:spcPts val="800"/>
+              </a:spcBef>
+              <a:spcAft>
+                <a:spcPts val="400"/>
+              </a:spcAft>
+              <a:defRPr sz="1700" b="1">
+                <a:solidFill>
+                  <a:srgbClr val="1A1A1A"/>
+                </a:solidFill>
+              </a:defRPr>
+            </a:pPr>
+            <a:r>
+              <a:t>6.7 Sidebar Menu Item</a:t>
+            </a:r>
+          </a:p>
+          <a:p>
+            <a:pPr>
+              <a:spcAft>
+                <a:spcPts val="800"/>
               </a:spcAft>
               <a:defRPr sz="1600">
                 <a:solidFill>
@@ -30155,63 +30028,7 @@
               </a:defRPr>
             </a:pPr>
             <a:r>
-              <a:t>Clear cache:</a:t>
-            </a:r>
-          </a:p>
-          <a:p>
-            <a:pPr>
-              <a:spcBef>
-                <a:spcPts val="0"/>
-              </a:spcBef>
-              <a:spcAft>
-                <a:spcPts val="0"/>
-              </a:spcAft>
-            </a:pPr>
-            <a:r>
-              <a:rPr sz="900">
-                <a:solidFill>
-                  <a:srgbClr val="2D2D2D"/>
-                </a:solidFill>
-                <a:latin typeface="Consolas"/>
-              </a:rPr>
-              <a:t>docker/sdk</a:t>
-            </a:r>
-            <a:r>
-              <a:rPr sz="900">
-                <a:solidFill>
-                  <a:srgbClr val="2D2D2D"/>
-                </a:solidFill>
-                <a:latin typeface="Consolas"/>
-              </a:rPr>
-              <a:t> console cache:empty-all</a:t>
-            </a:r>
-          </a:p>
-          <a:p>
-            <a:pPr>
-              <a:spcBef>
-                <a:spcPts val="0"/>
-              </a:spcBef>
-              <a:spcAft>
-                <a:spcPts val="0"/>
-              </a:spcAft>
-            </a:pPr>
-            <a:r>
-              <a:rPr sz="900">
-                <a:solidFill>
-                  <a:srgbClr val="2D2D2D"/>
-                </a:solidFill>
-                <a:latin typeface="Consolas"/>
-              </a:rPr>
-              <a:t>docker/sdk</a:t>
-            </a:r>
-            <a:r>
-              <a:rPr sz="900">
-                <a:solidFill>
-                  <a:srgbClr val="2D2D2D"/>
-                </a:solidFill>
-                <a:latin typeface="Consolas"/>
-              </a:rPr>
-              <a:t> console propel:model:build</a:t>
+              <a:t>Once the route exists, add a “My Contact Requests” entry to the customer account sidebar. The project overrides that molecule in src/Pyz/Yves/CustomerPage/Theme/default/components/molecules/navigation-sidebar/navigation-sidebar.twig ; append one more entry to its items array:</a:t>
             </a:r>
           </a:p>
         </p:txBody>
@@ -30264,7 +30081,7 @@
               </a:defRPr>
             </a:pPr>
             <a:r>
-              <a:t>Best Practices Applied in This Exercise</a:t>
+              <a:t>Part 6: Extend the CustomerPage Module (cont.)</a:t>
             </a:r>
           </a:p>
         </p:txBody>
@@ -30336,129 +30153,115 @@
           <a:p>
             <a:pPr>
               <a:spcBef>
-                <a:spcPts val="1200"/>
-              </a:spcBef>
-              <a:spcAft>
-                <a:spcPts val="600"/>
-              </a:spcAft>
-              <a:defRPr sz="2000" b="1">
-                <a:solidFill>
-                  <a:srgbClr val="1A1A1A"/>
-                </a:solidFill>
-              </a:defRPr>
-            </a:pPr>
-            <a:r>
-              <a:t>SOLID: Single Responsibility for Business Models</a:t>
-            </a:r>
-          </a:p>
-          <a:p>
-            <a:pPr>
-              <a:spcAft>
-                <a:spcPts val="800"/>
-              </a:spcAft>
-              <a:defRPr sz="1600">
-                <a:solidFill>
-                  <a:srgbClr val="1A1A1A"/>
-                </a:solidFill>
-              </a:defRPr>
-            </a:pPr>
-            <a:r>
-              <a:t>The business layer separates concerns into dedicated classes:</a:t>
-            </a:r>
-          </a:p>
-          <a:p>
-            <a:pPr>
-              <a:spcAft>
-                <a:spcPts val="100"/>
-              </a:spcAft>
-              <a:defRPr sz="1000">
-                <a:solidFill>
-                  <a:srgbClr val="1A1A1A"/>
-                </a:solidFill>
-                <a:latin typeface="Consolas"/>
-              </a:defRPr>
-            </a:pPr>
-            <a:r>
-              <a:t>Class                  Responsibility                                   </a:t>
-            </a:r>
-          </a:p>
-          <a:p>
-            <a:pPr>
-              <a:spcAft>
-                <a:spcPts val="100"/>
-              </a:spcAft>
-              <a:defRPr sz="1000">
-                <a:solidFill>
-                  <a:srgbClr val="1A1A1A"/>
-                </a:solidFill>
-                <a:latin typeface="Consolas"/>
-              </a:defRPr>
-            </a:pPr>
-            <a:r>
-              <a:t>---------------------  -------------------------------------------------</a:t>
-            </a:r>
-          </a:p>
-          <a:p>
-            <a:pPr>
-              <a:spcAft>
-                <a:spcPts val="100"/>
-              </a:spcAft>
-              <a:defRPr sz="1000">
-                <a:solidFill>
-                  <a:srgbClr val="1A1A1A"/>
-                </a:solidFill>
-                <a:latin typeface="Consolas"/>
-              </a:defRPr>
-            </a:pPr>
-            <a:r>
-              <a:t>ContactRequestReader   Reading/querying messages (uses Repository)      </a:t>
-            </a:r>
-          </a:p>
-          <a:p>
-            <a:pPr>
-              <a:spcAft>
-                <a:spcPts val="100"/>
-              </a:spcAft>
-              <a:defRPr sz="1000">
-                <a:solidFill>
-                  <a:srgbClr val="1A1A1A"/>
-                </a:solidFill>
-                <a:latin typeface="Consolas"/>
-              </a:defRPr>
-            </a:pPr>
-            <a:r>
-              <a:t>ContactRequestWriter   Creating/persisting messages (uses EntityManager)</a:t>
-            </a:r>
-          </a:p>
-          <a:p>
-            <a:pPr>
-              <a:spcAft>
-                <a:spcPts val="100"/>
-              </a:spcAft>
-              <a:defRPr sz="1000">
-                <a:solidFill>
-                  <a:srgbClr val="1A1A1A"/>
-                </a:solidFill>
-                <a:latin typeface="Consolas"/>
-              </a:defRPr>
-            </a:pPr>
-            <a:r>
-              <a:t>ContactRequestDeleter  Deleting messages (uses EntityManager)</a:t>
-            </a:r>
-          </a:p>
-          <a:p>
-            <a:pPr>
-              <a:spcAft>
-                <a:spcPts val="800"/>
-              </a:spcAft>
-              <a:defRPr sz="1600">
-                <a:solidFill>
-                  <a:srgbClr val="1A1A1A"/>
-                </a:solidFill>
-              </a:defRPr>
-            </a:pPr>
-            <a:r>
-              <a:t>Each class has one reason to change . The Writer does not know how to delete. The Deleter does not know how to create. The Facade orchestrates all three through the BusinessFactory.</a:t>
+                <a:spcPts val="0"/>
+              </a:spcBef>
+              <a:spcAft>
+                <a:spcPts val="0"/>
+              </a:spcAft>
+            </a:pPr>
+            <a:r>
+              <a:rPr sz="900">
+                <a:solidFill>
+                  <a:srgbClr val="2D2D2D"/>
+                </a:solidFill>
+                <a:latin typeface="Consolas"/>
+              </a:rPr>
+              <a:t>        {</a:t>
+            </a:r>
+          </a:p>
+          <a:p>
+            <a:pPr>
+              <a:spcBef>
+                <a:spcPts val="0"/>
+              </a:spcBef>
+              <a:spcAft>
+                <a:spcPts val="0"/>
+              </a:spcAft>
+            </a:pPr>
+            <a:r>
+              <a:rPr sz="900">
+                <a:solidFill>
+                  <a:srgbClr val="2D2D2D"/>
+                </a:solidFill>
+                <a:latin typeface="Consolas"/>
+              </a:rPr>
+              <a:t>            name: 'contact-requests',</a:t>
+            </a:r>
+          </a:p>
+          <a:p>
+            <a:pPr>
+              <a:spcBef>
+                <a:spcPts val="0"/>
+              </a:spcBef>
+              <a:spcAft>
+                <a:spcPts val="0"/>
+              </a:spcAft>
+            </a:pPr>
+            <a:r>
+              <a:rPr sz="900">
+                <a:solidFill>
+                  <a:srgbClr val="2D2D2D"/>
+                </a:solidFill>
+                <a:latin typeface="Consolas"/>
+              </a:rPr>
+              <a:t>            url: path('customer/contact-requests'),</a:t>
+            </a:r>
+          </a:p>
+          <a:p>
+            <a:pPr>
+              <a:spcBef>
+                <a:spcPts val="0"/>
+              </a:spcBef>
+              <a:spcAft>
+                <a:spcPts val="0"/>
+              </a:spcAft>
+            </a:pPr>
+            <a:r>
+              <a:rPr sz="900">
+                <a:solidFill>
+                  <a:srgbClr val="2D2D2D"/>
+                </a:solidFill>
+                <a:latin typeface="Consolas"/>
+              </a:rPr>
+              <a:t>            label: 'My Contact Requests',</a:t>
+            </a:r>
+          </a:p>
+          <a:p>
+            <a:pPr>
+              <a:spcBef>
+                <a:spcPts val="0"/>
+              </a:spcBef>
+              <a:spcAft>
+                <a:spcPts val="0"/>
+              </a:spcAft>
+            </a:pPr>
+            <a:r>
+              <a:rPr sz="900">
+                <a:solidFill>
+                  <a:srgbClr val="2D2D2D"/>
+                </a:solidFill>
+                <a:latin typeface="Consolas"/>
+              </a:rPr>
+              <a:t>            icon: 'envelopes',</a:t>
+            </a:r>
+          </a:p>
+          <a:p>
+            <a:pPr>
+              <a:spcBef>
+                <a:spcPts val="0"/>
+              </a:spcBef>
+              <a:spcAft>
+                <a:spcPts val="0"/>
+              </a:spcAft>
+            </a:pPr>
+            <a:r>
+              <a:rPr sz="900">
+                <a:solidFill>
+                  <a:srgbClr val="2D2D2D"/>
+                </a:solidFill>
+                <a:latin typeface="Consolas"/>
+              </a:rPr>
+              <a:t>        },</a:t>
             </a:r>
           </a:p>
         </p:txBody>
@@ -30511,7 +30314,7 @@
               </a:defRPr>
             </a:pPr>
             <a:r>
-              <a:t>Form Data Binding with Transfer Objects</a:t>
+              <a:t>Part 6: Extend the CustomerPage Module (cont.)</a:t>
             </a:r>
           </a:p>
         </p:txBody>
@@ -30585,6 +30388,21 @@
               <a:spcAft>
                 <a:spcPts val="800"/>
               </a:spcAft>
+              <a:defRPr sz="1400" i="1">
+                <a:solidFill>
+                  <a:srgbClr val="888888"/>
+                </a:solidFill>
+              </a:defRPr>
+            </a:pPr>
+            <a:r>
+              <a:t>❝ customer/contact-requests is the route name ( ContactRequestController::ROUTE_CUSTOMER_CONTACT_REQUESTS ), not the path. Add the item only after the route is registered, otherwise path() fails on every account page. name is what the sidebar compares against the activePage the list page sets, so it has to read contact-requests for the entry to be highlighted. Do not wrap the entry in a Twig comment: the whole items array lives inside one {% define data = {...} %} tag, and a {# ... #} in there is read as an unclosed { , which kills every account page with a SyntaxError . When you load the complete branch, the loader adds this item for you and removes it again when you load another branch.</a:t>
+            </a:r>
+          </a:p>
+          <a:p>
+            <a:pPr>
+              <a:spcAft>
+                <a:spcPts val="800"/>
+              </a:spcAft>
               <a:defRPr sz="1600">
                 <a:solidFill>
                   <a:srgbClr val="1A1A1A"/>
@@ -30592,552 +30410,63 @@
               </a:defRPr>
             </a:pPr>
             <a:r>
-              <a:t>Instead of extracting form data from arrays:</a:t>
-            </a:r>
-          </a:p>
-          <a:p>
-            <a:pPr>
-              <a:spcBef>
-                <a:spcPts val="0"/>
-              </a:spcBef>
-              <a:spcAft>
-                <a:spcPts val="0"/>
-              </a:spcAft>
-            </a:pPr>
-            <a:r>
-              <a:rPr sz="900" i="1">
-                <a:solidFill>
-                  <a:srgbClr val="60A0B0"/>
-                </a:solidFill>
-                <a:latin typeface="Consolas"/>
-              </a:rPr>
-              <a:t>// Avoid this</a:t>
-            </a:r>
-          </a:p>
-          <a:p>
-            <a:pPr>
-              <a:spcBef>
-                <a:spcPts val="0"/>
-              </a:spcBef>
-              <a:spcAft>
-                <a:spcPts val="0"/>
-              </a:spcAft>
-            </a:pPr>
-            <a:r>
-              <a:rPr sz="900">
-                <a:solidFill>
-                  <a:srgbClr val="19177C"/>
-                </a:solidFill>
-                <a:latin typeface="Consolas"/>
-              </a:rPr>
-              <a:t>$formData</a:t>
-            </a:r>
-            <a:r>
-              <a:rPr sz="900">
-                <a:solidFill>
-                  <a:srgbClr val="2D2D2D"/>
-                </a:solidFill>
-                <a:latin typeface="Consolas"/>
-              </a:rPr>
-              <a:t> </a:t>
-            </a:r>
-            <a:r>
-              <a:rPr sz="900">
-                <a:solidFill>
-                  <a:srgbClr val="666666"/>
-                </a:solidFill>
-                <a:latin typeface="Consolas"/>
-              </a:rPr>
-              <a:t>=</a:t>
-            </a:r>
-            <a:r>
-              <a:rPr sz="900">
-                <a:solidFill>
-                  <a:srgbClr val="2D2D2D"/>
-                </a:solidFill>
-                <a:latin typeface="Consolas"/>
-              </a:rPr>
-              <a:t> </a:t>
-            </a:r>
-            <a:r>
-              <a:rPr sz="900">
-                <a:solidFill>
-                  <a:srgbClr val="19177C"/>
-                </a:solidFill>
-                <a:latin typeface="Consolas"/>
-              </a:rPr>
-              <a:t>$messageForm</a:t>
-            </a:r>
-            <a:r>
-              <a:rPr sz="900">
-                <a:solidFill>
-                  <a:srgbClr val="2D2D2D"/>
-                </a:solidFill>
-                <a:latin typeface="Consolas"/>
-              </a:rPr>
-              <a:t>-&gt;getData()</a:t>
-            </a:r>
-            <a:r>
-              <a:rPr sz="900">
-                <a:solidFill>
-                  <a:srgbClr val="007020"/>
-                </a:solidFill>
-                <a:latin typeface="Consolas"/>
-              </a:rPr>
-              <a:t>;</a:t>
-            </a:r>
-          </a:p>
-          <a:p>
-            <a:pPr>
-              <a:spcBef>
-                <a:spcPts val="0"/>
-              </a:spcBef>
-              <a:spcAft>
-                <a:spcPts val="0"/>
-              </a:spcAft>
-            </a:pPr>
-            <a:r>
-              <a:rPr sz="900">
-                <a:solidFill>
-                  <a:srgbClr val="19177C"/>
-                </a:solidFill>
-                <a:latin typeface="Consolas"/>
-              </a:rPr>
-              <a:t>$contactRequestTransfer</a:t>
-            </a:r>
-            <a:r>
-              <a:rPr sz="900">
-                <a:solidFill>
-                  <a:srgbClr val="2D2D2D"/>
-                </a:solidFill>
-                <a:latin typeface="Consolas"/>
-              </a:rPr>
-              <a:t> </a:t>
-            </a:r>
-            <a:r>
-              <a:rPr sz="900">
-                <a:solidFill>
-                  <a:srgbClr val="666666"/>
-                </a:solidFill>
-                <a:latin typeface="Consolas"/>
-              </a:rPr>
-              <a:t>=</a:t>
-            </a:r>
-            <a:r>
-              <a:rPr sz="900">
-                <a:solidFill>
-                  <a:srgbClr val="2D2D2D"/>
-                </a:solidFill>
-                <a:latin typeface="Consolas"/>
-              </a:rPr>
-              <a:t> </a:t>
-            </a:r>
-            <a:r>
-              <a:rPr sz="900" b="1">
-                <a:solidFill>
-                  <a:srgbClr val="007020"/>
-                </a:solidFill>
-                <a:latin typeface="Consolas"/>
-              </a:rPr>
-              <a:t>new</a:t>
-            </a:r>
-            <a:r>
-              <a:rPr sz="900">
-                <a:solidFill>
-                  <a:srgbClr val="2D2D2D"/>
-                </a:solidFill>
-                <a:latin typeface="Consolas"/>
-              </a:rPr>
-              <a:t> </a:t>
-            </a:r>
-            <a:r>
-              <a:rPr sz="900">
-                <a:solidFill>
-                  <a:srgbClr val="880000"/>
-                </a:solidFill>
-                <a:latin typeface="Consolas"/>
-              </a:rPr>
-              <a:t>C</a:t>
-            </a:r>
-            <a:r>
-              <a:rPr sz="900">
-                <a:solidFill>
-                  <a:srgbClr val="2D2D2D"/>
-                </a:solidFill>
-                <a:latin typeface="Consolas"/>
-              </a:rPr>
-              <a:t>ontactRequestTransfer()</a:t>
-            </a:r>
-            <a:r>
-              <a:rPr sz="900">
-                <a:solidFill>
-                  <a:srgbClr val="007020"/>
-                </a:solidFill>
-                <a:latin typeface="Consolas"/>
-              </a:rPr>
-              <a:t>;</a:t>
-            </a:r>
-          </a:p>
-          <a:p>
-            <a:pPr>
-              <a:spcBef>
-                <a:spcPts val="0"/>
-              </a:spcBef>
-              <a:spcAft>
-                <a:spcPts val="0"/>
-              </a:spcAft>
-            </a:pPr>
-            <a:r>
-              <a:rPr sz="900">
-                <a:solidFill>
-                  <a:srgbClr val="19177C"/>
-                </a:solidFill>
-                <a:latin typeface="Consolas"/>
-              </a:rPr>
-              <a:t>$contactRequestTransfer</a:t>
-            </a:r>
-            <a:r>
-              <a:rPr sz="900">
-                <a:solidFill>
-                  <a:srgbClr val="2D2D2D"/>
-                </a:solidFill>
-                <a:latin typeface="Consolas"/>
-              </a:rPr>
-              <a:t>-&gt;setMessage(</a:t>
-            </a:r>
-            <a:r>
-              <a:rPr sz="900">
-                <a:solidFill>
-                  <a:srgbClr val="19177C"/>
-                </a:solidFill>
-                <a:latin typeface="Consolas"/>
-              </a:rPr>
-              <a:t>$formData</a:t>
-            </a:r>
-            <a:r>
-              <a:rPr sz="900">
-                <a:solidFill>
-                  <a:srgbClr val="2D2D2D"/>
-                </a:solidFill>
-                <a:latin typeface="Consolas"/>
-              </a:rPr>
-              <a:t>[</a:t>
-            </a:r>
-            <a:r>
-              <a:rPr sz="900">
-                <a:solidFill>
-                  <a:srgbClr val="4070A0"/>
-                </a:solidFill>
-                <a:latin typeface="Consolas"/>
-              </a:rPr>
-              <a:t>'message'</a:t>
-            </a:r>
-            <a:r>
-              <a:rPr sz="900">
-                <a:solidFill>
-                  <a:srgbClr val="2D2D2D"/>
-                </a:solidFill>
-                <a:latin typeface="Consolas"/>
-              </a:rPr>
-              <a:t>])</a:t>
-            </a:r>
-            <a:r>
-              <a:rPr sz="900">
-                <a:solidFill>
-                  <a:srgbClr val="007020"/>
-                </a:solidFill>
-                <a:latin typeface="Consolas"/>
-              </a:rPr>
-              <a:t>;</a:t>
-            </a:r>
-          </a:p>
-          <a:p>
-            <a:pPr>
-              <a:spcAft>
-                <a:spcPts val="800"/>
-              </a:spcAft>
-              <a:defRPr sz="1600">
-                <a:solidFill>
-                  <a:srgbClr val="1A1A1A"/>
-                </a:solidFill>
-              </a:defRPr>
-            </a:pPr>
-            <a:r>
-              <a:t>Bind the form directly to a transfer:</a:t>
-            </a:r>
-          </a:p>
-          <a:p>
-            <a:pPr>
-              <a:spcBef>
-                <a:spcPts val="0"/>
-              </a:spcBef>
-              <a:spcAft>
-                <a:spcPts val="0"/>
-              </a:spcAft>
-            </a:pPr>
-            <a:r>
-              <a:rPr sz="900" i="1">
-                <a:solidFill>
-                  <a:srgbClr val="60A0B0"/>
-                </a:solidFill>
-                <a:latin typeface="Consolas"/>
-              </a:rPr>
-              <a:t>// Preferred</a:t>
-            </a:r>
-          </a:p>
-          <a:p>
-            <a:pPr>
-              <a:spcBef>
-                <a:spcPts val="0"/>
-              </a:spcBef>
-              <a:spcAft>
-                <a:spcPts val="0"/>
-              </a:spcAft>
-            </a:pPr>
-            <a:r>
-              <a:rPr sz="900">
-                <a:solidFill>
-                  <a:srgbClr val="19177C"/>
-                </a:solidFill>
-                <a:latin typeface="Consolas"/>
-              </a:rPr>
-              <a:t>$messageForm</a:t>
-            </a:r>
-            <a:r>
-              <a:rPr sz="900">
-                <a:solidFill>
-                  <a:srgbClr val="2D2D2D"/>
-                </a:solidFill>
-                <a:latin typeface="Consolas"/>
-              </a:rPr>
-              <a:t> </a:t>
-            </a:r>
-            <a:r>
-              <a:rPr sz="900">
-                <a:solidFill>
-                  <a:srgbClr val="666666"/>
-                </a:solidFill>
-                <a:latin typeface="Consolas"/>
-              </a:rPr>
-              <a:t>=</a:t>
-            </a:r>
-            <a:r>
-              <a:rPr sz="900">
-                <a:solidFill>
-                  <a:srgbClr val="2D2D2D"/>
-                </a:solidFill>
-                <a:latin typeface="Consolas"/>
-              </a:rPr>
-              <a:t> </a:t>
-            </a:r>
-            <a:r>
-              <a:rPr sz="900">
-                <a:solidFill>
-                  <a:srgbClr val="19177C"/>
-                </a:solidFill>
-                <a:latin typeface="Consolas"/>
-              </a:rPr>
-              <a:t>$factory</a:t>
-            </a:r>
-            <a:r>
-              <a:rPr sz="900">
-                <a:solidFill>
-                  <a:srgbClr val="2D2D2D"/>
-                </a:solidFill>
-                <a:latin typeface="Consolas"/>
-              </a:rPr>
-              <a:t>-&gt;createContactRequestForm(</a:t>
-            </a:r>
-            <a:r>
-              <a:rPr sz="900" b="1">
-                <a:solidFill>
-                  <a:srgbClr val="007020"/>
-                </a:solidFill>
-                <a:latin typeface="Consolas"/>
-              </a:rPr>
-              <a:t>new</a:t>
-            </a:r>
-            <a:r>
-              <a:rPr sz="900">
-                <a:solidFill>
-                  <a:srgbClr val="2D2D2D"/>
-                </a:solidFill>
-                <a:latin typeface="Consolas"/>
-              </a:rPr>
-              <a:t> </a:t>
-            </a:r>
-            <a:r>
-              <a:rPr sz="900">
-                <a:solidFill>
-                  <a:srgbClr val="880000"/>
-                </a:solidFill>
-                <a:latin typeface="Consolas"/>
-              </a:rPr>
-              <a:t>C</a:t>
-            </a:r>
-            <a:r>
-              <a:rPr sz="900">
-                <a:solidFill>
-                  <a:srgbClr val="2D2D2D"/>
-                </a:solidFill>
-                <a:latin typeface="Consolas"/>
-              </a:rPr>
-              <a:t>ontactRequestTransfer())</a:t>
-            </a:r>
-            <a:r>
-              <a:rPr sz="900">
-                <a:solidFill>
-                  <a:srgbClr val="007020"/>
-                </a:solidFill>
-                <a:latin typeface="Consolas"/>
-              </a:rPr>
-              <a:t>;</a:t>
-            </a:r>
-          </a:p>
-          <a:p>
-            <a:pPr>
-              <a:spcBef>
-                <a:spcPts val="0"/>
-              </a:spcBef>
-              <a:spcAft>
-                <a:spcPts val="0"/>
-              </a:spcAft>
-            </a:pPr>
-            <a:r>
-              <a:rPr sz="900">
-                <a:solidFill>
-                  <a:srgbClr val="19177C"/>
-                </a:solidFill>
-                <a:latin typeface="Consolas"/>
-              </a:rPr>
-              <a:t>$messageForm</a:t>
-            </a:r>
-            <a:r>
-              <a:rPr sz="900">
-                <a:solidFill>
-                  <a:srgbClr val="2D2D2D"/>
-                </a:solidFill>
-                <a:latin typeface="Consolas"/>
-              </a:rPr>
-              <a:t>-&gt;handleRequest(</a:t>
-            </a:r>
-            <a:r>
-              <a:rPr sz="900">
-                <a:solidFill>
-                  <a:srgbClr val="19177C"/>
-                </a:solidFill>
-                <a:latin typeface="Consolas"/>
-              </a:rPr>
-              <a:t>$request</a:t>
-            </a:r>
-            <a:r>
-              <a:rPr sz="900">
-                <a:solidFill>
-                  <a:srgbClr val="2D2D2D"/>
-                </a:solidFill>
-                <a:latin typeface="Consolas"/>
-              </a:rPr>
-              <a:t>)</a:t>
-            </a:r>
-            <a:r>
-              <a:rPr sz="900">
-                <a:solidFill>
-                  <a:srgbClr val="007020"/>
-                </a:solidFill>
-                <a:latin typeface="Consolas"/>
-              </a:rPr>
-              <a:t>;</a:t>
-            </a:r>
-          </a:p>
-          <a:p>
-            <a:pPr>
-              <a:spcBef>
-                <a:spcPts val="0"/>
-              </a:spcBef>
-              <a:spcAft>
-                <a:spcPts val="0"/>
-              </a:spcAft>
-            </a:pPr>
-            <a:r>
-              <a:rPr sz="900">
-                <a:solidFill>
-                  <a:srgbClr val="19177C"/>
-                </a:solidFill>
-                <a:latin typeface="Consolas"/>
-              </a:rPr>
-              <a:t>$contactRequestTransfer</a:t>
-            </a:r>
-            <a:r>
-              <a:rPr sz="900">
-                <a:solidFill>
-                  <a:srgbClr val="2D2D2D"/>
-                </a:solidFill>
-                <a:latin typeface="Consolas"/>
-              </a:rPr>
-              <a:t> </a:t>
-            </a:r>
-            <a:r>
-              <a:rPr sz="900">
-                <a:solidFill>
-                  <a:srgbClr val="666666"/>
-                </a:solidFill>
-                <a:latin typeface="Consolas"/>
-              </a:rPr>
-              <a:t>=</a:t>
-            </a:r>
-            <a:r>
-              <a:rPr sz="900">
-                <a:solidFill>
-                  <a:srgbClr val="2D2D2D"/>
-                </a:solidFill>
-                <a:latin typeface="Consolas"/>
-              </a:rPr>
-              <a:t> </a:t>
-            </a:r>
-            <a:r>
-              <a:rPr sz="900">
-                <a:solidFill>
-                  <a:srgbClr val="19177C"/>
-                </a:solidFill>
-                <a:latin typeface="Consolas"/>
-              </a:rPr>
-              <a:t>$messageForm</a:t>
-            </a:r>
-            <a:r>
-              <a:rPr sz="900">
-                <a:solidFill>
-                  <a:srgbClr val="2D2D2D"/>
-                </a:solidFill>
-                <a:latin typeface="Consolas"/>
-              </a:rPr>
-              <a:t>-&gt;getData()</a:t>
-            </a:r>
-            <a:r>
-              <a:rPr sz="900">
-                <a:solidFill>
-                  <a:srgbClr val="007020"/>
-                </a:solidFill>
-                <a:latin typeface="Consolas"/>
-              </a:rPr>
-              <a:t>;</a:t>
-            </a:r>
-            <a:r>
-              <a:rPr sz="900">
-                <a:solidFill>
-                  <a:srgbClr val="2D2D2D"/>
-                </a:solidFill>
-                <a:latin typeface="Consolas"/>
-              </a:rPr>
-              <a:t> </a:t>
-            </a:r>
-            <a:r>
-              <a:rPr sz="900" i="1">
-                <a:solidFill>
-                  <a:srgbClr val="60A0B0"/>
-                </a:solidFill>
-                <a:latin typeface="Consolas"/>
-              </a:rPr>
-              <a:t>// Already a ContactRequestTransfer</a:t>
+              <a:t>Clear cache:</a:t>
+            </a:r>
+          </a:p>
+          <a:p>
+            <a:pPr>
+              <a:spcBef>
+                <a:spcPts val="0"/>
+              </a:spcBef>
+              <a:spcAft>
+                <a:spcPts val="0"/>
+              </a:spcAft>
+            </a:pPr>
+            <a:r>
+              <a:rPr sz="900">
+                <a:solidFill>
+                  <a:srgbClr val="2D2D2D"/>
+                </a:solidFill>
+                <a:latin typeface="Consolas"/>
+              </a:rPr>
+              <a:t>docker/sdk</a:t>
+            </a:r>
+            <a:r>
+              <a:rPr sz="900">
+                <a:solidFill>
+                  <a:srgbClr val="2D2D2D"/>
+                </a:solidFill>
+                <a:latin typeface="Consolas"/>
+              </a:rPr>
+              <a:t> console cache:empty-all</a:t>
+            </a:r>
+          </a:p>
+          <a:p>
+            <a:pPr>
+              <a:spcBef>
+                <a:spcPts val="0"/>
+              </a:spcBef>
+              <a:spcAft>
+                <a:spcPts val="0"/>
+              </a:spcAft>
+            </a:pPr>
+            <a:r>
+              <a:rPr sz="900">
+                <a:solidFill>
+                  <a:srgbClr val="2D2D2D"/>
+                </a:solidFill>
+                <a:latin typeface="Consolas"/>
+              </a:rPr>
+              <a:t>docker/sdk</a:t>
+            </a:r>
+            <a:r>
+              <a:rPr sz="900">
+                <a:solidFill>
+                  <a:srgbClr val="2D2D2D"/>
+                </a:solidFill>
+                <a:latin typeface="Consolas"/>
+              </a:rPr>
+              <a:t> console propel:model:build</a:t>
             </a:r>
           </a:p>
         </p:txBody>
@@ -31650,7 +30979,7 @@
               </a:defRPr>
             </a:pPr>
             <a:r>
-              <a:t>Safe ID Handling with castId()</a:t>
+              <a:t>Best Practices Applied in This Exercise</a:t>
             </a:r>
           </a:p>
         </p:txBody>
@@ -31721,6 +31050,24 @@
           <a:lstStyle/>
           <a:p>
             <a:pPr>
+              <a:spcBef>
+                <a:spcPts val="1200"/>
+              </a:spcBef>
+              <a:spcAft>
+                <a:spcPts val="600"/>
+              </a:spcAft>
+              <a:defRPr sz="2000" b="1">
+                <a:solidFill>
+                  <a:srgbClr val="1A1A1A"/>
+                </a:solidFill>
+              </a:defRPr>
+            </a:pPr>
+            <a:r>
+              <a:t>SOLID: Single Responsibility for Business Models</a:t>
+            </a:r>
+          </a:p>
+          <a:p>
+            <a:pPr>
               <a:spcAft>
                 <a:spcPts val="800"/>
               </a:spcAft>
@@ -31731,135 +31078,102 @@
               </a:defRPr>
             </a:pPr>
             <a:r>
-              <a:t>Always validate IDs from user input before passing them to the persistence layer:</a:t>
-            </a:r>
-          </a:p>
-          <a:p>
-            <a:pPr>
-              <a:spcBef>
-                <a:spcPts val="0"/>
-              </a:spcBef>
-              <a:spcAft>
-                <a:spcPts val="0"/>
-              </a:spcAft>
-            </a:pPr>
-            <a:r>
-              <a:rPr sz="900">
-                <a:solidFill>
-                  <a:srgbClr val="19177C"/>
-                </a:solidFill>
-                <a:latin typeface="Consolas"/>
-              </a:rPr>
-              <a:t>$idContactRequest</a:t>
-            </a:r>
-            <a:r>
-              <a:rPr sz="900">
-                <a:solidFill>
-                  <a:srgbClr val="2D2D2D"/>
-                </a:solidFill>
-                <a:latin typeface="Consolas"/>
-              </a:rPr>
-              <a:t> </a:t>
-            </a:r>
-            <a:r>
-              <a:rPr sz="900">
-                <a:solidFill>
-                  <a:srgbClr val="666666"/>
-                </a:solidFill>
-                <a:latin typeface="Consolas"/>
-              </a:rPr>
-              <a:t>=</a:t>
-            </a:r>
-            <a:r>
-              <a:rPr sz="900">
-                <a:solidFill>
-                  <a:srgbClr val="2D2D2D"/>
-                </a:solidFill>
-                <a:latin typeface="Consolas"/>
-              </a:rPr>
-              <a:t> </a:t>
-            </a:r>
-            <a:r>
-              <a:rPr sz="900">
-                <a:solidFill>
-                  <a:srgbClr val="19177C"/>
-                </a:solidFill>
-                <a:latin typeface="Consolas"/>
-              </a:rPr>
-              <a:t>$this</a:t>
-            </a:r>
-            <a:r>
-              <a:rPr sz="900">
-                <a:solidFill>
-                  <a:srgbClr val="2D2D2D"/>
-                </a:solidFill>
-                <a:latin typeface="Consolas"/>
-              </a:rPr>
-              <a:t>-&gt;castId(</a:t>
-            </a:r>
-            <a:r>
-              <a:rPr sz="900">
-                <a:solidFill>
-                  <a:srgbClr val="19177C"/>
-                </a:solidFill>
-                <a:latin typeface="Consolas"/>
-              </a:rPr>
-              <a:t>$request</a:t>
-            </a:r>
-            <a:r>
-              <a:rPr sz="900">
-                <a:solidFill>
-                  <a:srgbClr val="2D2D2D"/>
-                </a:solidFill>
-                <a:latin typeface="Consolas"/>
-              </a:rPr>
-              <a:t>-&gt;request-&gt;get(</a:t>
-            </a:r>
-            <a:r>
-              <a:rPr sz="900">
-                <a:solidFill>
-                  <a:srgbClr val="4070A0"/>
-                </a:solidFill>
-                <a:latin typeface="Consolas"/>
-              </a:rPr>
-              <a:t>'idContactRequest'</a:t>
-            </a:r>
-            <a:r>
-              <a:rPr sz="900">
-                <a:solidFill>
-                  <a:srgbClr val="2D2D2D"/>
-                </a:solidFill>
-                <a:latin typeface="Consolas"/>
-              </a:rPr>
-              <a:t>))</a:t>
-            </a:r>
-            <a:r>
-              <a:rPr sz="900">
-                <a:solidFill>
-                  <a:srgbClr val="007020"/>
-                </a:solidFill>
-                <a:latin typeface="Consolas"/>
-              </a:rPr>
-              <a:t>;</a:t>
-            </a:r>
-          </a:p>
-          <a:p>
-            <a:pPr>
-              <a:spcBef>
-                <a:spcPts val="0"/>
-              </a:spcBef>
-              <a:spcAft>
-                <a:spcPts val="0"/>
-              </a:spcAft>
-            </a:pPr>
-            <a:r>
-              <a:rPr sz="900" i="1">
-                <a:solidFill>
-                  <a:srgbClr val="60A0B0"/>
-                </a:solidFill>
-                <a:latin typeface="Consolas"/>
-              </a:rPr>
-              <a:t>// Throws InvalidArgumentException if not numeric or zero</a:t>
+              <a:t>The business layer separates concerns into dedicated classes:</a:t>
+            </a:r>
+          </a:p>
+          <a:p>
+            <a:pPr>
+              <a:spcAft>
+                <a:spcPts val="100"/>
+              </a:spcAft>
+              <a:defRPr sz="1000">
+                <a:solidFill>
+                  <a:srgbClr val="1A1A1A"/>
+                </a:solidFill>
+                <a:latin typeface="Consolas"/>
+              </a:defRPr>
+            </a:pPr>
+            <a:r>
+              <a:t>Class                  Responsibility                                   </a:t>
+            </a:r>
+          </a:p>
+          <a:p>
+            <a:pPr>
+              <a:spcAft>
+                <a:spcPts val="100"/>
+              </a:spcAft>
+              <a:defRPr sz="1000">
+                <a:solidFill>
+                  <a:srgbClr val="1A1A1A"/>
+                </a:solidFill>
+                <a:latin typeface="Consolas"/>
+              </a:defRPr>
+            </a:pPr>
+            <a:r>
+              <a:t>---------------------  -------------------------------------------------</a:t>
+            </a:r>
+          </a:p>
+          <a:p>
+            <a:pPr>
+              <a:spcAft>
+                <a:spcPts val="100"/>
+              </a:spcAft>
+              <a:defRPr sz="1000">
+                <a:solidFill>
+                  <a:srgbClr val="1A1A1A"/>
+                </a:solidFill>
+                <a:latin typeface="Consolas"/>
+              </a:defRPr>
+            </a:pPr>
+            <a:r>
+              <a:t>ContactRequestReader   Reading/querying messages (uses Repository)      </a:t>
+            </a:r>
+          </a:p>
+          <a:p>
+            <a:pPr>
+              <a:spcAft>
+                <a:spcPts val="100"/>
+              </a:spcAft>
+              <a:defRPr sz="1000">
+                <a:solidFill>
+                  <a:srgbClr val="1A1A1A"/>
+                </a:solidFill>
+                <a:latin typeface="Consolas"/>
+              </a:defRPr>
+            </a:pPr>
+            <a:r>
+              <a:t>ContactRequestWriter   Creating/persisting messages (uses EntityManager)</a:t>
+            </a:r>
+          </a:p>
+          <a:p>
+            <a:pPr>
+              <a:spcAft>
+                <a:spcPts val="100"/>
+              </a:spcAft>
+              <a:defRPr sz="1000">
+                <a:solidFill>
+                  <a:srgbClr val="1A1A1A"/>
+                </a:solidFill>
+                <a:latin typeface="Consolas"/>
+              </a:defRPr>
+            </a:pPr>
+            <a:r>
+              <a:t>ContactRequestDeleter  Deleting messages (uses EntityManager)</a:t>
+            </a:r>
+          </a:p>
+          <a:p>
+            <a:pPr>
+              <a:spcAft>
+                <a:spcPts val="800"/>
+              </a:spcAft>
+              <a:defRPr sz="1600">
+                <a:solidFill>
+                  <a:srgbClr val="1A1A1A"/>
+                </a:solidFill>
+              </a:defRPr>
+            </a:pPr>
+            <a:r>
+              <a:t>Each class has one reason to change . The Writer does not know how to delete. The Deleter does not know how to create. The Facade orchestrates all three through the BusinessFactory.</a:t>
             </a:r>
           </a:p>
         </p:txBody>
@@ -31912,7 +31226,7 @@
               </a:defRPr>
             </a:pPr>
             <a:r>
-              <a:t>Testing</a:t>
+              <a:t>Form Data Binding with Transfer Objects</a:t>
             </a:r>
           </a:p>
         </p:txBody>
@@ -31984,76 +31298,561 @@
           <a:p>
             <a:pPr>
               <a:spcAft>
-                <a:spcPts val="400"/>
-              </a:spcAft>
-              <a:defRPr sz="1500">
+                <a:spcPts val="800"/>
+              </a:spcAft>
+              <a:defRPr sz="1600">
                 <a:solidFill>
                   <a:srgbClr val="1A1A1A"/>
                 </a:solidFill>
               </a:defRPr>
             </a:pPr>
             <a:r>
-              <a:t>• Log in to Yves: http://yves.eu.spryker.local/en/login (use sonia@spryker.com / change123 )</a:t>
-            </a:r>
-          </a:p>
-          <a:p>
-            <a:pPr>
-              <a:spcAft>
-                <a:spcPts val="400"/>
-              </a:spcAft>
-              <a:defRPr sz="1500">
+              <a:t>Instead of extracting form data from arrays:</a:t>
+            </a:r>
+          </a:p>
+          <a:p>
+            <a:pPr>
+              <a:spcBef>
+                <a:spcPts val="0"/>
+              </a:spcBef>
+              <a:spcAft>
+                <a:spcPts val="0"/>
+              </a:spcAft>
+            </a:pPr>
+            <a:r>
+              <a:rPr sz="900" i="1">
+                <a:solidFill>
+                  <a:srgbClr val="60A0B0"/>
+                </a:solidFill>
+                <a:latin typeface="Consolas"/>
+              </a:rPr>
+              <a:t>// Avoid this</a:t>
+            </a:r>
+          </a:p>
+          <a:p>
+            <a:pPr>
+              <a:spcBef>
+                <a:spcPts val="0"/>
+              </a:spcBef>
+              <a:spcAft>
+                <a:spcPts val="0"/>
+              </a:spcAft>
+            </a:pPr>
+            <a:r>
+              <a:rPr sz="900">
+                <a:solidFill>
+                  <a:srgbClr val="19177C"/>
+                </a:solidFill>
+                <a:latin typeface="Consolas"/>
+              </a:rPr>
+              <a:t>$formData</a:t>
+            </a:r>
+            <a:r>
+              <a:rPr sz="900">
+                <a:solidFill>
+                  <a:srgbClr val="2D2D2D"/>
+                </a:solidFill>
+                <a:latin typeface="Consolas"/>
+              </a:rPr>
+              <a:t> </a:t>
+            </a:r>
+            <a:r>
+              <a:rPr sz="900">
+                <a:solidFill>
+                  <a:srgbClr val="666666"/>
+                </a:solidFill>
+                <a:latin typeface="Consolas"/>
+              </a:rPr>
+              <a:t>=</a:t>
+            </a:r>
+            <a:r>
+              <a:rPr sz="900">
+                <a:solidFill>
+                  <a:srgbClr val="2D2D2D"/>
+                </a:solidFill>
+                <a:latin typeface="Consolas"/>
+              </a:rPr>
+              <a:t> </a:t>
+            </a:r>
+            <a:r>
+              <a:rPr sz="900">
+                <a:solidFill>
+                  <a:srgbClr val="19177C"/>
+                </a:solidFill>
+                <a:latin typeface="Consolas"/>
+              </a:rPr>
+              <a:t>$messageForm</a:t>
+            </a:r>
+            <a:r>
+              <a:rPr sz="900">
+                <a:solidFill>
+                  <a:srgbClr val="2D2D2D"/>
+                </a:solidFill>
+                <a:latin typeface="Consolas"/>
+              </a:rPr>
+              <a:t>-&gt;getData()</a:t>
+            </a:r>
+            <a:r>
+              <a:rPr sz="900">
+                <a:solidFill>
+                  <a:srgbClr val="007020"/>
+                </a:solidFill>
+                <a:latin typeface="Consolas"/>
+              </a:rPr>
+              <a:t>;</a:t>
+            </a:r>
+          </a:p>
+          <a:p>
+            <a:pPr>
+              <a:spcBef>
+                <a:spcPts val="0"/>
+              </a:spcBef>
+              <a:spcAft>
+                <a:spcPts val="0"/>
+              </a:spcAft>
+            </a:pPr>
+            <a:r>
+              <a:rPr sz="900">
+                <a:solidFill>
+                  <a:srgbClr val="19177C"/>
+                </a:solidFill>
+                <a:latin typeface="Consolas"/>
+              </a:rPr>
+              <a:t>$contactRequestTransfer</a:t>
+            </a:r>
+            <a:r>
+              <a:rPr sz="900">
+                <a:solidFill>
+                  <a:srgbClr val="2D2D2D"/>
+                </a:solidFill>
+                <a:latin typeface="Consolas"/>
+              </a:rPr>
+              <a:t> </a:t>
+            </a:r>
+            <a:r>
+              <a:rPr sz="900">
+                <a:solidFill>
+                  <a:srgbClr val="666666"/>
+                </a:solidFill>
+                <a:latin typeface="Consolas"/>
+              </a:rPr>
+              <a:t>=</a:t>
+            </a:r>
+            <a:r>
+              <a:rPr sz="900">
+                <a:solidFill>
+                  <a:srgbClr val="2D2D2D"/>
+                </a:solidFill>
+                <a:latin typeface="Consolas"/>
+              </a:rPr>
+              <a:t> </a:t>
+            </a:r>
+            <a:r>
+              <a:rPr sz="900" b="1">
+                <a:solidFill>
+                  <a:srgbClr val="007020"/>
+                </a:solidFill>
+                <a:latin typeface="Consolas"/>
+              </a:rPr>
+              <a:t>new</a:t>
+            </a:r>
+            <a:r>
+              <a:rPr sz="900">
+                <a:solidFill>
+                  <a:srgbClr val="2D2D2D"/>
+                </a:solidFill>
+                <a:latin typeface="Consolas"/>
+              </a:rPr>
+              <a:t> </a:t>
+            </a:r>
+            <a:r>
+              <a:rPr sz="900">
+                <a:solidFill>
+                  <a:srgbClr val="880000"/>
+                </a:solidFill>
+                <a:latin typeface="Consolas"/>
+              </a:rPr>
+              <a:t>C</a:t>
+            </a:r>
+            <a:r>
+              <a:rPr sz="900">
+                <a:solidFill>
+                  <a:srgbClr val="2D2D2D"/>
+                </a:solidFill>
+                <a:latin typeface="Consolas"/>
+              </a:rPr>
+              <a:t>ontactRequestTransfer()</a:t>
+            </a:r>
+            <a:r>
+              <a:rPr sz="900">
+                <a:solidFill>
+                  <a:srgbClr val="007020"/>
+                </a:solidFill>
+                <a:latin typeface="Consolas"/>
+              </a:rPr>
+              <a:t>;</a:t>
+            </a:r>
+          </a:p>
+          <a:p>
+            <a:pPr>
+              <a:spcBef>
+                <a:spcPts val="0"/>
+              </a:spcBef>
+              <a:spcAft>
+                <a:spcPts val="0"/>
+              </a:spcAft>
+            </a:pPr>
+            <a:r>
+              <a:rPr sz="900">
+                <a:solidFill>
+                  <a:srgbClr val="19177C"/>
+                </a:solidFill>
+                <a:latin typeface="Consolas"/>
+              </a:rPr>
+              <a:t>$contactRequestTransfer</a:t>
+            </a:r>
+            <a:r>
+              <a:rPr sz="900">
+                <a:solidFill>
+                  <a:srgbClr val="2D2D2D"/>
+                </a:solidFill>
+                <a:latin typeface="Consolas"/>
+              </a:rPr>
+              <a:t>-&gt;setMessage(</a:t>
+            </a:r>
+            <a:r>
+              <a:rPr sz="900">
+                <a:solidFill>
+                  <a:srgbClr val="19177C"/>
+                </a:solidFill>
+                <a:latin typeface="Consolas"/>
+              </a:rPr>
+              <a:t>$formData</a:t>
+            </a:r>
+            <a:r>
+              <a:rPr sz="900">
+                <a:solidFill>
+                  <a:srgbClr val="2D2D2D"/>
+                </a:solidFill>
+                <a:latin typeface="Consolas"/>
+              </a:rPr>
+              <a:t>[</a:t>
+            </a:r>
+            <a:r>
+              <a:rPr sz="900">
+                <a:solidFill>
+                  <a:srgbClr val="4070A0"/>
+                </a:solidFill>
+                <a:latin typeface="Consolas"/>
+              </a:rPr>
+              <a:t>'message'</a:t>
+            </a:r>
+            <a:r>
+              <a:rPr sz="900">
+                <a:solidFill>
+                  <a:srgbClr val="2D2D2D"/>
+                </a:solidFill>
+                <a:latin typeface="Consolas"/>
+              </a:rPr>
+              <a:t>])</a:t>
+            </a:r>
+            <a:r>
+              <a:rPr sz="900">
+                <a:solidFill>
+                  <a:srgbClr val="007020"/>
+                </a:solidFill>
+                <a:latin typeface="Consolas"/>
+              </a:rPr>
+              <a:t>;</a:t>
+            </a:r>
+          </a:p>
+          <a:p>
+            <a:pPr>
+              <a:spcAft>
+                <a:spcPts val="800"/>
+              </a:spcAft>
+              <a:defRPr sz="1600">
                 <a:solidFill>
                   <a:srgbClr val="1A1A1A"/>
                 </a:solidFill>
               </a:defRPr>
             </a:pPr>
             <a:r>
-              <a:t>• Visit: http://yves.eu.spryker.local/en/customer/contact-requests</a:t>
-            </a:r>
-          </a:p>
-          <a:p>
-            <a:pPr>
-              <a:spcAft>
-                <a:spcPts val="400"/>
-              </a:spcAft>
-              <a:defRPr sz="1500">
-                <a:solidFill>
-                  <a:srgbClr val="1A1A1A"/>
-                </a:solidFill>
-              </a:defRPr>
-            </a:pPr>
-            <a:r>
-              <a:t>• You should see a message list (empty initially) and a form to add messages</a:t>
-            </a:r>
-          </a:p>
-          <a:p>
-            <a:pPr>
-              <a:spcAft>
-                <a:spcPts val="400"/>
-              </a:spcAft>
-              <a:defRPr sz="1500">
-                <a:solidFill>
-                  <a:srgbClr val="1A1A1A"/>
-                </a:solidFill>
-              </a:defRPr>
-            </a:pPr>
-            <a:r>
-              <a:t>• Add a message and verify it appears in the list with a created timestamp</a:t>
-            </a:r>
-          </a:p>
-          <a:p>
-            <a:pPr>
-              <a:spcAft>
-                <a:spcPts val="400"/>
-              </a:spcAft>
-              <a:defRPr sz="1500">
-                <a:solidFill>
-                  <a:srgbClr val="1A1A1A"/>
-                </a:solidFill>
-              </a:defRPr>
-            </a:pPr>
-            <a:r>
-              <a:t>• Click “Delete” on a message and verify it disappears</a:t>
+              <a:t>Bind the form directly to a transfer:</a:t>
+            </a:r>
+          </a:p>
+          <a:p>
+            <a:pPr>
+              <a:spcBef>
+                <a:spcPts val="0"/>
+              </a:spcBef>
+              <a:spcAft>
+                <a:spcPts val="0"/>
+              </a:spcAft>
+            </a:pPr>
+            <a:r>
+              <a:rPr sz="900" i="1">
+                <a:solidFill>
+                  <a:srgbClr val="60A0B0"/>
+                </a:solidFill>
+                <a:latin typeface="Consolas"/>
+              </a:rPr>
+              <a:t>// Preferred</a:t>
+            </a:r>
+          </a:p>
+          <a:p>
+            <a:pPr>
+              <a:spcBef>
+                <a:spcPts val="0"/>
+              </a:spcBef>
+              <a:spcAft>
+                <a:spcPts val="0"/>
+              </a:spcAft>
+            </a:pPr>
+            <a:r>
+              <a:rPr sz="900">
+                <a:solidFill>
+                  <a:srgbClr val="19177C"/>
+                </a:solidFill>
+                <a:latin typeface="Consolas"/>
+              </a:rPr>
+              <a:t>$messageForm</a:t>
+            </a:r>
+            <a:r>
+              <a:rPr sz="900">
+                <a:solidFill>
+                  <a:srgbClr val="2D2D2D"/>
+                </a:solidFill>
+                <a:latin typeface="Consolas"/>
+              </a:rPr>
+              <a:t> </a:t>
+            </a:r>
+            <a:r>
+              <a:rPr sz="900">
+                <a:solidFill>
+                  <a:srgbClr val="666666"/>
+                </a:solidFill>
+                <a:latin typeface="Consolas"/>
+              </a:rPr>
+              <a:t>=</a:t>
+            </a:r>
+            <a:r>
+              <a:rPr sz="900">
+                <a:solidFill>
+                  <a:srgbClr val="2D2D2D"/>
+                </a:solidFill>
+                <a:latin typeface="Consolas"/>
+              </a:rPr>
+              <a:t> </a:t>
+            </a:r>
+            <a:r>
+              <a:rPr sz="900">
+                <a:solidFill>
+                  <a:srgbClr val="19177C"/>
+                </a:solidFill>
+                <a:latin typeface="Consolas"/>
+              </a:rPr>
+              <a:t>$factory</a:t>
+            </a:r>
+            <a:r>
+              <a:rPr sz="900">
+                <a:solidFill>
+                  <a:srgbClr val="2D2D2D"/>
+                </a:solidFill>
+                <a:latin typeface="Consolas"/>
+              </a:rPr>
+              <a:t>-&gt;createContactRequestForm(</a:t>
+            </a:r>
+            <a:r>
+              <a:rPr sz="900" b="1">
+                <a:solidFill>
+                  <a:srgbClr val="007020"/>
+                </a:solidFill>
+                <a:latin typeface="Consolas"/>
+              </a:rPr>
+              <a:t>new</a:t>
+            </a:r>
+            <a:r>
+              <a:rPr sz="900">
+                <a:solidFill>
+                  <a:srgbClr val="2D2D2D"/>
+                </a:solidFill>
+                <a:latin typeface="Consolas"/>
+              </a:rPr>
+              <a:t> </a:t>
+            </a:r>
+            <a:r>
+              <a:rPr sz="900">
+                <a:solidFill>
+                  <a:srgbClr val="880000"/>
+                </a:solidFill>
+                <a:latin typeface="Consolas"/>
+              </a:rPr>
+              <a:t>C</a:t>
+            </a:r>
+            <a:r>
+              <a:rPr sz="900">
+                <a:solidFill>
+                  <a:srgbClr val="2D2D2D"/>
+                </a:solidFill>
+                <a:latin typeface="Consolas"/>
+              </a:rPr>
+              <a:t>ontactRequestTransfer())</a:t>
+            </a:r>
+            <a:r>
+              <a:rPr sz="900">
+                <a:solidFill>
+                  <a:srgbClr val="007020"/>
+                </a:solidFill>
+                <a:latin typeface="Consolas"/>
+              </a:rPr>
+              <a:t>;</a:t>
+            </a:r>
+          </a:p>
+          <a:p>
+            <a:pPr>
+              <a:spcBef>
+                <a:spcPts val="0"/>
+              </a:spcBef>
+              <a:spcAft>
+                <a:spcPts val="0"/>
+              </a:spcAft>
+            </a:pPr>
+            <a:r>
+              <a:rPr sz="900">
+                <a:solidFill>
+                  <a:srgbClr val="19177C"/>
+                </a:solidFill>
+                <a:latin typeface="Consolas"/>
+              </a:rPr>
+              <a:t>$messageForm</a:t>
+            </a:r>
+            <a:r>
+              <a:rPr sz="900">
+                <a:solidFill>
+                  <a:srgbClr val="2D2D2D"/>
+                </a:solidFill>
+                <a:latin typeface="Consolas"/>
+              </a:rPr>
+              <a:t>-&gt;handleRequest(</a:t>
+            </a:r>
+            <a:r>
+              <a:rPr sz="900">
+                <a:solidFill>
+                  <a:srgbClr val="19177C"/>
+                </a:solidFill>
+                <a:latin typeface="Consolas"/>
+              </a:rPr>
+              <a:t>$request</a:t>
+            </a:r>
+            <a:r>
+              <a:rPr sz="900">
+                <a:solidFill>
+                  <a:srgbClr val="2D2D2D"/>
+                </a:solidFill>
+                <a:latin typeface="Consolas"/>
+              </a:rPr>
+              <a:t>)</a:t>
+            </a:r>
+            <a:r>
+              <a:rPr sz="900">
+                <a:solidFill>
+                  <a:srgbClr val="007020"/>
+                </a:solidFill>
+                <a:latin typeface="Consolas"/>
+              </a:rPr>
+              <a:t>;</a:t>
+            </a:r>
+          </a:p>
+          <a:p>
+            <a:pPr>
+              <a:spcBef>
+                <a:spcPts val="0"/>
+              </a:spcBef>
+              <a:spcAft>
+                <a:spcPts val="0"/>
+              </a:spcAft>
+            </a:pPr>
+            <a:r>
+              <a:rPr sz="900">
+                <a:solidFill>
+                  <a:srgbClr val="19177C"/>
+                </a:solidFill>
+                <a:latin typeface="Consolas"/>
+              </a:rPr>
+              <a:t>$contactRequestTransfer</a:t>
+            </a:r>
+            <a:r>
+              <a:rPr sz="900">
+                <a:solidFill>
+                  <a:srgbClr val="2D2D2D"/>
+                </a:solidFill>
+                <a:latin typeface="Consolas"/>
+              </a:rPr>
+              <a:t> </a:t>
+            </a:r>
+            <a:r>
+              <a:rPr sz="900">
+                <a:solidFill>
+                  <a:srgbClr val="666666"/>
+                </a:solidFill>
+                <a:latin typeface="Consolas"/>
+              </a:rPr>
+              <a:t>=</a:t>
+            </a:r>
+            <a:r>
+              <a:rPr sz="900">
+                <a:solidFill>
+                  <a:srgbClr val="2D2D2D"/>
+                </a:solidFill>
+                <a:latin typeface="Consolas"/>
+              </a:rPr>
+              <a:t> </a:t>
+            </a:r>
+            <a:r>
+              <a:rPr sz="900">
+                <a:solidFill>
+                  <a:srgbClr val="19177C"/>
+                </a:solidFill>
+                <a:latin typeface="Consolas"/>
+              </a:rPr>
+              <a:t>$messageForm</a:t>
+            </a:r>
+            <a:r>
+              <a:rPr sz="900">
+                <a:solidFill>
+                  <a:srgbClr val="2D2D2D"/>
+                </a:solidFill>
+                <a:latin typeface="Consolas"/>
+              </a:rPr>
+              <a:t>-&gt;getData()</a:t>
+            </a:r>
+            <a:r>
+              <a:rPr sz="900">
+                <a:solidFill>
+                  <a:srgbClr val="007020"/>
+                </a:solidFill>
+                <a:latin typeface="Consolas"/>
+              </a:rPr>
+              <a:t>;</a:t>
+            </a:r>
+            <a:r>
+              <a:rPr sz="900">
+                <a:solidFill>
+                  <a:srgbClr val="2D2D2D"/>
+                </a:solidFill>
+                <a:latin typeface="Consolas"/>
+              </a:rPr>
+              <a:t> </a:t>
+            </a:r>
+            <a:r>
+              <a:rPr sz="900" i="1">
+                <a:solidFill>
+                  <a:srgbClr val="60A0B0"/>
+                </a:solidFill>
+                <a:latin typeface="Consolas"/>
+              </a:rPr>
+              <a:t>// Already a ContactRequestTransfer</a:t>
             </a:r>
           </a:p>
         </p:txBody>
@@ -32106,7 +31905,7 @@
               </a:defRPr>
             </a:pPr>
             <a:r>
-              <a:t>Verify Your Work</a:t>
+              <a:t>Safe ID Handling with castId()</a:t>
             </a:r>
           </a:p>
         </p:txBody>
@@ -32187,129 +31986,135 @@
               </a:defRPr>
             </a:pPr>
             <a:r>
-              <a:t>Run the automated tests for this exercise:</a:t>
-            </a:r>
-          </a:p>
-          <a:p>
-            <a:pPr>
-              <a:spcBef>
-                <a:spcPts val="0"/>
-              </a:spcBef>
-              <a:spcAft>
-                <a:spcPts val="0"/>
-              </a:spcAft>
-            </a:pPr>
-            <a:r>
-              <a:rPr sz="900">
-                <a:solidFill>
-                  <a:srgbClr val="2D2D2D"/>
-                </a:solidFill>
-                <a:latin typeface="Consolas"/>
-              </a:rPr>
-              <a:t>docker/sdk</a:t>
-            </a:r>
-            <a:r>
-              <a:rPr sz="900">
-                <a:solidFill>
-                  <a:srgbClr val="2D2D2D"/>
-                </a:solidFill>
-                <a:latin typeface="Consolas"/>
-              </a:rPr>
-              <a:t> cli vendor/bin/codecept run </a:t>
-            </a:r>
-            <a:r>
-              <a:rPr sz="900">
-                <a:solidFill>
-                  <a:srgbClr val="2D2D2D"/>
-                </a:solidFill>
-                <a:latin typeface="Consolas"/>
-              </a:rPr>
-              <a:t>-c</a:t>
-            </a:r>
-            <a:r>
-              <a:rPr sz="900">
-                <a:solidFill>
-                  <a:srgbClr val="2D2D2D"/>
-                </a:solidFill>
-                <a:latin typeface="Consolas"/>
-              </a:rPr>
-              <a:t> tests/SprykerAcademyTest/Zed/ContactRequest/ Exercise7</a:t>
-            </a:r>
-          </a:p>
-          <a:p>
-            <a:pPr>
-              <a:spcAft>
-                <a:spcPts val="800"/>
-              </a:spcAft>
-              <a:defRPr sz="1600">
-                <a:solidFill>
-                  <a:srgbClr val="1A1A1A"/>
-                </a:solidFill>
-              </a:defRPr>
-            </a:pPr>
-            <a:r>
-              <a:t>The test suite covers: - Schema XML: fk_customer column, foreign key, timestampable behavior - Transfer XML: fkCustomer , createdAt properties, ContactRequestCollection transfer ( strict="true" , singular="contactRequest" ) - Structural: All classes and methods exist across the full stack - Mock-based: Stub calls the correct gateway paths for create, get, and delete - Unit: ContactRequestDeleter delegates to EntityManager correctly - SOLID: ContactRequestWriter does NOT have a delete() method</a:t>
-            </a:r>
-          </a:p>
-          <a:p>
-            <a:pPr>
-              <a:spcAft>
-                <a:spcPts val="800"/>
-              </a:spcAft>
-              <a:defRPr sz="1600">
-                <a:solidFill>
-                  <a:srgbClr val="1A1A1A"/>
-                </a:solidFill>
-              </a:defRPr>
-            </a:pPr>
-            <a:r>
-              <a:t>Or run all exercise tests at once:</a:t>
-            </a:r>
-          </a:p>
-          <a:p>
-            <a:pPr>
-              <a:spcBef>
-                <a:spcPts val="0"/>
-              </a:spcBef>
-              <a:spcAft>
-                <a:spcPts val="0"/>
-              </a:spcAft>
-            </a:pPr>
-            <a:r>
-              <a:rPr sz="900">
-                <a:solidFill>
-                  <a:srgbClr val="2D2D2D"/>
-                </a:solidFill>
-                <a:latin typeface="Consolas"/>
-              </a:rPr>
-              <a:t>docker/sdk</a:t>
-            </a:r>
-            <a:r>
-              <a:rPr sz="900">
-                <a:solidFill>
-                  <a:srgbClr val="2D2D2D"/>
-                </a:solidFill>
-                <a:latin typeface="Consolas"/>
-              </a:rPr>
-              <a:t> cli vendor/bin/codecept run </a:t>
-            </a:r>
-            <a:r>
-              <a:rPr sz="900">
-                <a:solidFill>
-                  <a:srgbClr val="2D2D2D"/>
-                </a:solidFill>
-                <a:latin typeface="Consolas"/>
-              </a:rPr>
-              <a:t>-c</a:t>
-            </a:r>
-            <a:r>
-              <a:rPr sz="900">
-                <a:solidFill>
-                  <a:srgbClr val="2D2D2D"/>
-                </a:solidFill>
-                <a:latin typeface="Consolas"/>
-              </a:rPr>
-              <a:t> tests/SprykerAcademyTest/Zed/ContactRequest/</a:t>
+              <a:t>Always validate IDs from user input before passing them to the persistence layer:</a:t>
+            </a:r>
+          </a:p>
+          <a:p>
+            <a:pPr>
+              <a:spcBef>
+                <a:spcPts val="0"/>
+              </a:spcBef>
+              <a:spcAft>
+                <a:spcPts val="0"/>
+              </a:spcAft>
+            </a:pPr>
+            <a:r>
+              <a:rPr sz="900">
+                <a:solidFill>
+                  <a:srgbClr val="19177C"/>
+                </a:solidFill>
+                <a:latin typeface="Consolas"/>
+              </a:rPr>
+              <a:t>$idContactRequest</a:t>
+            </a:r>
+            <a:r>
+              <a:rPr sz="900">
+                <a:solidFill>
+                  <a:srgbClr val="2D2D2D"/>
+                </a:solidFill>
+                <a:latin typeface="Consolas"/>
+              </a:rPr>
+              <a:t> </a:t>
+            </a:r>
+            <a:r>
+              <a:rPr sz="900">
+                <a:solidFill>
+                  <a:srgbClr val="666666"/>
+                </a:solidFill>
+                <a:latin typeface="Consolas"/>
+              </a:rPr>
+              <a:t>=</a:t>
+            </a:r>
+            <a:r>
+              <a:rPr sz="900">
+                <a:solidFill>
+                  <a:srgbClr val="2D2D2D"/>
+                </a:solidFill>
+                <a:latin typeface="Consolas"/>
+              </a:rPr>
+              <a:t> </a:t>
+            </a:r>
+            <a:r>
+              <a:rPr sz="900">
+                <a:solidFill>
+                  <a:srgbClr val="19177C"/>
+                </a:solidFill>
+                <a:latin typeface="Consolas"/>
+              </a:rPr>
+              <a:t>$this</a:t>
+            </a:r>
+            <a:r>
+              <a:rPr sz="900">
+                <a:solidFill>
+                  <a:srgbClr val="2D2D2D"/>
+                </a:solidFill>
+                <a:latin typeface="Consolas"/>
+              </a:rPr>
+              <a:t>-&gt;castId(</a:t>
+            </a:r>
+            <a:r>
+              <a:rPr sz="900">
+                <a:solidFill>
+                  <a:srgbClr val="19177C"/>
+                </a:solidFill>
+                <a:latin typeface="Consolas"/>
+              </a:rPr>
+              <a:t>$request</a:t>
+            </a:r>
+            <a:r>
+              <a:rPr sz="900">
+                <a:solidFill>
+                  <a:srgbClr val="2D2D2D"/>
+                </a:solidFill>
+                <a:latin typeface="Consolas"/>
+              </a:rPr>
+              <a:t>-&gt;request-&gt;get(</a:t>
+            </a:r>
+            <a:r>
+              <a:rPr sz="900">
+                <a:solidFill>
+                  <a:srgbClr val="4070A0"/>
+                </a:solidFill>
+                <a:latin typeface="Consolas"/>
+              </a:rPr>
+              <a:t>'idContactRequest'</a:t>
+            </a:r>
+            <a:r>
+              <a:rPr sz="900">
+                <a:solidFill>
+                  <a:srgbClr val="2D2D2D"/>
+                </a:solidFill>
+                <a:latin typeface="Consolas"/>
+              </a:rPr>
+              <a:t>))</a:t>
+            </a:r>
+            <a:r>
+              <a:rPr sz="900">
+                <a:solidFill>
+                  <a:srgbClr val="007020"/>
+                </a:solidFill>
+                <a:latin typeface="Consolas"/>
+              </a:rPr>
+              <a:t>;</a:t>
+            </a:r>
+          </a:p>
+          <a:p>
+            <a:pPr>
+              <a:spcBef>
+                <a:spcPts val="0"/>
+              </a:spcBef>
+              <a:spcAft>
+                <a:spcPts val="0"/>
+              </a:spcAft>
+            </a:pPr>
+            <a:r>
+              <a:rPr sz="900" i="1">
+                <a:solidFill>
+                  <a:srgbClr val="60A0B0"/>
+                </a:solidFill>
+                <a:latin typeface="Consolas"/>
+              </a:rPr>
+              <a:t>// Throws InvalidArgumentException if not numeric or zero</a:t>
             </a:r>
           </a:p>
         </p:txBody>
@@ -32362,7 +32167,7 @@
               </a:defRPr>
             </a:pPr>
             <a:r>
-              <a:t>Solution</a:t>
+              <a:t>Testing</a:t>
             </a:r>
           </a:p>
         </p:txBody>
@@ -32433,30 +32238,77 @@
           <a:lstStyle/>
           <a:p>
             <a:pPr>
-              <a:spcBef>
-                <a:spcPts val="0"/>
-              </a:spcBef>
-              <a:spcAft>
-                <a:spcPts val="0"/>
-              </a:spcAft>
-            </a:pPr>
-            <a:r>
-              <a:rPr sz="900">
-                <a:solidFill>
-                  <a:srgbClr val="2D2D2D"/>
-                </a:solidFill>
-                <a:latin typeface="Consolas"/>
-              </a:rPr>
-              <a:t>./exercises/load.sh</a:t>
-            </a:r>
-            <a:r>
-              <a:rPr sz="900">
-                <a:solidFill>
-                  <a:srgbClr val="2D2D2D"/>
-                </a:solidFill>
-                <a:latin typeface="Consolas"/>
-              </a:rPr>
-              <a:t> contact-request basics/extending-core-modules/complete</a:t>
+              <a:spcAft>
+                <a:spcPts val="400"/>
+              </a:spcAft>
+              <a:defRPr sz="1500">
+                <a:solidFill>
+                  <a:srgbClr val="1A1A1A"/>
+                </a:solidFill>
+              </a:defRPr>
+            </a:pPr>
+            <a:r>
+              <a:t>• Log in to Yves: http://yves.eu.spryker.local/en/login (use sonia@spryker.com / change123 )</a:t>
+            </a:r>
+          </a:p>
+          <a:p>
+            <a:pPr>
+              <a:spcAft>
+                <a:spcPts val="400"/>
+              </a:spcAft>
+              <a:defRPr sz="1500">
+                <a:solidFill>
+                  <a:srgbClr val="1A1A1A"/>
+                </a:solidFill>
+              </a:defRPr>
+            </a:pPr>
+            <a:r>
+              <a:t>• Visit: http://yves.eu.spryker.local/en/customer/contact-requests</a:t>
+            </a:r>
+          </a:p>
+          <a:p>
+            <a:pPr>
+              <a:spcAft>
+                <a:spcPts val="400"/>
+              </a:spcAft>
+              <a:defRPr sz="1500">
+                <a:solidFill>
+                  <a:srgbClr val="1A1A1A"/>
+                </a:solidFill>
+              </a:defRPr>
+            </a:pPr>
+            <a:r>
+              <a:t>• You should see a message list (empty initially) and a form to add messages</a:t>
+            </a:r>
+          </a:p>
+          <a:p>
+            <a:pPr>
+              <a:spcAft>
+                <a:spcPts val="400"/>
+              </a:spcAft>
+              <a:defRPr sz="1500">
+                <a:solidFill>
+                  <a:srgbClr val="1A1A1A"/>
+                </a:solidFill>
+              </a:defRPr>
+            </a:pPr>
+            <a:r>
+              <a:t>• Add a message and verify it appears in the list with a created timestamp</a:t>
+            </a:r>
+          </a:p>
+          <a:p>
+            <a:pPr>
+              <a:spcAft>
+                <a:spcPts val="400"/>
+              </a:spcAft>
+              <a:defRPr sz="1500">
+                <a:solidFill>
+                  <a:srgbClr val="1A1A1A"/>
+                </a:solidFill>
+              </a:defRPr>
+            </a:pPr>
+            <a:r>
+              <a:t>• Click “Delete” on a message and verify it disappears</a:t>
             </a:r>
           </a:p>
         </p:txBody>
@@ -32509,7 +32361,7 @@
               </a:defRPr>
             </a:pPr>
             <a:r>
-              <a:t>Bonus: AJAX Version</a:t>
+              <a:t>Verify Your Work</a:t>
             </a:r>
           </a:p>
         </p:txBody>
@@ -32590,25 +32442,68 @@
               </a:defRPr>
             </a:pPr>
             <a:r>
-              <a:t>An extended solution is available that uses Spryker’s built-in AJAX component pattern to add and delete messages without a full page reload. The message table refreshes dynamically.</a:t>
-            </a:r>
-          </a:p>
-          <a:p>
-            <a:pPr>
-              <a:spcBef>
-                <a:spcPts val="1200"/>
-              </a:spcBef>
-              <a:spcAft>
-                <a:spcPts val="600"/>
-              </a:spcAft>
-              <a:defRPr sz="2000" b="1">
+              <a:t>Run the automated tests for this exercise:</a:t>
+            </a:r>
+          </a:p>
+          <a:p>
+            <a:pPr>
+              <a:spcBef>
+                <a:spcPts val="0"/>
+              </a:spcBef>
+              <a:spcAft>
+                <a:spcPts val="0"/>
+              </a:spcAft>
+            </a:pPr>
+            <a:r>
+              <a:rPr sz="900">
+                <a:solidFill>
+                  <a:srgbClr val="2D2D2D"/>
+                </a:solidFill>
+                <a:latin typeface="Consolas"/>
+              </a:rPr>
+              <a:t>docker/sdk</a:t>
+            </a:r>
+            <a:r>
+              <a:rPr sz="900">
+                <a:solidFill>
+                  <a:srgbClr val="2D2D2D"/>
+                </a:solidFill>
+                <a:latin typeface="Consolas"/>
+              </a:rPr>
+              <a:t> cli vendor/bin/codecept run </a:t>
+            </a:r>
+            <a:r>
+              <a:rPr sz="900">
+                <a:solidFill>
+                  <a:srgbClr val="2D2D2D"/>
+                </a:solidFill>
+                <a:latin typeface="Consolas"/>
+              </a:rPr>
+              <a:t>-c</a:t>
+            </a:r>
+            <a:r>
+              <a:rPr sz="900">
+                <a:solidFill>
+                  <a:srgbClr val="2D2D2D"/>
+                </a:solidFill>
+                <a:latin typeface="Consolas"/>
+              </a:rPr>
+              <a:t> tests/SprykerAcademyTest/Zed/ContactRequest/ Exercise7</a:t>
+            </a:r>
+          </a:p>
+          <a:p>
+            <a:pPr>
+              <a:spcAft>
+                <a:spcPts val="800"/>
+              </a:spcAft>
+              <a:defRPr sz="1600">
                 <a:solidFill>
                   <a:srgbClr val="1A1A1A"/>
                 </a:solidFill>
               </a:defRPr>
             </a:pPr>
             <a:r>
-              <a:t>How Spryker AJAX Works</a:t>
+              <a:t>The test suite covers: - Schema XML: fk_customer column, foreign key, timestampable behavior - Transfer XML: fkCustomer , createdAt properties, ContactRequestCollection transfer ( strict="true" , singular="contactRequest" ) - Structural: All classes and methods exist across the full stack - Mock-based: Stub calls the correct gateway paths for create, get, and delete - Unit: ContactRequestDeleter delegates to EntityManager correctly - SOLID: ContactRequestWriter does NOT have a delete() method</a:t>
             </a:r>
           </a:p>
           <a:p>
@@ -32623,103 +32518,53 @@
               </a:defRPr>
             </a:pPr>
             <a:r>
-              <a:t>Spryker provides a component-based AJAX pattern using four Twig molecules from ShopUi :</a:t>
-            </a:r>
-          </a:p>
-          <a:p>
-            <a:pPr>
-              <a:spcAft>
-                <a:spcPts val="100"/>
-              </a:spcAft>
-              <a:defRPr sz="1000">
-                <a:solidFill>
-                  <a:srgbClr val="1A1A1A"/>
-                </a:solidFill>
-                <a:latin typeface="Consolas"/>
-              </a:defRPr>
-            </a:pPr>
-            <a:r>
-              <a:t>Component            Role                                                                                              </a:t>
-            </a:r>
-          </a:p>
-          <a:p>
-            <a:pPr>
-              <a:spcAft>
-                <a:spcPts val="100"/>
-              </a:spcAft>
-              <a:defRPr sz="1000">
-                <a:solidFill>
-                  <a:srgbClr val="1A1A1A"/>
-                </a:solidFill>
-                <a:latin typeface="Consolas"/>
-              </a:defRPr>
-            </a:pPr>
-            <a:r>
-              <a:t>-------------------  --------------------------------------------------------------------------------------------------</a:t>
-            </a:r>
-          </a:p>
-          <a:p>
-            <a:pPr>
-              <a:spcAft>
-                <a:spcPts val="100"/>
-              </a:spcAft>
-              <a:defRPr sz="1000">
-                <a:solidFill>
-                  <a:srgbClr val="1A1A1A"/>
-                </a:solidFill>
-                <a:latin typeface="Consolas"/>
-              </a:defRPr>
-            </a:pPr>
-            <a:r>
-              <a:t>ajax-provider        XMLHttpRequest wrapper — sends requests and dispatches fetching / fetched events                  </a:t>
-            </a:r>
-          </a:p>
-          <a:p>
-            <a:pPr>
-              <a:spcAft>
-                <a:spcPts val="100"/>
-              </a:spcAft>
-              <a:defRPr sz="1000">
-                <a:solidFill>
-                  <a:srgbClr val="1A1A1A"/>
-                </a:solidFill>
-                <a:latin typeface="Consolas"/>
-              </a:defRPr>
-            </a:pPr>
-            <a:r>
-              <a:t>ajax-form-submitter  Intercepts form submit (via data-* trigger attribute) and delegates to the provider               </a:t>
-            </a:r>
-          </a:p>
-          <a:p>
-            <a:pPr>
-              <a:spcAft>
-                <a:spcPts val="100"/>
-              </a:spcAft>
-              <a:defRPr sz="1000">
-                <a:solidFill>
-                  <a:srgbClr val="1A1A1A"/>
-                </a:solidFill>
-                <a:latin typeface="Consolas"/>
-              </a:defRPr>
-            </a:pPr>
-            <a:r>
-              <a:t>ajax-renderer        Listens for the fetched event, parses JSON response, and inserts content into a target DOM element</a:t>
-            </a:r>
-          </a:p>
-          <a:p>
-            <a:pPr>
-              <a:spcAft>
-                <a:spcPts val="100"/>
-              </a:spcAft>
-              <a:defRPr sz="1000">
-                <a:solidFill>
-                  <a:srgbClr val="1A1A1A"/>
-                </a:solidFill>
-                <a:latin typeface="Consolas"/>
-              </a:defRPr>
-            </a:pPr>
-            <a:r>
-              <a:t>ajax-loader          Shows/hides a spinner during the request</a:t>
+              <a:t>Or run all exercise tests at once:</a:t>
+            </a:r>
+          </a:p>
+          <a:p>
+            <a:pPr>
+              <a:spcBef>
+                <a:spcPts val="0"/>
+              </a:spcBef>
+              <a:spcAft>
+                <a:spcPts val="0"/>
+              </a:spcAft>
+            </a:pPr>
+            <a:r>
+              <a:rPr sz="900">
+                <a:solidFill>
+                  <a:srgbClr val="2D2D2D"/>
+                </a:solidFill>
+                <a:latin typeface="Consolas"/>
+              </a:rPr>
+              <a:t>docker/sdk</a:t>
+            </a:r>
+            <a:r>
+              <a:rPr sz="900">
+                <a:solidFill>
+                  <a:srgbClr val="2D2D2D"/>
+                </a:solidFill>
+                <a:latin typeface="Consolas"/>
+              </a:rPr>
+              <a:t> cli vendor/bin/codecept run </a:t>
+            </a:r>
+            <a:r>
+              <a:rPr sz="900">
+                <a:solidFill>
+                  <a:srgbClr val="2D2D2D"/>
+                </a:solidFill>
+                <a:latin typeface="Consolas"/>
+              </a:rPr>
+              <a:t>-c</a:t>
+            </a:r>
+            <a:r>
+              <a:rPr sz="900">
+                <a:solidFill>
+                  <a:srgbClr val="2D2D2D"/>
+                </a:solidFill>
+                <a:latin typeface="Consolas"/>
+              </a:rPr>
+              <a:t> tests/SprykerAcademyTest/Zed/ContactRequest/</a:t>
             </a:r>
           </a:p>
         </p:txBody>
@@ -32772,7 +32617,7 @@
               </a:defRPr>
             </a:pPr>
             <a:r>
-              <a:t>The JSON Response Contract</a:t>
+              <a:t>Solution</a:t>
             </a:r>
           </a:p>
         </p:txBody>
@@ -32843,237 +32688,30 @@
           <a:lstStyle/>
           <a:p>
             <a:pPr>
-              <a:spcAft>
-                <a:spcPts val="800"/>
-              </a:spcAft>
-              <a:defRPr sz="1600">
-                <a:solidFill>
-                  <a:srgbClr val="1A1A1A"/>
-                </a:solidFill>
-              </a:defRPr>
-            </a:pPr>
-            <a:r>
-              <a:t>Async controllers return JsonResponse with this structure:</a:t>
-            </a:r>
-          </a:p>
-          <a:p>
-            <a:pPr>
-              <a:spcBef>
-                <a:spcPts val="0"/>
-              </a:spcBef>
-              <a:spcAft>
-                <a:spcPts val="0"/>
-              </a:spcAft>
-            </a:pPr>
-            <a:r>
-              <a:rPr sz="900">
-                <a:solidFill>
-                  <a:srgbClr val="06287E"/>
-                </a:solidFill>
-                <a:latin typeface="Consolas"/>
-              </a:rPr>
-              <a:t>{</a:t>
-            </a:r>
-          </a:p>
-          <a:p>
-            <a:pPr>
-              <a:spcBef>
-                <a:spcPts val="0"/>
-              </a:spcBef>
-              <a:spcAft>
-                <a:spcPts val="0"/>
-              </a:spcAft>
-            </a:pPr>
-            <a:r>
-              <a:rPr sz="900">
-                <a:solidFill>
-                  <a:srgbClr val="2D2D2D"/>
-                </a:solidFill>
-                <a:latin typeface="Consolas"/>
-              </a:rPr>
-              <a:t>    </a:t>
-            </a:r>
-            <a:r>
-              <a:rPr sz="900">
-                <a:solidFill>
-                  <a:srgbClr val="902000"/>
-                </a:solidFill>
-                <a:latin typeface="Consolas"/>
-              </a:rPr>
-              <a:t>"messages"</a:t>
-            </a:r>
-            <a:r>
-              <a:rPr sz="900">
-                <a:solidFill>
-                  <a:srgbClr val="06287E"/>
-                </a:solidFill>
-                <a:latin typeface="Consolas"/>
-              </a:rPr>
-              <a:t>:</a:t>
-            </a:r>
-            <a:r>
-              <a:rPr sz="900">
-                <a:solidFill>
-                  <a:srgbClr val="2D2D2D"/>
-                </a:solidFill>
-                <a:latin typeface="Consolas"/>
-              </a:rPr>
-              <a:t> </a:t>
-            </a:r>
-            <a:r>
-              <a:rPr sz="900">
-                <a:solidFill>
-                  <a:srgbClr val="4070A0"/>
-                </a:solidFill>
-                <a:latin typeface="Consolas"/>
-              </a:rPr>
-              <a:t>"&lt;rendered flash message HTML&gt;"</a:t>
-            </a:r>
-            <a:r>
-              <a:rPr sz="900">
-                <a:solidFill>
-                  <a:srgbClr val="06287E"/>
-                </a:solidFill>
-                <a:latin typeface="Consolas"/>
-              </a:rPr>
-              <a:t>,</a:t>
-            </a:r>
-          </a:p>
-          <a:p>
-            <a:pPr>
-              <a:spcBef>
-                <a:spcPts val="0"/>
-              </a:spcBef>
-              <a:spcAft>
-                <a:spcPts val="0"/>
-              </a:spcAft>
-            </a:pPr>
-            <a:r>
-              <a:rPr sz="900">
-                <a:solidFill>
-                  <a:srgbClr val="2D2D2D"/>
-                </a:solidFill>
-                <a:latin typeface="Consolas"/>
-              </a:rPr>
-              <a:t>    </a:t>
-            </a:r>
-            <a:r>
-              <a:rPr sz="900">
-                <a:solidFill>
-                  <a:srgbClr val="902000"/>
-                </a:solidFill>
-                <a:latin typeface="Consolas"/>
-              </a:rPr>
-              <a:t>"content"</a:t>
-            </a:r>
-            <a:r>
-              <a:rPr sz="900">
-                <a:solidFill>
-                  <a:srgbClr val="06287E"/>
-                </a:solidFill>
-                <a:latin typeface="Consolas"/>
-              </a:rPr>
-              <a:t>:</a:t>
-            </a:r>
-            <a:r>
-              <a:rPr sz="900">
-                <a:solidFill>
-                  <a:srgbClr val="2D2D2D"/>
-                </a:solidFill>
-                <a:latin typeface="Consolas"/>
-              </a:rPr>
-              <a:t> </a:t>
-            </a:r>
-            <a:r>
-              <a:rPr sz="900">
-                <a:solidFill>
-                  <a:srgbClr val="4070A0"/>
-                </a:solidFill>
-                <a:latin typeface="Consolas"/>
-              </a:rPr>
-              <a:t>"&lt;rendered HTML fragment to replace in the DOM&gt;"</a:t>
-            </a:r>
-          </a:p>
-          <a:p>
-            <a:pPr>
-              <a:spcBef>
-                <a:spcPts val="0"/>
-              </a:spcBef>
-              <a:spcAft>
-                <a:spcPts val="0"/>
-              </a:spcAft>
-            </a:pPr>
-            <a:r>
-              <a:rPr sz="900">
-                <a:solidFill>
-                  <a:srgbClr val="06287E"/>
-                </a:solidFill>
-                <a:latin typeface="Consolas"/>
-              </a:rPr>
-              <a:t>}</a:t>
-            </a:r>
-          </a:p>
-          <a:p>
-            <a:pPr>
-              <a:spcAft>
-                <a:spcPts val="400"/>
-              </a:spcAft>
-              <a:defRPr sz="1500">
-                <a:solidFill>
-                  <a:srgbClr val="1A1A1A"/>
-                </a:solidFill>
-              </a:defRPr>
-            </a:pPr>
-            <a:r>
-              <a:t>• messages — Rendered via @ShopUi/components/organisms/flash-message-list/flash-message-list.twig . Dispatched as a DOM event for the flash message component to pick up.</a:t>
-            </a:r>
-          </a:p>
-          <a:p>
-            <a:pPr>
-              <a:spcAft>
-                <a:spcPts val="400"/>
-              </a:spcAft>
-              <a:defRPr sz="1500">
-                <a:solidFill>
-                  <a:srgbClr val="1A1A1A"/>
-                </a:solidFill>
-              </a:defRPr>
-            </a:pPr>
-            <a:r>
-              <a:t>• content — The re-rendered page fragment. The ajax-renderer inserts this into the target element.</a:t>
-            </a:r>
-          </a:p>
-          <a:p>
-            <a:pPr>
-              <a:spcBef>
-                <a:spcPts val="1200"/>
-              </a:spcBef>
-              <a:spcAft>
-                <a:spcPts val="600"/>
-              </a:spcAft>
-              <a:defRPr sz="2000" b="1">
-                <a:solidFill>
-                  <a:srgbClr val="1A1A1A"/>
-                </a:solidFill>
-              </a:defRPr>
-            </a:pPr>
-            <a:r>
-              <a:t>Twig Integration</a:t>
-            </a:r>
-          </a:p>
-          <a:p>
-            <a:pPr>
-              <a:spcAft>
-                <a:spcPts val="800"/>
-              </a:spcAft>
-              <a:defRPr sz="1600">
-                <a:solidFill>
-                  <a:srgbClr val="1A1A1A"/>
-                </a:solidFill>
-              </a:defRPr>
-            </a:pPr>
-            <a:r>
-              <a:t>The template includes the AJAX trio after the content wrapper:</a:t>
+              <a:spcBef>
+                <a:spcPts val="0"/>
+              </a:spcBef>
+              <a:spcAft>
+                <a:spcPts val="0"/>
+              </a:spcAft>
+            </a:pPr>
+            <a:r>
+              <a:rPr sz="900">
+                <a:solidFill>
+                  <a:srgbClr val="2D2D2D"/>
+                </a:solidFill>
+                <a:latin typeface="Consolas"/>
+              </a:rPr>
+              <a:t>./exercises/load.sh</a:t>
+            </a:r>
+            <a:r>
+              <a:rPr sz="900">
+                <a:solidFill>
+                  <a:srgbClr val="2D2D2D"/>
+                </a:solidFill>
+                <a:latin typeface="Consolas"/>
+              </a:rPr>
+              <a:t> contact-request basics/extending-core-modules/complete</a:t>
             </a:r>
           </a:p>
         </p:txBody>
@@ -33126,7 +32764,7 @@
               </a:defRPr>
             </a:pPr>
             <a:r>
-              <a:t>The JSON Response Contract (cont.)</a:t>
+              <a:t>Bonus: AJAX Version</a:t>
             </a:r>
           </a:p>
         </p:txBody>
@@ -33197,174 +32835,6 @@
           <a:lstStyle/>
           <a:p>
             <a:pPr>
-              <a:spcBef>
-                <a:spcPts val="0"/>
-              </a:spcBef>
-              <a:spcAft>
-                <a:spcPts val="0"/>
-              </a:spcAft>
-            </a:pPr>
-            <a:r>
-              <a:rPr sz="900">
-                <a:solidFill>
-                  <a:srgbClr val="2D2D2D"/>
-                </a:solidFill>
-                <a:latin typeface="Consolas"/>
-              </a:rPr>
-              <a:t>{# Content area that gets replaced #}</a:t>
-            </a:r>
-          </a:p>
-          <a:p>
-            <a:pPr>
-              <a:spcBef>
-                <a:spcPts val="0"/>
-              </a:spcBef>
-              <a:spcAft>
-                <a:spcPts val="0"/>
-              </a:spcAft>
-            </a:pPr>
-            <a:r>
-              <a:rPr sz="900">
-                <a:solidFill>
-                  <a:srgbClr val="2D2D2D"/>
-                </a:solidFill>
-                <a:latin typeface="Consolas"/>
-              </a:rPr>
-              <a:t>&lt;div class="{{ ajaxContentClass }}"&gt;</a:t>
-            </a:r>
-          </a:p>
-          <a:p>
-            <a:pPr>
-              <a:spcBef>
-                <a:spcPts val="0"/>
-              </a:spcBef>
-              <a:spcAft>
-                <a:spcPts val="0"/>
-              </a:spcAft>
-            </a:pPr>
-            <a:r>
-              <a:rPr sz="900">
-                <a:solidFill>
-                  <a:srgbClr val="2D2D2D"/>
-                </a:solidFill>
-                <a:latin typeface="Consolas"/>
-              </a:rPr>
-              <a:t>    {# ... table, form, loader ... #}</a:t>
-            </a:r>
-          </a:p>
-          <a:p>
-            <a:pPr>
-              <a:spcBef>
-                <a:spcPts val="0"/>
-              </a:spcBef>
-              <a:spcAft>
-                <a:spcPts val="0"/>
-              </a:spcAft>
-            </a:pPr>
-            <a:r>
-              <a:rPr sz="900">
-                <a:solidFill>
-                  <a:srgbClr val="2D2D2D"/>
-                </a:solidFill>
-                <a:latin typeface="Consolas"/>
-              </a:rPr>
-              <a:t>&lt;/div&gt;</a:t>
-            </a:r>
-          </a:p>
-          <a:p>
-            <a:pPr>
-              <a:spcBef>
-                <a:spcPts val="0"/>
-              </a:spcBef>
-              <a:spcAft>
-                <a:spcPts val="0"/>
-              </a:spcAft>
-            </a:pPr>
-            <a:r>
-              <a:rPr sz="900">
-                <a:latin typeface="Consolas"/>
-              </a:rPr>
-              <a:t> </a:t>
-            </a:r>
-          </a:p>
-          <a:p>
-            <a:pPr>
-              <a:spcBef>
-                <a:spcPts val="0"/>
-              </a:spcBef>
-              <a:spcAft>
-                <a:spcPts val="0"/>
-              </a:spcAft>
-            </a:pPr>
-            <a:r>
-              <a:rPr sz="900">
-                <a:solidFill>
-                  <a:srgbClr val="2D2D2D"/>
-                </a:solidFill>
-                <a:latin typeface="Consolas"/>
-              </a:rPr>
-              <a:t>{# AJAX components #}</a:t>
-            </a:r>
-          </a:p>
-          <a:p>
-            <a:pPr>
-              <a:spcBef>
-                <a:spcPts val="0"/>
-              </a:spcBef>
-              <a:spcAft>
-                <a:spcPts val="0"/>
-              </a:spcAft>
-            </a:pPr>
-            <a:r>
-              <a:rPr sz="900">
-                <a:solidFill>
-                  <a:srgbClr val="2D2D2D"/>
-                </a:solidFill>
-                <a:latin typeface="Consolas"/>
-              </a:rPr>
-              <a:t>{% include molecule('ajax-provider') with { class: ajaxProviderClass, attributes: { method: 'POST' } } only %}</a:t>
-            </a:r>
-          </a:p>
-          <a:p>
-            <a:pPr>
-              <a:spcBef>
-                <a:spcPts val="0"/>
-              </a:spcBef>
-              <a:spcAft>
-                <a:spcPts val="0"/>
-              </a:spcAft>
-            </a:pPr>
-            <a:r>
-              <a:rPr sz="900">
-                <a:solidFill>
-                  <a:srgbClr val="2D2D2D"/>
-                </a:solidFill>
-                <a:latin typeface="Consolas"/>
-              </a:rPr>
-              <a:t>{% include molecule('ajax-renderer') with { attributes: { 'provider-class-name': ajaxProviderClass, 'target-class-name': ajaxContentClass, 'mount-after-render': true } } only %}</a:t>
-            </a:r>
-          </a:p>
-          <a:p>
-            <a:pPr>
-              <a:spcBef>
-                <a:spcPts val="0"/>
-              </a:spcBef>
-              <a:spcAft>
-                <a:spcPts val="0"/>
-              </a:spcAft>
-            </a:pPr>
-            <a:r>
-              <a:rPr sz="900">
-                <a:solidFill>
-                  <a:srgbClr val="2D2D2D"/>
-                </a:solidFill>
-                <a:latin typeface="Consolas"/>
-              </a:rPr>
-              <a:t>{% include molecule('ajax-form-submitter') with { attributes: { 'trigger-attribute': 'data-contact-request-ajax-submit', 'provider-class-name': ajaxProviderClass } } only %}</a:t>
-            </a:r>
-          </a:p>
-          <a:p>
-            <a:pPr>
               <a:spcAft>
                 <a:spcPts val="800"/>
               </a:spcAft>
@@ -33375,135 +32845,136 @@
               </a:defRPr>
             </a:pPr>
             <a:r>
-              <a:t>Form buttons use data-contact-request-ajax-submit and formaction to point to the async endpoint:</a:t>
-            </a:r>
-          </a:p>
-          <a:p>
-            <a:pPr>
-              <a:spcBef>
-                <a:spcPts val="0"/>
-              </a:spcBef>
-              <a:spcAft>
-                <a:spcPts val="0"/>
-              </a:spcAft>
-            </a:pPr>
-            <a:r>
-              <a:rPr sz="900" b="1">
-                <a:solidFill>
-                  <a:srgbClr val="007020"/>
-                </a:solidFill>
-                <a:latin typeface="Consolas"/>
-              </a:rPr>
-              <a:t>&lt;button</a:t>
-            </a:r>
-            <a:r>
-              <a:rPr sz="900">
-                <a:solidFill>
-                  <a:srgbClr val="007020"/>
-                </a:solidFill>
-                <a:latin typeface="Consolas"/>
-              </a:rPr>
-              <a:t> data-contact-request-ajax-submit formaction=</a:t>
-            </a:r>
-            <a:r>
-              <a:rPr sz="900">
-                <a:solidFill>
-                  <a:srgbClr val="4070A0"/>
-                </a:solidFill>
-                <a:latin typeface="Consolas"/>
-              </a:rPr>
-              <a:t>"/customer/contact-requests/async/add"</a:t>
-            </a:r>
-            <a:r>
-              <a:rPr sz="900" b="1">
-                <a:solidFill>
-                  <a:srgbClr val="007020"/>
-                </a:solidFill>
-                <a:latin typeface="Consolas"/>
-              </a:rPr>
-              <a:t>&gt;</a:t>
-            </a:r>
-            <a:r>
-              <a:rPr sz="900">
-                <a:solidFill>
-                  <a:srgbClr val="2D2D2D"/>
-                </a:solidFill>
-                <a:latin typeface="Consolas"/>
-              </a:rPr>
-              <a:t>Add Contact Request</a:t>
-            </a:r>
-            <a:r>
-              <a:rPr sz="900" b="1">
-                <a:solidFill>
-                  <a:srgbClr val="007020"/>
-                </a:solidFill>
-                <a:latin typeface="Consolas"/>
-              </a:rPr>
-              <a:t>&lt;/button&gt;</a:t>
-            </a:r>
-          </a:p>
-          <a:p>
-            <a:pPr>
-              <a:spcBef>
-                <a:spcPts val="0"/>
-              </a:spcBef>
-              <a:spcAft>
-                <a:spcPts val="0"/>
-              </a:spcAft>
-            </a:pPr>
-            <a:r>
-              <a:rPr sz="900" b="1">
-                <a:solidFill>
-                  <a:srgbClr val="007020"/>
-                </a:solidFill>
-                <a:latin typeface="Consolas"/>
-              </a:rPr>
-              <a:t>&lt;button</a:t>
-            </a:r>
-            <a:r>
-              <a:rPr sz="900">
-                <a:solidFill>
-                  <a:srgbClr val="007020"/>
-                </a:solidFill>
-                <a:latin typeface="Consolas"/>
-              </a:rPr>
-              <a:t> data-contact-request-ajax-submit formaction=</a:t>
-            </a:r>
-            <a:r>
-              <a:rPr sz="900">
-                <a:solidFill>
-                  <a:srgbClr val="4070A0"/>
-                </a:solidFill>
-                <a:latin typeface="Consolas"/>
-              </a:rPr>
-              <a:t>"/customer/contact-requests/async/delete"</a:t>
-            </a:r>
-            <a:r>
-              <a:rPr sz="900" b="1">
-                <a:solidFill>
-                  <a:srgbClr val="007020"/>
-                </a:solidFill>
-                <a:latin typeface="Consolas"/>
-              </a:rPr>
-              <a:t>&gt;</a:t>
-            </a:r>
-            <a:r>
-              <a:rPr sz="900">
-                <a:solidFill>
-                  <a:srgbClr val="2D2D2D"/>
-                </a:solidFill>
-                <a:latin typeface="Consolas"/>
-              </a:rPr>
-              <a:t>Delete</a:t>
-            </a:r>
-            <a:r>
-              <a:rPr sz="900" b="1">
-                <a:solidFill>
-                  <a:srgbClr val="007020"/>
-                </a:solidFill>
-                <a:latin typeface="Consolas"/>
-              </a:rPr>
-              <a:t>&lt;/button&gt;</a:t>
+              <a:t>An extended solution is available that uses Spryker’s built-in AJAX component pattern to add and delete messages without a full page reload. The message table refreshes dynamically.</a:t>
+            </a:r>
+          </a:p>
+          <a:p>
+            <a:pPr>
+              <a:spcBef>
+                <a:spcPts val="1200"/>
+              </a:spcBef>
+              <a:spcAft>
+                <a:spcPts val="600"/>
+              </a:spcAft>
+              <a:defRPr sz="2000" b="1">
+                <a:solidFill>
+                  <a:srgbClr val="1A1A1A"/>
+                </a:solidFill>
+              </a:defRPr>
+            </a:pPr>
+            <a:r>
+              <a:t>How Spryker AJAX Works</a:t>
+            </a:r>
+          </a:p>
+          <a:p>
+            <a:pPr>
+              <a:spcAft>
+                <a:spcPts val="800"/>
+              </a:spcAft>
+              <a:defRPr sz="1600">
+                <a:solidFill>
+                  <a:srgbClr val="1A1A1A"/>
+                </a:solidFill>
+              </a:defRPr>
+            </a:pPr>
+            <a:r>
+              <a:t>Spryker provides a component-based AJAX pattern using four Twig molecules from ShopUi :</a:t>
+            </a:r>
+          </a:p>
+          <a:p>
+            <a:pPr>
+              <a:spcAft>
+                <a:spcPts val="100"/>
+              </a:spcAft>
+              <a:defRPr sz="1000">
+                <a:solidFill>
+                  <a:srgbClr val="1A1A1A"/>
+                </a:solidFill>
+                <a:latin typeface="Consolas"/>
+              </a:defRPr>
+            </a:pPr>
+            <a:r>
+              <a:t>Component            Role                                                                                              </a:t>
+            </a:r>
+          </a:p>
+          <a:p>
+            <a:pPr>
+              <a:spcAft>
+                <a:spcPts val="100"/>
+              </a:spcAft>
+              <a:defRPr sz="1000">
+                <a:solidFill>
+                  <a:srgbClr val="1A1A1A"/>
+                </a:solidFill>
+                <a:latin typeface="Consolas"/>
+              </a:defRPr>
+            </a:pPr>
+            <a:r>
+              <a:t>-------------------  --------------------------------------------------------------------------------------------------</a:t>
+            </a:r>
+          </a:p>
+          <a:p>
+            <a:pPr>
+              <a:spcAft>
+                <a:spcPts val="100"/>
+              </a:spcAft>
+              <a:defRPr sz="1000">
+                <a:solidFill>
+                  <a:srgbClr val="1A1A1A"/>
+                </a:solidFill>
+                <a:latin typeface="Consolas"/>
+              </a:defRPr>
+            </a:pPr>
+            <a:r>
+              <a:t>ajax-provider        XMLHttpRequest wrapper — sends requests and dispatches fetching / fetched events                  </a:t>
+            </a:r>
+          </a:p>
+          <a:p>
+            <a:pPr>
+              <a:spcAft>
+                <a:spcPts val="100"/>
+              </a:spcAft>
+              <a:defRPr sz="1000">
+                <a:solidFill>
+                  <a:srgbClr val="1A1A1A"/>
+                </a:solidFill>
+                <a:latin typeface="Consolas"/>
+              </a:defRPr>
+            </a:pPr>
+            <a:r>
+              <a:t>ajax-form-submitter  Intercepts form submit (via data-* trigger attribute) and delegates to the provider               </a:t>
+            </a:r>
+          </a:p>
+          <a:p>
+            <a:pPr>
+              <a:spcAft>
+                <a:spcPts val="100"/>
+              </a:spcAft>
+              <a:defRPr sz="1000">
+                <a:solidFill>
+                  <a:srgbClr val="1A1A1A"/>
+                </a:solidFill>
+                <a:latin typeface="Consolas"/>
+              </a:defRPr>
+            </a:pPr>
+            <a:r>
+              <a:t>ajax-renderer        Listens for the fetched event, parses JSON response, and inserts content into a target DOM element</a:t>
+            </a:r>
+          </a:p>
+          <a:p>
+            <a:pPr>
+              <a:spcAft>
+                <a:spcPts val="100"/>
+              </a:spcAft>
+              <a:defRPr sz="1000">
+                <a:solidFill>
+                  <a:srgbClr val="1A1A1A"/>
+                </a:solidFill>
+                <a:latin typeface="Consolas"/>
+              </a:defRPr>
+            </a:pPr>
+            <a:r>
+              <a:t>ajax-loader          Shows/hides a spinner during the request</a:t>
             </a:r>
           </a:p>
         </p:txBody>
@@ -33517,6 +32988,790 @@
 </file>
 
 <file path=ppt/slides/slide207.xml><?xml version="1.0" encoding="utf-8"?>
+<p:sld xmlns:a="http://schemas.openxmlformats.org/drawingml/2006/main" xmlns:p="http://schemas.openxmlformats.org/presentationml/2006/main" xmlns:r="http://schemas.openxmlformats.org/officeDocument/2006/relationships">
+  <p:cSld>
+    <p:spTree>
+      <p:nvGrpSpPr>
+        <p:cNvPr id="1" name=""/>
+        <p:cNvGrpSpPr/>
+        <p:nvPr/>
+      </p:nvGrpSpPr>
+      <p:grpSpPr/>
+      <p:sp>
+        <p:nvSpPr>
+          <p:cNvPr id="2" name="TextBox 1"/>
+          <p:cNvSpPr txBox="1"/>
+          <p:nvPr/>
+        </p:nvSpPr>
+        <p:spPr>
+          <a:xfrm>
+            <a:off x="640080" y="365760"/>
+            <a:ext cx="10881360" cy="731520"/>
+          </a:xfrm>
+          <a:prstGeom prst="rect">
+            <a:avLst/>
+          </a:prstGeom>
+          <a:noFill/>
+        </p:spPr>
+        <p:txBody>
+          <a:bodyPr wrap="square">
+            <a:spAutoFit/>
+          </a:bodyPr>
+          <a:lstStyle/>
+          <a:p>
+            <a:pPr>
+              <a:defRPr sz="2800" b="1">
+                <a:solidFill>
+                  <a:srgbClr val="00A89B"/>
+                </a:solidFill>
+              </a:defRPr>
+            </a:pPr>
+            <a:r>
+              <a:t>The JSON Response Contract</a:t>
+            </a:r>
+          </a:p>
+        </p:txBody>
+      </p:sp>
+      <p:sp>
+        <p:nvSpPr>
+          <p:cNvPr id="3" name="Rectangle 2"/>
+          <p:cNvSpPr/>
+          <p:nvPr/>
+        </p:nvSpPr>
+        <p:spPr>
+          <a:xfrm>
+            <a:off x="640080" y="1051560"/>
+            <a:ext cx="1828800" cy="25400"/>
+          </a:xfrm>
+          <a:prstGeom prst="rect">
+            <a:avLst/>
+          </a:prstGeom>
+          <a:solidFill>
+            <a:srgbClr val="00A89B"/>
+          </a:solidFill>
+          <a:ln>
+            <a:noFill/>
+          </a:ln>
+        </p:spPr>
+        <p:style>
+          <a:lnRef idx="1">
+            <a:schemeClr val="accent1"/>
+          </a:lnRef>
+          <a:fillRef idx="3">
+            <a:schemeClr val="accent1"/>
+          </a:fillRef>
+          <a:effectRef idx="2">
+            <a:schemeClr val="accent1"/>
+          </a:effectRef>
+          <a:fontRef idx="minor">
+            <a:schemeClr val="lt1"/>
+          </a:fontRef>
+        </p:style>
+        <p:txBody>
+          <a:bodyPr rtlCol="0" anchor="ctr"/>
+          <a:lstStyle/>
+          <a:p>
+            <a:pPr algn="ctr"/>
+          </a:p>
+        </p:txBody>
+      </p:sp>
+      <p:sp>
+        <p:nvSpPr>
+          <p:cNvPr id="4" name="TextBox 3"/>
+          <p:cNvSpPr txBox="1"/>
+          <p:nvPr/>
+        </p:nvSpPr>
+        <p:spPr>
+          <a:xfrm>
+            <a:off x="640080" y="1371600"/>
+            <a:ext cx="10881360" cy="5029200"/>
+          </a:xfrm>
+          <a:prstGeom prst="rect">
+            <a:avLst/>
+          </a:prstGeom>
+          <a:noFill/>
+        </p:spPr>
+        <p:txBody>
+          <a:bodyPr wrap="square">
+            <a:spAutoFit/>
+          </a:bodyPr>
+          <a:lstStyle/>
+          <a:p>
+            <a:pPr>
+              <a:spcAft>
+                <a:spcPts val="800"/>
+              </a:spcAft>
+              <a:defRPr sz="1600">
+                <a:solidFill>
+                  <a:srgbClr val="1A1A1A"/>
+                </a:solidFill>
+              </a:defRPr>
+            </a:pPr>
+            <a:r>
+              <a:t>Async controllers return JsonResponse with this structure:</a:t>
+            </a:r>
+          </a:p>
+          <a:p>
+            <a:pPr>
+              <a:spcBef>
+                <a:spcPts val="0"/>
+              </a:spcBef>
+              <a:spcAft>
+                <a:spcPts val="0"/>
+              </a:spcAft>
+            </a:pPr>
+            <a:r>
+              <a:rPr sz="900">
+                <a:solidFill>
+                  <a:srgbClr val="06287E"/>
+                </a:solidFill>
+                <a:latin typeface="Consolas"/>
+              </a:rPr>
+              <a:t>{</a:t>
+            </a:r>
+          </a:p>
+          <a:p>
+            <a:pPr>
+              <a:spcBef>
+                <a:spcPts val="0"/>
+              </a:spcBef>
+              <a:spcAft>
+                <a:spcPts val="0"/>
+              </a:spcAft>
+            </a:pPr>
+            <a:r>
+              <a:rPr sz="900">
+                <a:solidFill>
+                  <a:srgbClr val="2D2D2D"/>
+                </a:solidFill>
+                <a:latin typeface="Consolas"/>
+              </a:rPr>
+              <a:t>    </a:t>
+            </a:r>
+            <a:r>
+              <a:rPr sz="900">
+                <a:solidFill>
+                  <a:srgbClr val="902000"/>
+                </a:solidFill>
+                <a:latin typeface="Consolas"/>
+              </a:rPr>
+              <a:t>"messages"</a:t>
+            </a:r>
+            <a:r>
+              <a:rPr sz="900">
+                <a:solidFill>
+                  <a:srgbClr val="06287E"/>
+                </a:solidFill>
+                <a:latin typeface="Consolas"/>
+              </a:rPr>
+              <a:t>:</a:t>
+            </a:r>
+            <a:r>
+              <a:rPr sz="900">
+                <a:solidFill>
+                  <a:srgbClr val="2D2D2D"/>
+                </a:solidFill>
+                <a:latin typeface="Consolas"/>
+              </a:rPr>
+              <a:t> </a:t>
+            </a:r>
+            <a:r>
+              <a:rPr sz="900">
+                <a:solidFill>
+                  <a:srgbClr val="4070A0"/>
+                </a:solidFill>
+                <a:latin typeface="Consolas"/>
+              </a:rPr>
+              <a:t>"&lt;rendered flash message HTML&gt;"</a:t>
+            </a:r>
+            <a:r>
+              <a:rPr sz="900">
+                <a:solidFill>
+                  <a:srgbClr val="06287E"/>
+                </a:solidFill>
+                <a:latin typeface="Consolas"/>
+              </a:rPr>
+              <a:t>,</a:t>
+            </a:r>
+          </a:p>
+          <a:p>
+            <a:pPr>
+              <a:spcBef>
+                <a:spcPts val="0"/>
+              </a:spcBef>
+              <a:spcAft>
+                <a:spcPts val="0"/>
+              </a:spcAft>
+            </a:pPr>
+            <a:r>
+              <a:rPr sz="900">
+                <a:solidFill>
+                  <a:srgbClr val="2D2D2D"/>
+                </a:solidFill>
+                <a:latin typeface="Consolas"/>
+              </a:rPr>
+              <a:t>    </a:t>
+            </a:r>
+            <a:r>
+              <a:rPr sz="900">
+                <a:solidFill>
+                  <a:srgbClr val="902000"/>
+                </a:solidFill>
+                <a:latin typeface="Consolas"/>
+              </a:rPr>
+              <a:t>"content"</a:t>
+            </a:r>
+            <a:r>
+              <a:rPr sz="900">
+                <a:solidFill>
+                  <a:srgbClr val="06287E"/>
+                </a:solidFill>
+                <a:latin typeface="Consolas"/>
+              </a:rPr>
+              <a:t>:</a:t>
+            </a:r>
+            <a:r>
+              <a:rPr sz="900">
+                <a:solidFill>
+                  <a:srgbClr val="2D2D2D"/>
+                </a:solidFill>
+                <a:latin typeface="Consolas"/>
+              </a:rPr>
+              <a:t> </a:t>
+            </a:r>
+            <a:r>
+              <a:rPr sz="900">
+                <a:solidFill>
+                  <a:srgbClr val="4070A0"/>
+                </a:solidFill>
+                <a:latin typeface="Consolas"/>
+              </a:rPr>
+              <a:t>"&lt;rendered HTML fragment to replace in the DOM&gt;"</a:t>
+            </a:r>
+          </a:p>
+          <a:p>
+            <a:pPr>
+              <a:spcBef>
+                <a:spcPts val="0"/>
+              </a:spcBef>
+              <a:spcAft>
+                <a:spcPts val="0"/>
+              </a:spcAft>
+            </a:pPr>
+            <a:r>
+              <a:rPr sz="900">
+                <a:solidFill>
+                  <a:srgbClr val="06287E"/>
+                </a:solidFill>
+                <a:latin typeface="Consolas"/>
+              </a:rPr>
+              <a:t>}</a:t>
+            </a:r>
+          </a:p>
+          <a:p>
+            <a:pPr>
+              <a:spcAft>
+                <a:spcPts val="400"/>
+              </a:spcAft>
+              <a:defRPr sz="1500">
+                <a:solidFill>
+                  <a:srgbClr val="1A1A1A"/>
+                </a:solidFill>
+              </a:defRPr>
+            </a:pPr>
+            <a:r>
+              <a:t>• messages — Rendered via @ShopUi/components/organisms/flash-message-list/flash-message-list.twig . Dispatched as a DOM event for the flash message component to pick up.</a:t>
+            </a:r>
+          </a:p>
+          <a:p>
+            <a:pPr>
+              <a:spcAft>
+                <a:spcPts val="400"/>
+              </a:spcAft>
+              <a:defRPr sz="1500">
+                <a:solidFill>
+                  <a:srgbClr val="1A1A1A"/>
+                </a:solidFill>
+              </a:defRPr>
+            </a:pPr>
+            <a:r>
+              <a:t>• content — The re-rendered page fragment. The ajax-renderer inserts this into the target element.</a:t>
+            </a:r>
+          </a:p>
+          <a:p>
+            <a:pPr>
+              <a:spcBef>
+                <a:spcPts val="1200"/>
+              </a:spcBef>
+              <a:spcAft>
+                <a:spcPts val="600"/>
+              </a:spcAft>
+              <a:defRPr sz="2000" b="1">
+                <a:solidFill>
+                  <a:srgbClr val="1A1A1A"/>
+                </a:solidFill>
+              </a:defRPr>
+            </a:pPr>
+            <a:r>
+              <a:t>Twig Integration</a:t>
+            </a:r>
+          </a:p>
+          <a:p>
+            <a:pPr>
+              <a:spcAft>
+                <a:spcPts val="800"/>
+              </a:spcAft>
+              <a:defRPr sz="1600">
+                <a:solidFill>
+                  <a:srgbClr val="1A1A1A"/>
+                </a:solidFill>
+              </a:defRPr>
+            </a:pPr>
+            <a:r>
+              <a:t>The template includes the AJAX trio after the content wrapper:</a:t>
+            </a:r>
+          </a:p>
+        </p:txBody>
+      </p:sp>
+    </p:spTree>
+  </p:cSld>
+  <p:clrMapOvr>
+    <a:masterClrMapping/>
+  </p:clrMapOvr>
+</p:sld>
+</file>
+
+<file path=ppt/slides/slide208.xml><?xml version="1.0" encoding="utf-8"?>
+<p:sld xmlns:a="http://schemas.openxmlformats.org/drawingml/2006/main" xmlns:p="http://schemas.openxmlformats.org/presentationml/2006/main" xmlns:r="http://schemas.openxmlformats.org/officeDocument/2006/relationships">
+  <p:cSld>
+    <p:spTree>
+      <p:nvGrpSpPr>
+        <p:cNvPr id="1" name=""/>
+        <p:cNvGrpSpPr/>
+        <p:nvPr/>
+      </p:nvGrpSpPr>
+      <p:grpSpPr/>
+      <p:sp>
+        <p:nvSpPr>
+          <p:cNvPr id="2" name="TextBox 1"/>
+          <p:cNvSpPr txBox="1"/>
+          <p:nvPr/>
+        </p:nvSpPr>
+        <p:spPr>
+          <a:xfrm>
+            <a:off x="640080" y="365760"/>
+            <a:ext cx="10881360" cy="731520"/>
+          </a:xfrm>
+          <a:prstGeom prst="rect">
+            <a:avLst/>
+          </a:prstGeom>
+          <a:noFill/>
+        </p:spPr>
+        <p:txBody>
+          <a:bodyPr wrap="square">
+            <a:spAutoFit/>
+          </a:bodyPr>
+          <a:lstStyle/>
+          <a:p>
+            <a:pPr>
+              <a:defRPr sz="2800" b="1">
+                <a:solidFill>
+                  <a:srgbClr val="00A89B"/>
+                </a:solidFill>
+              </a:defRPr>
+            </a:pPr>
+            <a:r>
+              <a:t>The JSON Response Contract (cont.)</a:t>
+            </a:r>
+          </a:p>
+        </p:txBody>
+      </p:sp>
+      <p:sp>
+        <p:nvSpPr>
+          <p:cNvPr id="3" name="Rectangle 2"/>
+          <p:cNvSpPr/>
+          <p:nvPr/>
+        </p:nvSpPr>
+        <p:spPr>
+          <a:xfrm>
+            <a:off x="640080" y="1051560"/>
+            <a:ext cx="1828800" cy="25400"/>
+          </a:xfrm>
+          <a:prstGeom prst="rect">
+            <a:avLst/>
+          </a:prstGeom>
+          <a:solidFill>
+            <a:srgbClr val="00A89B"/>
+          </a:solidFill>
+          <a:ln>
+            <a:noFill/>
+          </a:ln>
+        </p:spPr>
+        <p:style>
+          <a:lnRef idx="1">
+            <a:schemeClr val="accent1"/>
+          </a:lnRef>
+          <a:fillRef idx="3">
+            <a:schemeClr val="accent1"/>
+          </a:fillRef>
+          <a:effectRef idx="2">
+            <a:schemeClr val="accent1"/>
+          </a:effectRef>
+          <a:fontRef idx="minor">
+            <a:schemeClr val="lt1"/>
+          </a:fontRef>
+        </p:style>
+        <p:txBody>
+          <a:bodyPr rtlCol="0" anchor="ctr"/>
+          <a:lstStyle/>
+          <a:p>
+            <a:pPr algn="ctr"/>
+          </a:p>
+        </p:txBody>
+      </p:sp>
+      <p:sp>
+        <p:nvSpPr>
+          <p:cNvPr id="4" name="TextBox 3"/>
+          <p:cNvSpPr txBox="1"/>
+          <p:nvPr/>
+        </p:nvSpPr>
+        <p:spPr>
+          <a:xfrm>
+            <a:off x="640080" y="1371600"/>
+            <a:ext cx="10881360" cy="5029200"/>
+          </a:xfrm>
+          <a:prstGeom prst="rect">
+            <a:avLst/>
+          </a:prstGeom>
+          <a:noFill/>
+        </p:spPr>
+        <p:txBody>
+          <a:bodyPr wrap="square">
+            <a:spAutoFit/>
+          </a:bodyPr>
+          <a:lstStyle/>
+          <a:p>
+            <a:pPr>
+              <a:spcBef>
+                <a:spcPts val="0"/>
+              </a:spcBef>
+              <a:spcAft>
+                <a:spcPts val="0"/>
+              </a:spcAft>
+            </a:pPr>
+            <a:r>
+              <a:rPr sz="900">
+                <a:solidFill>
+                  <a:srgbClr val="2D2D2D"/>
+                </a:solidFill>
+                <a:latin typeface="Consolas"/>
+              </a:rPr>
+              <a:t>{# Content area that gets replaced #}</a:t>
+            </a:r>
+          </a:p>
+          <a:p>
+            <a:pPr>
+              <a:spcBef>
+                <a:spcPts val="0"/>
+              </a:spcBef>
+              <a:spcAft>
+                <a:spcPts val="0"/>
+              </a:spcAft>
+            </a:pPr>
+            <a:r>
+              <a:rPr sz="900">
+                <a:solidFill>
+                  <a:srgbClr val="2D2D2D"/>
+                </a:solidFill>
+                <a:latin typeface="Consolas"/>
+              </a:rPr>
+              <a:t>&lt;div class="{{ ajaxContentClass }}"&gt;</a:t>
+            </a:r>
+          </a:p>
+          <a:p>
+            <a:pPr>
+              <a:spcBef>
+                <a:spcPts val="0"/>
+              </a:spcBef>
+              <a:spcAft>
+                <a:spcPts val="0"/>
+              </a:spcAft>
+            </a:pPr>
+            <a:r>
+              <a:rPr sz="900">
+                <a:solidFill>
+                  <a:srgbClr val="2D2D2D"/>
+                </a:solidFill>
+                <a:latin typeface="Consolas"/>
+              </a:rPr>
+              <a:t>    {# ... table, form, loader ... #}</a:t>
+            </a:r>
+          </a:p>
+          <a:p>
+            <a:pPr>
+              <a:spcBef>
+                <a:spcPts val="0"/>
+              </a:spcBef>
+              <a:spcAft>
+                <a:spcPts val="0"/>
+              </a:spcAft>
+            </a:pPr>
+            <a:r>
+              <a:rPr sz="900">
+                <a:solidFill>
+                  <a:srgbClr val="2D2D2D"/>
+                </a:solidFill>
+                <a:latin typeface="Consolas"/>
+              </a:rPr>
+              <a:t>&lt;/div&gt;</a:t>
+            </a:r>
+          </a:p>
+          <a:p>
+            <a:pPr>
+              <a:spcBef>
+                <a:spcPts val="0"/>
+              </a:spcBef>
+              <a:spcAft>
+                <a:spcPts val="0"/>
+              </a:spcAft>
+            </a:pPr>
+            <a:r>
+              <a:rPr sz="900">
+                <a:latin typeface="Consolas"/>
+              </a:rPr>
+              <a:t> </a:t>
+            </a:r>
+          </a:p>
+          <a:p>
+            <a:pPr>
+              <a:spcBef>
+                <a:spcPts val="0"/>
+              </a:spcBef>
+              <a:spcAft>
+                <a:spcPts val="0"/>
+              </a:spcAft>
+            </a:pPr>
+            <a:r>
+              <a:rPr sz="900">
+                <a:solidFill>
+                  <a:srgbClr val="2D2D2D"/>
+                </a:solidFill>
+                <a:latin typeface="Consolas"/>
+              </a:rPr>
+              <a:t>{# AJAX components #}</a:t>
+            </a:r>
+          </a:p>
+          <a:p>
+            <a:pPr>
+              <a:spcBef>
+                <a:spcPts val="0"/>
+              </a:spcBef>
+              <a:spcAft>
+                <a:spcPts val="0"/>
+              </a:spcAft>
+            </a:pPr>
+            <a:r>
+              <a:rPr sz="900">
+                <a:solidFill>
+                  <a:srgbClr val="2D2D2D"/>
+                </a:solidFill>
+                <a:latin typeface="Consolas"/>
+              </a:rPr>
+              <a:t>{% include molecule('ajax-provider') with { class: ajaxProviderClass, attributes: { method: 'POST' } } only %}</a:t>
+            </a:r>
+          </a:p>
+          <a:p>
+            <a:pPr>
+              <a:spcBef>
+                <a:spcPts val="0"/>
+              </a:spcBef>
+              <a:spcAft>
+                <a:spcPts val="0"/>
+              </a:spcAft>
+            </a:pPr>
+            <a:r>
+              <a:rPr sz="900">
+                <a:solidFill>
+                  <a:srgbClr val="2D2D2D"/>
+                </a:solidFill>
+                <a:latin typeface="Consolas"/>
+              </a:rPr>
+              <a:t>{% include molecule('ajax-renderer') with { attributes: { 'provider-class-name': ajaxProviderClass, 'target-class-name': ajaxContentClass, 'mount-after-render': true } } only %}</a:t>
+            </a:r>
+          </a:p>
+          <a:p>
+            <a:pPr>
+              <a:spcBef>
+                <a:spcPts val="0"/>
+              </a:spcBef>
+              <a:spcAft>
+                <a:spcPts val="0"/>
+              </a:spcAft>
+            </a:pPr>
+            <a:r>
+              <a:rPr sz="900">
+                <a:solidFill>
+                  <a:srgbClr val="2D2D2D"/>
+                </a:solidFill>
+                <a:latin typeface="Consolas"/>
+              </a:rPr>
+              <a:t>{% include molecule('ajax-form-submitter') with { attributes: { 'trigger-attribute': 'data-contact-request-ajax-submit', 'provider-class-name': ajaxProviderClass } } only %}</a:t>
+            </a:r>
+          </a:p>
+          <a:p>
+            <a:pPr>
+              <a:spcAft>
+                <a:spcPts val="800"/>
+              </a:spcAft>
+              <a:defRPr sz="1600">
+                <a:solidFill>
+                  <a:srgbClr val="1A1A1A"/>
+                </a:solidFill>
+              </a:defRPr>
+            </a:pPr>
+            <a:r>
+              <a:t>Form buttons use data-contact-request-ajax-submit and formaction to point to the async endpoint:</a:t>
+            </a:r>
+          </a:p>
+          <a:p>
+            <a:pPr>
+              <a:spcBef>
+                <a:spcPts val="0"/>
+              </a:spcBef>
+              <a:spcAft>
+                <a:spcPts val="0"/>
+              </a:spcAft>
+            </a:pPr>
+            <a:r>
+              <a:rPr sz="900" b="1">
+                <a:solidFill>
+                  <a:srgbClr val="007020"/>
+                </a:solidFill>
+                <a:latin typeface="Consolas"/>
+              </a:rPr>
+              <a:t>&lt;button</a:t>
+            </a:r>
+            <a:r>
+              <a:rPr sz="900">
+                <a:solidFill>
+                  <a:srgbClr val="007020"/>
+                </a:solidFill>
+                <a:latin typeface="Consolas"/>
+              </a:rPr>
+              <a:t> data-contact-request-ajax-submit formaction=</a:t>
+            </a:r>
+            <a:r>
+              <a:rPr sz="900">
+                <a:solidFill>
+                  <a:srgbClr val="4070A0"/>
+                </a:solidFill>
+                <a:latin typeface="Consolas"/>
+              </a:rPr>
+              <a:t>"/customer/contact-requests/async/add"</a:t>
+            </a:r>
+            <a:r>
+              <a:rPr sz="900" b="1">
+                <a:solidFill>
+                  <a:srgbClr val="007020"/>
+                </a:solidFill>
+                <a:latin typeface="Consolas"/>
+              </a:rPr>
+              <a:t>&gt;</a:t>
+            </a:r>
+            <a:r>
+              <a:rPr sz="900">
+                <a:solidFill>
+                  <a:srgbClr val="2D2D2D"/>
+                </a:solidFill>
+                <a:latin typeface="Consolas"/>
+              </a:rPr>
+              <a:t>Add Contact Request</a:t>
+            </a:r>
+            <a:r>
+              <a:rPr sz="900" b="1">
+                <a:solidFill>
+                  <a:srgbClr val="007020"/>
+                </a:solidFill>
+                <a:latin typeface="Consolas"/>
+              </a:rPr>
+              <a:t>&lt;/button&gt;</a:t>
+            </a:r>
+          </a:p>
+          <a:p>
+            <a:pPr>
+              <a:spcBef>
+                <a:spcPts val="0"/>
+              </a:spcBef>
+              <a:spcAft>
+                <a:spcPts val="0"/>
+              </a:spcAft>
+            </a:pPr>
+            <a:r>
+              <a:rPr sz="900" b="1">
+                <a:solidFill>
+                  <a:srgbClr val="007020"/>
+                </a:solidFill>
+                <a:latin typeface="Consolas"/>
+              </a:rPr>
+              <a:t>&lt;button</a:t>
+            </a:r>
+            <a:r>
+              <a:rPr sz="900">
+                <a:solidFill>
+                  <a:srgbClr val="007020"/>
+                </a:solidFill>
+                <a:latin typeface="Consolas"/>
+              </a:rPr>
+              <a:t> data-contact-request-ajax-submit formaction=</a:t>
+            </a:r>
+            <a:r>
+              <a:rPr sz="900">
+                <a:solidFill>
+                  <a:srgbClr val="4070A0"/>
+                </a:solidFill>
+                <a:latin typeface="Consolas"/>
+              </a:rPr>
+              <a:t>"/customer/contact-requests/async/delete"</a:t>
+            </a:r>
+            <a:r>
+              <a:rPr sz="900" b="1">
+                <a:solidFill>
+                  <a:srgbClr val="007020"/>
+                </a:solidFill>
+                <a:latin typeface="Consolas"/>
+              </a:rPr>
+              <a:t>&gt;</a:t>
+            </a:r>
+            <a:r>
+              <a:rPr sz="900">
+                <a:solidFill>
+                  <a:srgbClr val="2D2D2D"/>
+                </a:solidFill>
+                <a:latin typeface="Consolas"/>
+              </a:rPr>
+              <a:t>Delete</a:t>
+            </a:r>
+            <a:r>
+              <a:rPr sz="900" b="1">
+                <a:solidFill>
+                  <a:srgbClr val="007020"/>
+                </a:solidFill>
+                <a:latin typeface="Consolas"/>
+              </a:rPr>
+              <a:t>&lt;/button&gt;</a:t>
+            </a:r>
+          </a:p>
+        </p:txBody>
+      </p:sp>
+    </p:spTree>
+  </p:cSld>
+  <p:clrMapOvr>
+    <a:masterClrMapping/>
+  </p:clrMapOvr>
+</p:sld>
+</file>
+
+<file path=ppt/slides/slide209.xml><?xml version="1.0" encoding="utf-8"?>
 <p:sld xmlns:a="http://schemas.openxmlformats.org/drawingml/2006/main" xmlns:p="http://schemas.openxmlformats.org/presentationml/2006/main" xmlns:r="http://schemas.openxmlformats.org/officeDocument/2006/relationships">
   <p:cSld>
     <p:spTree>

--- a/guides-pptx/spryker-academy-fundamental.pptx
+++ b/guides-pptx/spryker-academy-fundamental.pptx
@@ -8339,6 +8339,21 @@
               </a:defRPr>
             </a:pPr>
             <a:r>
+              <a:t>AddTemplateTest checks this step, and IndexControllerAddActionTest checks the controller above it.</a:t>
+            </a:r>
+          </a:p>
+          <a:p>
+            <a:pPr>
+              <a:spcAft>
+                <a:spcPts val="800"/>
+              </a:spcAft>
+              <a:defRPr sz="1600">
+                <a:solidFill>
+                  <a:srgbClr val="1A1A1A"/>
+                </a:solidFill>
+              </a:defRPr>
+            </a:pPr>
+            <a:r>
               <a:t>Clear cache:</a:t>
             </a:r>
           </a:p>
@@ -8977,7 +8992,7 @@
               </a:defRPr>
             </a:pPr>
             <a:r>
-              <a:t>This tests the ContactRequestReader, the ContactRequestWriter and the ContactRequestFacade. All tests should pass if your implementation is correct.</a:t>
+              <a:t>This tests the ContactRequestReader, the ContactRequestWriter, the ContactRequestFacade, addAction() on the IndexController and the add.twig template. All tests should pass if your implementation is correct.</a:t>
             </a:r>
           </a:p>
         </p:txBody>
@@ -21662,26 +21677,26 @@
                 </a:solidFill>
                 <a:latin typeface="Consolas"/>
               </a:rPr>
-              <a:t>   and Communication layer (CommunicationFactory, IndexController, ContactRequestController with an add</a:t>
-            </a:r>
-          </a:p>
-          <a:p>
-            <a:pPr>
-              <a:spcBef>
-                <a:spcPts val="0"/>
-              </a:spcBef>
-              <a:spcAft>
-                <a:spcPts val="0"/>
-              </a:spcAft>
-            </a:pPr>
-            <a:r>
-              <a:rPr sz="900">
-                <a:solidFill>
-                  <a:srgbClr val="2D2D2D"/>
-                </a:solidFill>
-                <a:latin typeface="Consolas"/>
-              </a:rPr>
-              <a:t>   form page at /contact-request/contact-request/add, GatewayController).</a:t>
+              <a:t>   and Communication layer (CommunicationFactory, IndexController with indexAction() and an</a:t>
+            </a:r>
+          </a:p>
+          <a:p>
+            <a:pPr>
+              <a:spcBef>
+                <a:spcPts val="0"/>
+              </a:spcBef>
+              <a:spcAft>
+                <a:spcPts val="0"/>
+              </a:spcAft>
+            </a:pPr>
+            <a:r>
+              <a:rPr sz="900">
+                <a:solidFill>
+                  <a:srgbClr val="2D2D2D"/>
+                </a:solidFill>
+                <a:latin typeface="Consolas"/>
+              </a:rPr>
+              <a:t>   addAction() add form page at /contact-request/index/add, GatewayController).</a:t>
             </a:r>
           </a:p>
           <a:p>
@@ -22498,7 +22513,7 @@
               </a:defRPr>
             </a:pPr>
             <a:r>
-              <a:t>• http://backoffice.eu.spryker.local/contact-request/contact-request/add creates a contact request.</a:t>
+              <a:t>• http://backoffice.eu.spryker.local/contact-request/index/add creates a contact request.</a:t>
             </a:r>
           </a:p>
           <a:p>

--- a/guides-pptx/spryker-academy-fundamental.pptx
+++ b/guides-pptx/spryker-academy-fundamental.pptx
@@ -8992,7 +8992,7 @@
               </a:defRPr>
             </a:pPr>
             <a:r>
-              <a:t>This tests the ContactRequestReader, the ContactRequestWriter, the ContactRequestFacade, addAction() on the IndexController and the add.twig template. All tests should pass if your implementation is correct.</a:t>
+              <a:t>Every step of this exercise is covered: the two transfer definitions, the Persistence Factory, the Repository (including the Criteria::LIKE partial match), the EntityManager, the Writer, the Reader, the Facade, addAction() and add.twig . All tests should pass if your implementation is correct.</a:t>
             </a:r>
           </a:p>
         </p:txBody>
